--- a/Module3_exponential_growth/2.Exponential Growth.pptx
+++ b/Module3_exponential_growth/2.Exponential Growth.pptx
@@ -5,10 +5,10 @@
     <p:sldMasterId id="2147483653" r:id="rId1"/>
   </p:sldMasterIdLst>
   <p:notesMasterIdLst>
-    <p:notesMasterId r:id="rId15"/>
+    <p:notesMasterId r:id="rId17"/>
   </p:notesMasterIdLst>
   <p:handoutMasterIdLst>
-    <p:handoutMasterId r:id="rId16"/>
+    <p:handoutMasterId r:id="rId18"/>
   </p:handoutMasterIdLst>
   <p:sldIdLst>
     <p:sldId id="297" r:id="rId2"/>
@@ -17,13 +17,15 @@
     <p:sldId id="320" r:id="rId5"/>
     <p:sldId id="323" r:id="rId6"/>
     <p:sldId id="324" r:id="rId7"/>
-    <p:sldId id="326" r:id="rId8"/>
+    <p:sldId id="340" r:id="rId8"/>
     <p:sldId id="333" r:id="rId9"/>
-    <p:sldId id="329" r:id="rId10"/>
-    <p:sldId id="336" r:id="rId11"/>
-    <p:sldId id="337" r:id="rId12"/>
-    <p:sldId id="338" r:id="rId13"/>
-    <p:sldId id="339" r:id="rId14"/>
+    <p:sldId id="326" r:id="rId10"/>
+    <p:sldId id="329" r:id="rId11"/>
+    <p:sldId id="341" r:id="rId12"/>
+    <p:sldId id="336" r:id="rId13"/>
+    <p:sldId id="337" r:id="rId14"/>
+    <p:sldId id="338" r:id="rId15"/>
+    <p:sldId id="339" r:id="rId16"/>
   </p:sldIdLst>
   <p:sldSz cx="9144000" cy="6858000" type="screen4x3"/>
   <p:notesSz cx="7315200" cy="9601200"/>
@@ -2296,6 +2298,279 @@
       </p:grpSpPr>
       <p:sp>
         <p:nvSpPr>
+          <p:cNvPr id="120834" name="Slide Image Placeholder 1">
+            <a:extLst>
+              <a:ext uri="{FF2B5EF4-FFF2-40B4-BE49-F238E27FC236}">
+                <a16:creationId xmlns:a16="http://schemas.microsoft.com/office/drawing/2014/main" id="{417F4684-97D6-4888-84C1-BE490538FAD5}"/>
+              </a:ext>
+            </a:extLst>
+          </p:cNvPr>
+          <p:cNvSpPr>
+            <a:spLocks noGrp="1" noRot="1" noChangeAspect="1" noTextEdit="1"/>
+          </p:cNvSpPr>
+          <p:nvPr>
+            <p:ph type="sldImg"/>
+          </p:nvPr>
+        </p:nvSpPr>
+        <p:spPr>
+          <a:ln/>
+        </p:spPr>
+      </p:sp>
+      <p:sp>
+        <p:nvSpPr>
+          <p:cNvPr id="120835" name="Notes Placeholder 2">
+            <a:extLst>
+              <a:ext uri="{FF2B5EF4-FFF2-40B4-BE49-F238E27FC236}">
+                <a16:creationId xmlns:a16="http://schemas.microsoft.com/office/drawing/2014/main" id="{C77BE1F4-7D75-4A20-BCA8-5A33491FFF7D}"/>
+              </a:ext>
+            </a:extLst>
+          </p:cNvPr>
+          <p:cNvSpPr>
+            <a:spLocks noGrp="1"/>
+          </p:cNvSpPr>
+          <p:nvPr>
+            <p:ph type="body" idx="1"/>
+          </p:nvPr>
+        </p:nvSpPr>
+        <p:spPr>
+          <a:noFill/>
+          <a:ln/>
+          <a:extLst>
+            <a:ext uri="{909E8E84-426E-40DD-AFC4-6F175D3DCCD1}">
+              <a14:hiddenFill xmlns:a14="http://schemas.microsoft.com/office/drawing/2010/main">
+                <a:solidFill>
+                  <a:srgbClr val="FFFFFF"/>
+                </a:solidFill>
+              </a14:hiddenFill>
+            </a:ext>
+            <a:ext uri="{91240B29-F687-4F45-9708-019B960494DF}">
+              <a14:hiddenLine xmlns:a14="http://schemas.microsoft.com/office/drawing/2010/main" w="9525">
+                <a:solidFill>
+                  <a:srgbClr val="000000"/>
+                </a:solidFill>
+                <a:miter lim="800000"/>
+                <a:headEnd/>
+                <a:tailEnd/>
+              </a14:hiddenLine>
+            </a:ext>
+          </a:extLst>
+        </p:spPr>
+        <p:txBody>
+          <a:bodyPr/>
+          <a:lstStyle/>
+          <a:p>
+            <a:pPr eaLnBrk="1" hangingPunct="1"/>
+            <a:endParaRPr lang="en-US" altLang="en-US">
+              <a:latin typeface="Arial" panose="020B0604020202020204" pitchFamily="34" charset="0"/>
+            </a:endParaRPr>
+          </a:p>
+        </p:txBody>
+      </p:sp>
+      <p:sp>
+        <p:nvSpPr>
+          <p:cNvPr id="120836" name="Slide Number Placeholder 3">
+            <a:extLst>
+              <a:ext uri="{FF2B5EF4-FFF2-40B4-BE49-F238E27FC236}">
+                <a16:creationId xmlns:a16="http://schemas.microsoft.com/office/drawing/2014/main" id="{E2E6A30C-40CF-4218-B702-727ED19C7CC9}"/>
+              </a:ext>
+            </a:extLst>
+          </p:cNvPr>
+          <p:cNvSpPr>
+            <a:spLocks noGrp="1"/>
+          </p:cNvSpPr>
+          <p:nvPr>
+            <p:ph type="sldNum" sz="quarter" idx="5"/>
+          </p:nvPr>
+        </p:nvSpPr>
+        <p:spPr>
+          <a:noFill/>
+          <a:ln/>
+          <a:extLst>
+            <a:ext uri="{909E8E84-426E-40DD-AFC4-6F175D3DCCD1}">
+              <a14:hiddenFill xmlns:a14="http://schemas.microsoft.com/office/drawing/2010/main">
+                <a:solidFill>
+                  <a:srgbClr val="FFFFFF"/>
+                </a:solidFill>
+              </a14:hiddenFill>
+            </a:ext>
+            <a:ext uri="{91240B29-F687-4F45-9708-019B960494DF}">
+              <a14:hiddenLine xmlns:a14="http://schemas.microsoft.com/office/drawing/2010/main" w="9525">
+                <a:solidFill>
+                  <a:srgbClr val="000000"/>
+                </a:solidFill>
+                <a:miter lim="800000"/>
+                <a:headEnd/>
+                <a:tailEnd/>
+              </a14:hiddenLine>
+            </a:ext>
+          </a:extLst>
+        </p:spPr>
+        <p:txBody>
+          <a:bodyPr/>
+          <a:lstStyle>
+            <a:lvl1pPr>
+              <a:spcBef>
+                <a:spcPct val="30000"/>
+              </a:spcBef>
+              <a:defRPr sz="1200">
+                <a:solidFill>
+                  <a:schemeClr val="tx1"/>
+                </a:solidFill>
+                <a:latin typeface="Arial" panose="020B0604020202020204" pitchFamily="34" charset="0"/>
+              </a:defRPr>
+            </a:lvl1pPr>
+            <a:lvl2pPr marL="742950" indent="-285750">
+              <a:spcBef>
+                <a:spcPct val="30000"/>
+              </a:spcBef>
+              <a:defRPr sz="1200">
+                <a:solidFill>
+                  <a:schemeClr val="tx1"/>
+                </a:solidFill>
+                <a:latin typeface="Arial" panose="020B0604020202020204" pitchFamily="34" charset="0"/>
+              </a:defRPr>
+            </a:lvl2pPr>
+            <a:lvl3pPr marL="1143000" indent="-228600">
+              <a:spcBef>
+                <a:spcPct val="30000"/>
+              </a:spcBef>
+              <a:defRPr sz="1200">
+                <a:solidFill>
+                  <a:schemeClr val="tx1"/>
+                </a:solidFill>
+                <a:latin typeface="Arial" panose="020B0604020202020204" pitchFamily="34" charset="0"/>
+              </a:defRPr>
+            </a:lvl3pPr>
+            <a:lvl4pPr marL="1600200" indent="-228600">
+              <a:spcBef>
+                <a:spcPct val="30000"/>
+              </a:spcBef>
+              <a:defRPr sz="1200">
+                <a:solidFill>
+                  <a:schemeClr val="tx1"/>
+                </a:solidFill>
+                <a:latin typeface="Arial" panose="020B0604020202020204" pitchFamily="34" charset="0"/>
+              </a:defRPr>
+            </a:lvl4pPr>
+            <a:lvl5pPr marL="2057400" indent="-228600">
+              <a:spcBef>
+                <a:spcPct val="30000"/>
+              </a:spcBef>
+              <a:defRPr sz="1200">
+                <a:solidFill>
+                  <a:schemeClr val="tx1"/>
+                </a:solidFill>
+                <a:latin typeface="Arial" panose="020B0604020202020204" pitchFamily="34" charset="0"/>
+              </a:defRPr>
+            </a:lvl5pPr>
+            <a:lvl6pPr marL="2514600" indent="-228600" eaLnBrk="0" fontAlgn="base" hangingPunct="0">
+              <a:spcBef>
+                <a:spcPct val="30000"/>
+              </a:spcBef>
+              <a:spcAft>
+                <a:spcPct val="0"/>
+              </a:spcAft>
+              <a:defRPr sz="1200">
+                <a:solidFill>
+                  <a:schemeClr val="tx1"/>
+                </a:solidFill>
+                <a:latin typeface="Arial" panose="020B0604020202020204" pitchFamily="34" charset="0"/>
+              </a:defRPr>
+            </a:lvl6pPr>
+            <a:lvl7pPr marL="2971800" indent="-228600" eaLnBrk="0" fontAlgn="base" hangingPunct="0">
+              <a:spcBef>
+                <a:spcPct val="30000"/>
+              </a:spcBef>
+              <a:spcAft>
+                <a:spcPct val="0"/>
+              </a:spcAft>
+              <a:defRPr sz="1200">
+                <a:solidFill>
+                  <a:schemeClr val="tx1"/>
+                </a:solidFill>
+                <a:latin typeface="Arial" panose="020B0604020202020204" pitchFamily="34" charset="0"/>
+              </a:defRPr>
+            </a:lvl7pPr>
+            <a:lvl8pPr marL="3429000" indent="-228600" eaLnBrk="0" fontAlgn="base" hangingPunct="0">
+              <a:spcBef>
+                <a:spcPct val="30000"/>
+              </a:spcBef>
+              <a:spcAft>
+                <a:spcPct val="0"/>
+              </a:spcAft>
+              <a:defRPr sz="1200">
+                <a:solidFill>
+                  <a:schemeClr val="tx1"/>
+                </a:solidFill>
+                <a:latin typeface="Arial" panose="020B0604020202020204" pitchFamily="34" charset="0"/>
+              </a:defRPr>
+            </a:lvl8pPr>
+            <a:lvl9pPr marL="3886200" indent="-228600" eaLnBrk="0" fontAlgn="base" hangingPunct="0">
+              <a:spcBef>
+                <a:spcPct val="30000"/>
+              </a:spcBef>
+              <a:spcAft>
+                <a:spcPct val="0"/>
+              </a:spcAft>
+              <a:defRPr sz="1200">
+                <a:solidFill>
+                  <a:schemeClr val="tx1"/>
+                </a:solidFill>
+                <a:latin typeface="Arial" panose="020B0604020202020204" pitchFamily="34" charset="0"/>
+              </a:defRPr>
+            </a:lvl9pPr>
+          </a:lstStyle>
+          <a:p>
+            <a:pPr>
+              <a:spcBef>
+                <a:spcPct val="0"/>
+              </a:spcBef>
+            </a:pPr>
+            <a:fld id="{9B85F23C-B340-4908-8442-29E4FD829268}" type="slidenum">
+              <a:rPr lang="en-US" altLang="en-US"/>
+              <a:pPr>
+                <a:spcBef>
+                  <a:spcPct val="0"/>
+                </a:spcBef>
+              </a:pPr>
+              <a:t>8</a:t>
+            </a:fld>
+            <a:endParaRPr lang="en-US" altLang="en-US"/>
+          </a:p>
+        </p:txBody>
+      </p:sp>
+    </p:spTree>
+    <p:extLst>
+      <p:ext uri="{BB962C8B-B14F-4D97-AF65-F5344CB8AC3E}">
+        <p14:creationId xmlns:p14="http://schemas.microsoft.com/office/powerpoint/2010/main" val="871424865"/>
+      </p:ext>
+    </p:extLst>
+  </p:cSld>
+  <p:clrMapOvr>
+    <a:masterClrMapping/>
+  </p:clrMapOvr>
+</p:notes>
+</file>
+
+<file path=ppt/notesSlides/notesSlide8.xml><?xml version="1.0" encoding="utf-8"?>
+<p:notes xmlns:a="http://schemas.openxmlformats.org/drawingml/2006/main" xmlns:r="http://schemas.openxmlformats.org/officeDocument/2006/relationships" xmlns:p="http://schemas.openxmlformats.org/presentationml/2006/main">
+  <p:cSld>
+    <p:spTree>
+      <p:nvGrpSpPr>
+        <p:cNvPr id="1" name=""/>
+        <p:cNvGrpSpPr/>
+        <p:nvPr/>
+      </p:nvGrpSpPr>
+      <p:grpSpPr>
+        <a:xfrm>
+          <a:off x="0" y="0"/>
+          <a:ext cx="0" cy="0"/>
+          <a:chOff x="0" y="0"/>
+          <a:chExt cx="0" cy="0"/>
+        </a:xfrm>
+      </p:grpSpPr>
+      <p:sp>
+        <p:nvSpPr>
           <p:cNvPr id="106498" name="Slide Image Placeholder 1">
             <a:extLst>
               <a:ext uri="{FF2B5EF4-FFF2-40B4-BE49-F238E27FC236}">
@@ -2531,275 +2806,7 @@
                   <a:spcPct val="0"/>
                 </a:spcBef>
               </a:pPr>
-              <a:t>7</a:t>
-            </a:fld>
-            <a:endParaRPr lang="en-US" altLang="en-US"/>
-          </a:p>
-        </p:txBody>
-      </p:sp>
-    </p:spTree>
-  </p:cSld>
-  <p:clrMapOvr>
-    <a:masterClrMapping/>
-  </p:clrMapOvr>
-</p:notes>
-</file>
-
-<file path=ppt/notesSlides/notesSlide8.xml><?xml version="1.0" encoding="utf-8"?>
-<p:notes xmlns:a="http://schemas.openxmlformats.org/drawingml/2006/main" xmlns:r="http://schemas.openxmlformats.org/officeDocument/2006/relationships" xmlns:p="http://schemas.openxmlformats.org/presentationml/2006/main">
-  <p:cSld>
-    <p:spTree>
-      <p:nvGrpSpPr>
-        <p:cNvPr id="1" name=""/>
-        <p:cNvGrpSpPr/>
-        <p:nvPr/>
-      </p:nvGrpSpPr>
-      <p:grpSpPr>
-        <a:xfrm>
-          <a:off x="0" y="0"/>
-          <a:ext cx="0" cy="0"/>
-          <a:chOff x="0" y="0"/>
-          <a:chExt cx="0" cy="0"/>
-        </a:xfrm>
-      </p:grpSpPr>
-      <p:sp>
-        <p:nvSpPr>
-          <p:cNvPr id="120834" name="Slide Image Placeholder 1">
-            <a:extLst>
-              <a:ext uri="{FF2B5EF4-FFF2-40B4-BE49-F238E27FC236}">
-                <a16:creationId xmlns:a16="http://schemas.microsoft.com/office/drawing/2014/main" id="{417F4684-97D6-4888-84C1-BE490538FAD5}"/>
-              </a:ext>
-            </a:extLst>
-          </p:cNvPr>
-          <p:cNvSpPr>
-            <a:spLocks noGrp="1" noRot="1" noChangeAspect="1" noTextEdit="1"/>
-          </p:cNvSpPr>
-          <p:nvPr>
-            <p:ph type="sldImg"/>
-          </p:nvPr>
-        </p:nvSpPr>
-        <p:spPr>
-          <a:ln/>
-        </p:spPr>
-      </p:sp>
-      <p:sp>
-        <p:nvSpPr>
-          <p:cNvPr id="120835" name="Notes Placeholder 2">
-            <a:extLst>
-              <a:ext uri="{FF2B5EF4-FFF2-40B4-BE49-F238E27FC236}">
-                <a16:creationId xmlns:a16="http://schemas.microsoft.com/office/drawing/2014/main" id="{C77BE1F4-7D75-4A20-BCA8-5A33491FFF7D}"/>
-              </a:ext>
-            </a:extLst>
-          </p:cNvPr>
-          <p:cNvSpPr>
-            <a:spLocks noGrp="1"/>
-          </p:cNvSpPr>
-          <p:nvPr>
-            <p:ph type="body" idx="1"/>
-          </p:nvPr>
-        </p:nvSpPr>
-        <p:spPr>
-          <a:noFill/>
-          <a:ln/>
-          <a:extLst>
-            <a:ext uri="{909E8E84-426E-40DD-AFC4-6F175D3DCCD1}">
-              <a14:hiddenFill xmlns:a14="http://schemas.microsoft.com/office/drawing/2010/main">
-                <a:solidFill>
-                  <a:srgbClr val="FFFFFF"/>
-                </a:solidFill>
-              </a14:hiddenFill>
-            </a:ext>
-            <a:ext uri="{91240B29-F687-4F45-9708-019B960494DF}">
-              <a14:hiddenLine xmlns:a14="http://schemas.microsoft.com/office/drawing/2010/main" w="9525">
-                <a:solidFill>
-                  <a:srgbClr val="000000"/>
-                </a:solidFill>
-                <a:miter lim="800000"/>
-                <a:headEnd/>
-                <a:tailEnd/>
-              </a14:hiddenLine>
-            </a:ext>
-          </a:extLst>
-        </p:spPr>
-        <p:txBody>
-          <a:bodyPr/>
-          <a:lstStyle/>
-          <a:p>
-            <a:pPr eaLnBrk="1" hangingPunct="1"/>
-            <a:endParaRPr lang="en-US" altLang="en-US">
-              <a:latin typeface="Arial" panose="020B0604020202020204" pitchFamily="34" charset="0"/>
-            </a:endParaRPr>
-          </a:p>
-        </p:txBody>
-      </p:sp>
-      <p:sp>
-        <p:nvSpPr>
-          <p:cNvPr id="120836" name="Slide Number Placeholder 3">
-            <a:extLst>
-              <a:ext uri="{FF2B5EF4-FFF2-40B4-BE49-F238E27FC236}">
-                <a16:creationId xmlns:a16="http://schemas.microsoft.com/office/drawing/2014/main" id="{E2E6A30C-40CF-4218-B702-727ED19C7CC9}"/>
-              </a:ext>
-            </a:extLst>
-          </p:cNvPr>
-          <p:cNvSpPr>
-            <a:spLocks noGrp="1"/>
-          </p:cNvSpPr>
-          <p:nvPr>
-            <p:ph type="sldNum" sz="quarter" idx="5"/>
-          </p:nvPr>
-        </p:nvSpPr>
-        <p:spPr>
-          <a:noFill/>
-          <a:ln/>
-          <a:extLst>
-            <a:ext uri="{909E8E84-426E-40DD-AFC4-6F175D3DCCD1}">
-              <a14:hiddenFill xmlns:a14="http://schemas.microsoft.com/office/drawing/2010/main">
-                <a:solidFill>
-                  <a:srgbClr val="FFFFFF"/>
-                </a:solidFill>
-              </a14:hiddenFill>
-            </a:ext>
-            <a:ext uri="{91240B29-F687-4F45-9708-019B960494DF}">
-              <a14:hiddenLine xmlns:a14="http://schemas.microsoft.com/office/drawing/2010/main" w="9525">
-                <a:solidFill>
-                  <a:srgbClr val="000000"/>
-                </a:solidFill>
-                <a:miter lim="800000"/>
-                <a:headEnd/>
-                <a:tailEnd/>
-              </a14:hiddenLine>
-            </a:ext>
-          </a:extLst>
-        </p:spPr>
-        <p:txBody>
-          <a:bodyPr/>
-          <a:lstStyle>
-            <a:lvl1pPr>
-              <a:spcBef>
-                <a:spcPct val="30000"/>
-              </a:spcBef>
-              <a:defRPr sz="1200">
-                <a:solidFill>
-                  <a:schemeClr val="tx1"/>
-                </a:solidFill>
-                <a:latin typeface="Arial" panose="020B0604020202020204" pitchFamily="34" charset="0"/>
-              </a:defRPr>
-            </a:lvl1pPr>
-            <a:lvl2pPr marL="742950" indent="-285750">
-              <a:spcBef>
-                <a:spcPct val="30000"/>
-              </a:spcBef>
-              <a:defRPr sz="1200">
-                <a:solidFill>
-                  <a:schemeClr val="tx1"/>
-                </a:solidFill>
-                <a:latin typeface="Arial" panose="020B0604020202020204" pitchFamily="34" charset="0"/>
-              </a:defRPr>
-            </a:lvl2pPr>
-            <a:lvl3pPr marL="1143000" indent="-228600">
-              <a:spcBef>
-                <a:spcPct val="30000"/>
-              </a:spcBef>
-              <a:defRPr sz="1200">
-                <a:solidFill>
-                  <a:schemeClr val="tx1"/>
-                </a:solidFill>
-                <a:latin typeface="Arial" panose="020B0604020202020204" pitchFamily="34" charset="0"/>
-              </a:defRPr>
-            </a:lvl3pPr>
-            <a:lvl4pPr marL="1600200" indent="-228600">
-              <a:spcBef>
-                <a:spcPct val="30000"/>
-              </a:spcBef>
-              <a:defRPr sz="1200">
-                <a:solidFill>
-                  <a:schemeClr val="tx1"/>
-                </a:solidFill>
-                <a:latin typeface="Arial" panose="020B0604020202020204" pitchFamily="34" charset="0"/>
-              </a:defRPr>
-            </a:lvl4pPr>
-            <a:lvl5pPr marL="2057400" indent="-228600">
-              <a:spcBef>
-                <a:spcPct val="30000"/>
-              </a:spcBef>
-              <a:defRPr sz="1200">
-                <a:solidFill>
-                  <a:schemeClr val="tx1"/>
-                </a:solidFill>
-                <a:latin typeface="Arial" panose="020B0604020202020204" pitchFamily="34" charset="0"/>
-              </a:defRPr>
-            </a:lvl5pPr>
-            <a:lvl6pPr marL="2514600" indent="-228600" eaLnBrk="0" fontAlgn="base" hangingPunct="0">
-              <a:spcBef>
-                <a:spcPct val="30000"/>
-              </a:spcBef>
-              <a:spcAft>
-                <a:spcPct val="0"/>
-              </a:spcAft>
-              <a:defRPr sz="1200">
-                <a:solidFill>
-                  <a:schemeClr val="tx1"/>
-                </a:solidFill>
-                <a:latin typeface="Arial" panose="020B0604020202020204" pitchFamily="34" charset="0"/>
-              </a:defRPr>
-            </a:lvl6pPr>
-            <a:lvl7pPr marL="2971800" indent="-228600" eaLnBrk="0" fontAlgn="base" hangingPunct="0">
-              <a:spcBef>
-                <a:spcPct val="30000"/>
-              </a:spcBef>
-              <a:spcAft>
-                <a:spcPct val="0"/>
-              </a:spcAft>
-              <a:defRPr sz="1200">
-                <a:solidFill>
-                  <a:schemeClr val="tx1"/>
-                </a:solidFill>
-                <a:latin typeface="Arial" panose="020B0604020202020204" pitchFamily="34" charset="0"/>
-              </a:defRPr>
-            </a:lvl7pPr>
-            <a:lvl8pPr marL="3429000" indent="-228600" eaLnBrk="0" fontAlgn="base" hangingPunct="0">
-              <a:spcBef>
-                <a:spcPct val="30000"/>
-              </a:spcBef>
-              <a:spcAft>
-                <a:spcPct val="0"/>
-              </a:spcAft>
-              <a:defRPr sz="1200">
-                <a:solidFill>
-                  <a:schemeClr val="tx1"/>
-                </a:solidFill>
-                <a:latin typeface="Arial" panose="020B0604020202020204" pitchFamily="34" charset="0"/>
-              </a:defRPr>
-            </a:lvl8pPr>
-            <a:lvl9pPr marL="3886200" indent="-228600" eaLnBrk="0" fontAlgn="base" hangingPunct="0">
-              <a:spcBef>
-                <a:spcPct val="30000"/>
-              </a:spcBef>
-              <a:spcAft>
-                <a:spcPct val="0"/>
-              </a:spcAft>
-              <a:defRPr sz="1200">
-                <a:solidFill>
-                  <a:schemeClr val="tx1"/>
-                </a:solidFill>
-                <a:latin typeface="Arial" panose="020B0604020202020204" pitchFamily="34" charset="0"/>
-              </a:defRPr>
-            </a:lvl9pPr>
-          </a:lstStyle>
-          <a:p>
-            <a:pPr>
-              <a:spcBef>
-                <a:spcPct val="0"/>
-              </a:spcBef>
-            </a:pPr>
-            <a:fld id="{9B85F23C-B340-4908-8442-29E4FD829268}" type="slidenum">
-              <a:rPr lang="en-US" altLang="en-US"/>
-              <a:pPr>
-                <a:spcBef>
-                  <a:spcPct val="0"/>
-                </a:spcBef>
-              </a:pPr>
-              <a:t>8</a:t>
+              <a:t>9</a:t>
             </a:fld>
             <a:endParaRPr lang="en-US" altLang="en-US"/>
           </a:p>
@@ -3067,7 +3074,7 @@
                   <a:spcPct val="0"/>
                 </a:spcBef>
               </a:pPr>
-              <a:t>9</a:t>
+              <a:t>10</a:t>
             </a:fld>
             <a:endParaRPr lang="en-US" altLang="en-US"/>
           </a:p>
@@ -8077,6 +8084,1354 @@
       </p:grpSpPr>
       <p:sp>
         <p:nvSpPr>
+          <p:cNvPr id="111618" name="Rectangle 2">
+            <a:extLst>
+              <a:ext uri="{FF2B5EF4-FFF2-40B4-BE49-F238E27FC236}">
+                <a16:creationId xmlns:a16="http://schemas.microsoft.com/office/drawing/2014/main" id="{DDB703DF-67CF-42C4-8D8E-955E4D00F8EA}"/>
+              </a:ext>
+            </a:extLst>
+          </p:cNvPr>
+          <p:cNvSpPr>
+            <a:spLocks noGrp="1" noChangeArrowheads="1"/>
+          </p:cNvSpPr>
+          <p:nvPr>
+            <p:ph type="title"/>
+          </p:nvPr>
+        </p:nvSpPr>
+        <p:spPr bwMode="auto">
+          <a:noFill/>
+          <a:extLst>
+            <a:ext uri="{909E8E84-426E-40DD-AFC4-6F175D3DCCD1}">
+              <a14:hiddenFill xmlns:a14="http://schemas.microsoft.com/office/drawing/2010/main">
+                <a:solidFill>
+                  <a:srgbClr val="FFFFFF"/>
+                </a:solidFill>
+              </a14:hiddenFill>
+            </a:ext>
+            <a:ext uri="{91240B29-F687-4F45-9708-019B960494DF}">
+              <a14:hiddenLine xmlns:a14="http://schemas.microsoft.com/office/drawing/2010/main" w="9525">
+                <a:solidFill>
+                  <a:srgbClr val="000000"/>
+                </a:solidFill>
+                <a:miter lim="800000"/>
+                <a:headEnd/>
+                <a:tailEnd/>
+              </a14:hiddenLine>
+            </a:ext>
+          </a:extLst>
+        </p:spPr>
+        <p:txBody>
+          <a:bodyPr vert="horz" wrap="square" lIns="91440" tIns="45720" rIns="91440" bIns="45720" numCol="1" anchor="t" anchorCtr="0" compatLnSpc="1">
+            <a:prstTxWarp prst="textNoShape">
+              <a:avLst/>
+            </a:prstTxWarp>
+          </a:bodyPr>
+          <a:lstStyle/>
+          <a:p>
+            <a:pPr eaLnBrk="1" hangingPunct="1"/>
+            <a:r>
+              <a:rPr lang="en-US" altLang="en-US" b="1" dirty="0"/>
+              <a:t>Integrat</a:t>
+            </a:r>
+            <a:r>
+              <a:rPr lang="en-US" altLang="en-US" dirty="0"/>
+              <a:t>e to get </a:t>
+            </a:r>
+            <a:r>
+              <a:rPr lang="en-US" altLang="en-US" dirty="0" err="1"/>
+              <a:t>Nt</a:t>
+            </a:r>
+            <a:endParaRPr lang="en-US" altLang="en-US" b="1" dirty="0"/>
+          </a:p>
+        </p:txBody>
+      </p:sp>
+      <mc:AlternateContent xmlns:mc="http://schemas.openxmlformats.org/markup-compatibility/2006" xmlns:a14="http://schemas.microsoft.com/office/drawing/2010/main">
+        <mc:Choice Requires="a14">
+          <p:sp>
+            <p:nvSpPr>
+              <p:cNvPr id="111619" name="Object 3">
+                <a:extLst>
+                  <a:ext uri="{FF2B5EF4-FFF2-40B4-BE49-F238E27FC236}">
+                    <a16:creationId xmlns:a16="http://schemas.microsoft.com/office/drawing/2014/main" id="{49B706E0-0423-4E28-8245-B27AF33E4E5B}"/>
+                  </a:ext>
+                </a:extLst>
+              </p:cNvPr>
+              <p:cNvSpPr txBox="1">
+                <a:spLocks noGrp="1"/>
+              </p:cNvSpPr>
+              <p:nvPr>
+                <p:ph idx="1"/>
+              </p:nvPr>
+            </p:nvSpPr>
+            <p:spPr bwMode="auto">
+              <a:xfrm>
+                <a:off x="457200" y="914400"/>
+                <a:ext cx="8229600" cy="4779963"/>
+              </a:xfrm>
+              <a:prstGeom prst="rect">
+                <a:avLst/>
+              </a:prstGeom>
+              <a:noFill/>
+              <a:ln>
+                <a:noFill/>
+              </a:ln>
+              <a:effectLst/>
+            </p:spPr>
+            <p:txBody>
+              <a:bodyPr>
+                <a:noAutofit/>
+              </a:bodyPr>
+              <a:lstStyle/>
+              <a:p>
+                <a:pPr>
+                  <a:buNone/>
+                </a:pPr>
+                <a14:m>
+                  <m:oMathPara xmlns:m="http://schemas.openxmlformats.org/officeDocument/2006/math">
+                    <m:oMathParaPr>
+                      <m:jc m:val="left"/>
+                    </m:oMathParaPr>
+                    <m:oMath>
+                      <m:r>
+                        <a:rPr lang="en-US" sz="3200" i="0">
+                          <a:solidFill>
+                            <a:srgbClr val="000000"/>
+                          </a:solidFill>
+                          <a:latin typeface="Cambria Math" panose="02040503050406030204" pitchFamily="18" charset="0"/>
+                        </a:rPr>
+                        <m:t> </m:t>
+                      </m:r>
+                      <m:f>
+                        <m:fPr>
+                          <m:ctrlPr>
+                            <a:rPr lang="en-US" sz="3200" i="1">
+                              <a:solidFill>
+                                <a:srgbClr val="000000"/>
+                              </a:solidFill>
+                              <a:latin typeface="Cambria Math" panose="02040503050406030204" pitchFamily="18" charset="0"/>
+                            </a:rPr>
+                          </m:ctrlPr>
+                        </m:fPr>
+                        <m:num>
+                          <m:r>
+                            <a:rPr lang="en-US" sz="3200" i="1">
+                              <a:solidFill>
+                                <a:srgbClr val="000000"/>
+                              </a:solidFill>
+                              <a:latin typeface="Cambria Math" panose="02040503050406030204" pitchFamily="18" charset="0"/>
+                            </a:rPr>
+                            <m:t>𝑑𝑁</m:t>
+                          </m:r>
+                        </m:num>
+                        <m:den>
+                          <m:r>
+                            <a:rPr lang="en-US" sz="3200" i="1">
+                              <a:solidFill>
+                                <a:srgbClr val="000000"/>
+                              </a:solidFill>
+                              <a:latin typeface="Cambria Math" panose="02040503050406030204" pitchFamily="18" charset="0"/>
+                            </a:rPr>
+                            <m:t>𝑑𝑡</m:t>
+                          </m:r>
+                        </m:den>
+                      </m:f>
+                      <m:r>
+                        <a:rPr lang="en-US" sz="3200" i="1">
+                          <a:solidFill>
+                            <a:srgbClr val="000000"/>
+                          </a:solidFill>
+                          <a:latin typeface="Cambria Math" panose="02040503050406030204" pitchFamily="18" charset="0"/>
+                        </a:rPr>
+                        <m:t>=</m:t>
+                      </m:r>
+                      <m:r>
+                        <a:rPr lang="en-US" sz="3200" i="1">
+                          <a:solidFill>
+                            <a:srgbClr val="000000"/>
+                          </a:solidFill>
+                          <a:latin typeface="Cambria Math" panose="02040503050406030204" pitchFamily="18" charset="0"/>
+                        </a:rPr>
+                        <m:t>𝑟</m:t>
+                      </m:r>
+                      <m:r>
+                        <a:rPr lang="en-US" sz="3200" i="1">
+                          <a:solidFill>
+                            <a:srgbClr val="000000"/>
+                          </a:solidFill>
+                          <a:latin typeface="Cambria Math" panose="02040503050406030204" pitchFamily="18" charset="0"/>
+                        </a:rPr>
+                        <m:t> </m:t>
+                      </m:r>
+                      <m:r>
+                        <a:rPr lang="en-US" sz="3200" i="1">
+                          <a:solidFill>
+                            <a:srgbClr val="000000"/>
+                          </a:solidFill>
+                          <a:latin typeface="Cambria Math" panose="02040503050406030204" pitchFamily="18" charset="0"/>
+                        </a:rPr>
+                        <m:t>𝑁</m:t>
+                      </m:r>
+                      <m:r>
+                        <a:rPr lang="en-US" sz="3200" i="1">
+                          <a:solidFill>
+                            <a:srgbClr val="000000"/>
+                          </a:solidFill>
+                          <a:latin typeface="Cambria Math" panose="02040503050406030204" pitchFamily="18" charset="0"/>
+                        </a:rPr>
+                        <m:t>      </m:t>
+                      </m:r>
+                      <m:nary>
+                        <m:naryPr>
+                          <m:limLoc m:val="undOvr"/>
+                          <m:ctrlPr>
+                            <a:rPr lang="en-US" sz="3200" i="1">
+                              <a:solidFill>
+                                <a:srgbClr val="000000"/>
+                              </a:solidFill>
+                              <a:latin typeface="Cambria Math" panose="02040503050406030204" pitchFamily="18" charset="0"/>
+                            </a:rPr>
+                          </m:ctrlPr>
+                        </m:naryPr>
+                        <m:sub>
+                          <m:r>
+                            <a:rPr lang="en-US" sz="3200" i="1">
+                              <a:solidFill>
+                                <a:srgbClr val="000000"/>
+                              </a:solidFill>
+                              <a:latin typeface="Cambria Math" panose="02040503050406030204" pitchFamily="18" charset="0"/>
+                            </a:rPr>
+                            <m:t>𝑁𝑜</m:t>
+                          </m:r>
+                        </m:sub>
+                        <m:sup>
+                          <m:r>
+                            <a:rPr lang="en-US" sz="3200" i="1">
+                              <a:solidFill>
+                                <a:srgbClr val="000000"/>
+                              </a:solidFill>
+                              <a:latin typeface="Cambria Math" panose="02040503050406030204" pitchFamily="18" charset="0"/>
+                            </a:rPr>
+                            <m:t>𝑁𝑡</m:t>
+                          </m:r>
+                        </m:sup>
+                        <m:e>
+                          <m:f>
+                            <m:fPr>
+                              <m:ctrlPr>
+                                <a:rPr lang="en-US" sz="3200" i="1">
+                                  <a:solidFill>
+                                    <a:srgbClr val="000000"/>
+                                  </a:solidFill>
+                                  <a:latin typeface="Cambria Math" panose="02040503050406030204" pitchFamily="18" charset="0"/>
+                                </a:rPr>
+                              </m:ctrlPr>
+                            </m:fPr>
+                            <m:num>
+                              <m:r>
+                                <a:rPr lang="en-US" sz="3200" i="1">
+                                  <a:solidFill>
+                                    <a:srgbClr val="000000"/>
+                                  </a:solidFill>
+                                  <a:latin typeface="Cambria Math" panose="02040503050406030204" pitchFamily="18" charset="0"/>
+                                </a:rPr>
+                                <m:t>1</m:t>
+                              </m:r>
+                            </m:num>
+                            <m:den>
+                              <m:r>
+                                <a:rPr lang="en-US" sz="3200" i="1">
+                                  <a:solidFill>
+                                    <a:srgbClr val="000000"/>
+                                  </a:solidFill>
+                                  <a:latin typeface="Cambria Math" panose="02040503050406030204" pitchFamily="18" charset="0"/>
+                                </a:rPr>
+                                <m:t>𝑁</m:t>
+                              </m:r>
+                            </m:den>
+                          </m:f>
+                        </m:e>
+                      </m:nary>
+                      <m:r>
+                        <a:rPr lang="en-US" sz="3200" i="1">
+                          <a:solidFill>
+                            <a:srgbClr val="000000"/>
+                          </a:solidFill>
+                          <a:latin typeface="Cambria Math" panose="02040503050406030204" pitchFamily="18" charset="0"/>
+                        </a:rPr>
+                        <m:t>𝑑𝑁</m:t>
+                      </m:r>
+                      <m:r>
+                        <a:rPr lang="en-US" sz="3200" i="1">
+                          <a:solidFill>
+                            <a:srgbClr val="000000"/>
+                          </a:solidFill>
+                          <a:latin typeface="Cambria Math" panose="02040503050406030204" pitchFamily="18" charset="0"/>
+                        </a:rPr>
+                        <m:t>=</m:t>
+                      </m:r>
+                      <m:nary>
+                        <m:naryPr>
+                          <m:limLoc m:val="undOvr"/>
+                          <m:ctrlPr>
+                            <a:rPr lang="en-US" sz="3200" i="1">
+                              <a:solidFill>
+                                <a:srgbClr val="000000"/>
+                              </a:solidFill>
+                              <a:latin typeface="Cambria Math" panose="02040503050406030204" pitchFamily="18" charset="0"/>
+                            </a:rPr>
+                          </m:ctrlPr>
+                        </m:naryPr>
+                        <m:sub/>
+                        <m:sup/>
+                        <m:e>
+                          <m:r>
+                            <a:rPr lang="en-US" sz="3200" i="1">
+                              <a:solidFill>
+                                <a:srgbClr val="000000"/>
+                              </a:solidFill>
+                              <a:latin typeface="Cambria Math" panose="02040503050406030204" pitchFamily="18" charset="0"/>
+                            </a:rPr>
+                            <m:t>𝑟</m:t>
+                          </m:r>
+                          <m:r>
+                            <a:rPr lang="en-US" sz="3200" i="1">
+                              <a:solidFill>
+                                <a:srgbClr val="000000"/>
+                              </a:solidFill>
+                              <a:latin typeface="Cambria Math" panose="02040503050406030204" pitchFamily="18" charset="0"/>
+                            </a:rPr>
+                            <m:t> </m:t>
+                          </m:r>
+                          <m:r>
+                            <a:rPr lang="en-US" sz="3200" i="1">
+                              <a:solidFill>
+                                <a:srgbClr val="000000"/>
+                              </a:solidFill>
+                              <a:latin typeface="Cambria Math" panose="02040503050406030204" pitchFamily="18" charset="0"/>
+                            </a:rPr>
+                            <m:t>𝑑𝑡</m:t>
+                          </m:r>
+                        </m:e>
+                      </m:nary>
+                    </m:oMath>
+                  </m:oMathPara>
+                </a14:m>
+                <a:br>
+                  <a:rPr lang="en-US" sz="3200" i="1" dirty="0">
+                    <a:solidFill>
+                      <a:srgbClr val="000000"/>
+                    </a:solidFill>
+                    <a:latin typeface="Cambria Math" panose="02040503050406030204" pitchFamily="18" charset="0"/>
+                  </a:rPr>
+                </a:br>
+                <a:br>
+                  <a:rPr lang="en-US" sz="3200" i="1" dirty="0">
+                    <a:solidFill>
+                      <a:srgbClr val="000000"/>
+                    </a:solidFill>
+                    <a:latin typeface="Cambria Math" panose="02040503050406030204" pitchFamily="18" charset="0"/>
+                  </a:rPr>
+                </a:br>
+                <a14:m>
+                  <m:oMathPara xmlns:m="http://schemas.openxmlformats.org/officeDocument/2006/math">
+                    <m:oMathParaPr>
+                      <m:jc m:val="left"/>
+                    </m:oMathParaPr>
+                    <m:oMath>
+                      <m:r>
+                        <a:rPr lang="en-US" sz="3200" i="1">
+                          <a:solidFill>
+                            <a:srgbClr val="000000"/>
+                          </a:solidFill>
+                          <a:latin typeface="Cambria Math" panose="02040503050406030204" pitchFamily="18" charset="0"/>
+                        </a:rPr>
+                        <m:t>𝐿𝑛</m:t>
+                      </m:r>
+                      <m:sSub>
+                        <m:sSubPr>
+                          <m:ctrlPr>
+                            <a:rPr lang="en-US" sz="3200" i="1">
+                              <a:solidFill>
+                                <a:srgbClr val="000000"/>
+                              </a:solidFill>
+                              <a:latin typeface="Cambria Math" panose="02040503050406030204" pitchFamily="18" charset="0"/>
+                            </a:rPr>
+                          </m:ctrlPr>
+                        </m:sSubPr>
+                        <m:e>
+                          <m:r>
+                            <a:rPr lang="en-US" sz="3200" i="1">
+                              <a:solidFill>
+                                <a:srgbClr val="000000"/>
+                              </a:solidFill>
+                              <a:latin typeface="Cambria Math" panose="02040503050406030204" pitchFamily="18" charset="0"/>
+                            </a:rPr>
+                            <m:t>𝑁</m:t>
+                          </m:r>
+                        </m:e>
+                        <m:sub>
+                          <m:r>
+                            <a:rPr lang="en-US" sz="3200" i="1">
+                              <a:solidFill>
+                                <a:srgbClr val="000000"/>
+                              </a:solidFill>
+                              <a:latin typeface="Cambria Math" panose="02040503050406030204" pitchFamily="18" charset="0"/>
+                            </a:rPr>
+                            <m:t>𝑡</m:t>
+                          </m:r>
+                        </m:sub>
+                      </m:sSub>
+                      <m:r>
+                        <a:rPr lang="en-US" sz="3200" i="1">
+                          <a:solidFill>
+                            <a:srgbClr val="000000"/>
+                          </a:solidFill>
+                          <a:latin typeface="Cambria Math" panose="02040503050406030204" pitchFamily="18" charset="0"/>
+                        </a:rPr>
+                        <m:t>−</m:t>
+                      </m:r>
+                      <m:r>
+                        <a:rPr lang="en-US" sz="3200" i="1">
+                          <a:solidFill>
+                            <a:srgbClr val="000000"/>
+                          </a:solidFill>
+                          <a:latin typeface="Cambria Math" panose="02040503050406030204" pitchFamily="18" charset="0"/>
+                        </a:rPr>
+                        <m:t>𝐿𝑛</m:t>
+                      </m:r>
+                      <m:sSub>
+                        <m:sSubPr>
+                          <m:ctrlPr>
+                            <a:rPr lang="en-US" sz="3200" i="1">
+                              <a:solidFill>
+                                <a:srgbClr val="000000"/>
+                              </a:solidFill>
+                              <a:latin typeface="Cambria Math" panose="02040503050406030204" pitchFamily="18" charset="0"/>
+                            </a:rPr>
+                          </m:ctrlPr>
+                        </m:sSubPr>
+                        <m:e>
+                          <m:r>
+                            <a:rPr lang="en-US" sz="3200" i="1">
+                              <a:solidFill>
+                                <a:srgbClr val="000000"/>
+                              </a:solidFill>
+                              <a:latin typeface="Cambria Math" panose="02040503050406030204" pitchFamily="18" charset="0"/>
+                            </a:rPr>
+                            <m:t>𝑁</m:t>
+                          </m:r>
+                        </m:e>
+                        <m:sub>
+                          <m:r>
+                            <a:rPr lang="en-US" sz="3200" i="1">
+                              <a:solidFill>
+                                <a:srgbClr val="000000"/>
+                              </a:solidFill>
+                              <a:latin typeface="Cambria Math" panose="02040503050406030204" pitchFamily="18" charset="0"/>
+                            </a:rPr>
+                            <m:t>0</m:t>
+                          </m:r>
+                        </m:sub>
+                      </m:sSub>
+                      <m:r>
+                        <a:rPr lang="en-US" sz="3200" i="1">
+                          <a:solidFill>
+                            <a:srgbClr val="000000"/>
+                          </a:solidFill>
+                          <a:latin typeface="Cambria Math" panose="02040503050406030204" pitchFamily="18" charset="0"/>
+                        </a:rPr>
+                        <m:t> = </m:t>
+                      </m:r>
+                      <m:r>
+                        <a:rPr lang="en-US" sz="3200" i="1">
+                          <a:solidFill>
+                            <a:srgbClr val="000000"/>
+                          </a:solidFill>
+                          <a:latin typeface="Cambria Math" panose="02040503050406030204" pitchFamily="18" charset="0"/>
+                        </a:rPr>
+                        <m:t>𝑟𝑡</m:t>
+                      </m:r>
+                      <m:r>
+                        <a:rPr lang="en-US" sz="3200" i="1">
+                          <a:solidFill>
+                            <a:srgbClr val="000000"/>
+                          </a:solidFill>
+                          <a:latin typeface="Cambria Math" panose="02040503050406030204" pitchFamily="18" charset="0"/>
+                        </a:rPr>
+                        <m:t> =</m:t>
+                      </m:r>
+                      <m:r>
+                        <a:rPr lang="en-US" sz="3200" i="1">
+                          <a:solidFill>
+                            <a:srgbClr val="000000"/>
+                          </a:solidFill>
+                          <a:latin typeface="Cambria Math" panose="02040503050406030204" pitchFamily="18" charset="0"/>
+                        </a:rPr>
+                        <m:t>𝐿𝑛</m:t>
+                      </m:r>
+                      <m:f>
+                        <m:fPr>
+                          <m:ctrlPr>
+                            <a:rPr lang="en-US" sz="3200" i="1">
+                              <a:solidFill>
+                                <a:srgbClr val="000000"/>
+                              </a:solidFill>
+                              <a:latin typeface="Cambria Math" panose="02040503050406030204" pitchFamily="18" charset="0"/>
+                            </a:rPr>
+                          </m:ctrlPr>
+                        </m:fPr>
+                        <m:num>
+                          <m:sSub>
+                            <m:sSubPr>
+                              <m:ctrlPr>
+                                <a:rPr lang="en-US" sz="3200" i="1">
+                                  <a:solidFill>
+                                    <a:srgbClr val="000000"/>
+                                  </a:solidFill>
+                                  <a:latin typeface="Cambria Math" panose="02040503050406030204" pitchFamily="18" charset="0"/>
+                                </a:rPr>
+                              </m:ctrlPr>
+                            </m:sSubPr>
+                            <m:e>
+                              <m:r>
+                                <a:rPr lang="en-US" sz="3200" i="1">
+                                  <a:solidFill>
+                                    <a:srgbClr val="000000"/>
+                                  </a:solidFill>
+                                  <a:latin typeface="Cambria Math" panose="02040503050406030204" pitchFamily="18" charset="0"/>
+                                </a:rPr>
+                                <m:t>𝑁</m:t>
+                              </m:r>
+                            </m:e>
+                            <m:sub>
+                              <m:r>
+                                <a:rPr lang="en-US" sz="3200" i="1">
+                                  <a:solidFill>
+                                    <a:srgbClr val="000000"/>
+                                  </a:solidFill>
+                                  <a:latin typeface="Cambria Math" panose="02040503050406030204" pitchFamily="18" charset="0"/>
+                                </a:rPr>
+                                <m:t>𝑡</m:t>
+                              </m:r>
+                            </m:sub>
+                          </m:sSub>
+                        </m:num>
+                        <m:den>
+                          <m:sSub>
+                            <m:sSubPr>
+                              <m:ctrlPr>
+                                <a:rPr lang="en-US" sz="3200" i="1">
+                                  <a:solidFill>
+                                    <a:srgbClr val="000000"/>
+                                  </a:solidFill>
+                                  <a:latin typeface="Cambria Math" panose="02040503050406030204" pitchFamily="18" charset="0"/>
+                                </a:rPr>
+                              </m:ctrlPr>
+                            </m:sSubPr>
+                            <m:e>
+                              <m:r>
+                                <a:rPr lang="en-US" sz="3200" i="1">
+                                  <a:solidFill>
+                                    <a:srgbClr val="000000"/>
+                                  </a:solidFill>
+                                  <a:latin typeface="Cambria Math" panose="02040503050406030204" pitchFamily="18" charset="0"/>
+                                </a:rPr>
+                                <m:t>𝑁</m:t>
+                              </m:r>
+                            </m:e>
+                            <m:sub>
+                              <m:r>
+                                <a:rPr lang="en-US" sz="3200" i="1">
+                                  <a:solidFill>
+                                    <a:srgbClr val="000000"/>
+                                  </a:solidFill>
+                                  <a:latin typeface="Cambria Math" panose="02040503050406030204" pitchFamily="18" charset="0"/>
+                                </a:rPr>
+                                <m:t>0</m:t>
+                              </m:r>
+                            </m:sub>
+                          </m:sSub>
+                        </m:den>
+                      </m:f>
+                    </m:oMath>
+                  </m:oMathPara>
+                </a14:m>
+                <a:br>
+                  <a:rPr lang="en-US" sz="3200" i="1" dirty="0">
+                    <a:solidFill>
+                      <a:srgbClr val="000000"/>
+                    </a:solidFill>
+                    <a:latin typeface="Cambria Math" panose="02040503050406030204" pitchFamily="18" charset="0"/>
+                  </a:rPr>
+                </a:br>
+                <a:br>
+                  <a:rPr lang="en-US" sz="3200" i="1" dirty="0">
+                    <a:solidFill>
+                      <a:srgbClr val="000000"/>
+                    </a:solidFill>
+                    <a:latin typeface="Cambria Math" panose="02040503050406030204" pitchFamily="18" charset="0"/>
+                  </a:rPr>
+                </a:br>
+                <a14:m>
+                  <m:oMathPara xmlns:m="http://schemas.openxmlformats.org/officeDocument/2006/math">
+                    <m:oMathParaPr>
+                      <m:jc m:val="left"/>
+                    </m:oMathParaPr>
+                    <m:oMath>
+                      <m:f>
+                        <m:fPr>
+                          <m:ctrlPr>
+                            <a:rPr lang="en-US" sz="3200" i="1">
+                              <a:solidFill>
+                                <a:srgbClr val="000000"/>
+                              </a:solidFill>
+                              <a:latin typeface="Cambria Math" panose="02040503050406030204" pitchFamily="18" charset="0"/>
+                            </a:rPr>
+                          </m:ctrlPr>
+                        </m:fPr>
+                        <m:num>
+                          <m:sSub>
+                            <m:sSubPr>
+                              <m:ctrlPr>
+                                <a:rPr lang="en-US" sz="3200" i="1">
+                                  <a:solidFill>
+                                    <a:srgbClr val="000000"/>
+                                  </a:solidFill>
+                                  <a:latin typeface="Cambria Math" panose="02040503050406030204" pitchFamily="18" charset="0"/>
+                                </a:rPr>
+                              </m:ctrlPr>
+                            </m:sSubPr>
+                            <m:e>
+                              <m:r>
+                                <a:rPr lang="en-US" sz="3200" i="1">
+                                  <a:solidFill>
+                                    <a:srgbClr val="000000"/>
+                                  </a:solidFill>
+                                  <a:latin typeface="Cambria Math" panose="02040503050406030204" pitchFamily="18" charset="0"/>
+                                </a:rPr>
+                                <m:t>𝑁</m:t>
+                              </m:r>
+                            </m:e>
+                            <m:sub>
+                              <m:r>
+                                <a:rPr lang="en-US" sz="3200" i="1">
+                                  <a:solidFill>
+                                    <a:srgbClr val="000000"/>
+                                  </a:solidFill>
+                                  <a:latin typeface="Cambria Math" panose="02040503050406030204" pitchFamily="18" charset="0"/>
+                                </a:rPr>
+                                <m:t>𝑡</m:t>
+                              </m:r>
+                            </m:sub>
+                          </m:sSub>
+                        </m:num>
+                        <m:den>
+                          <m:sSub>
+                            <m:sSubPr>
+                              <m:ctrlPr>
+                                <a:rPr lang="en-US" sz="3200" i="1">
+                                  <a:solidFill>
+                                    <a:srgbClr val="000000"/>
+                                  </a:solidFill>
+                                  <a:latin typeface="Cambria Math" panose="02040503050406030204" pitchFamily="18" charset="0"/>
+                                </a:rPr>
+                              </m:ctrlPr>
+                            </m:sSubPr>
+                            <m:e>
+                              <m:r>
+                                <a:rPr lang="en-US" sz="3200" i="1">
+                                  <a:solidFill>
+                                    <a:srgbClr val="000000"/>
+                                  </a:solidFill>
+                                  <a:latin typeface="Cambria Math" panose="02040503050406030204" pitchFamily="18" charset="0"/>
+                                </a:rPr>
+                                <m:t>𝑁</m:t>
+                              </m:r>
+                            </m:e>
+                            <m:sub>
+                              <m:r>
+                                <a:rPr lang="en-US" sz="3200" i="1">
+                                  <a:solidFill>
+                                    <a:srgbClr val="000000"/>
+                                  </a:solidFill>
+                                  <a:latin typeface="Cambria Math" panose="02040503050406030204" pitchFamily="18" charset="0"/>
+                                </a:rPr>
+                                <m:t>0</m:t>
+                              </m:r>
+                            </m:sub>
+                          </m:sSub>
+                        </m:den>
+                      </m:f>
+                      <m:r>
+                        <a:rPr lang="en-US" sz="3200" i="1">
+                          <a:solidFill>
+                            <a:srgbClr val="000000"/>
+                          </a:solidFill>
+                          <a:latin typeface="Cambria Math" panose="02040503050406030204" pitchFamily="18" charset="0"/>
+                        </a:rPr>
+                        <m:t> = </m:t>
+                      </m:r>
+                      <m:sSup>
+                        <m:sSupPr>
+                          <m:ctrlPr>
+                            <a:rPr lang="en-US" sz="3200" i="1">
+                              <a:solidFill>
+                                <a:srgbClr val="000000"/>
+                              </a:solidFill>
+                              <a:latin typeface="Cambria Math" panose="02040503050406030204" pitchFamily="18" charset="0"/>
+                            </a:rPr>
+                          </m:ctrlPr>
+                        </m:sSupPr>
+                        <m:e>
+                          <m:r>
+                            <a:rPr lang="en-US" sz="3200" i="1">
+                              <a:solidFill>
+                                <a:srgbClr val="000000"/>
+                              </a:solidFill>
+                              <a:latin typeface="Cambria Math" panose="02040503050406030204" pitchFamily="18" charset="0"/>
+                            </a:rPr>
+                            <m:t>𝑒</m:t>
+                          </m:r>
+                        </m:e>
+                        <m:sup>
+                          <m:r>
+                            <a:rPr lang="en-US" sz="3200" i="1">
+                              <a:solidFill>
+                                <a:srgbClr val="000000"/>
+                              </a:solidFill>
+                              <a:latin typeface="Cambria Math" panose="02040503050406030204" pitchFamily="18" charset="0"/>
+                            </a:rPr>
+                            <m:t>𝑟𝑡</m:t>
+                          </m:r>
+                        </m:sup>
+                      </m:sSup>
+                      <m:r>
+                        <a:rPr lang="en-US" sz="3200" i="1">
+                          <a:solidFill>
+                            <a:srgbClr val="000000"/>
+                          </a:solidFill>
+                          <a:latin typeface="Cambria Math" panose="02040503050406030204" pitchFamily="18" charset="0"/>
+                        </a:rPr>
+                        <m:t>    </m:t>
+                      </m:r>
+                      <m:sSub>
+                        <m:sSubPr>
+                          <m:ctrlPr>
+                            <a:rPr lang="en-US" sz="3200" i="1">
+                              <a:solidFill>
+                                <a:srgbClr val="000000"/>
+                              </a:solidFill>
+                              <a:latin typeface="Cambria Math" panose="02040503050406030204" pitchFamily="18" charset="0"/>
+                            </a:rPr>
+                          </m:ctrlPr>
+                        </m:sSubPr>
+                        <m:e>
+                          <m:r>
+                            <a:rPr lang="en-US" sz="3200" i="1">
+                              <a:solidFill>
+                                <a:srgbClr val="000000"/>
+                              </a:solidFill>
+                              <a:latin typeface="Cambria Math" panose="02040503050406030204" pitchFamily="18" charset="0"/>
+                            </a:rPr>
+                            <m:t>𝑁</m:t>
+                          </m:r>
+                        </m:e>
+                        <m:sub>
+                          <m:r>
+                            <a:rPr lang="en-US" sz="3200" i="1">
+                              <a:solidFill>
+                                <a:srgbClr val="000000"/>
+                              </a:solidFill>
+                              <a:latin typeface="Cambria Math" panose="02040503050406030204" pitchFamily="18" charset="0"/>
+                            </a:rPr>
+                            <m:t>𝑡</m:t>
+                          </m:r>
+                        </m:sub>
+                      </m:sSub>
+                      <m:r>
+                        <a:rPr lang="en-US" sz="3200" i="1">
+                          <a:solidFill>
+                            <a:srgbClr val="000000"/>
+                          </a:solidFill>
+                          <a:latin typeface="Cambria Math" panose="02040503050406030204" pitchFamily="18" charset="0"/>
+                        </a:rPr>
+                        <m:t> = </m:t>
+                      </m:r>
+                      <m:sSub>
+                        <m:sSubPr>
+                          <m:ctrlPr>
+                            <a:rPr lang="en-US" sz="3200" i="1">
+                              <a:solidFill>
+                                <a:srgbClr val="000000"/>
+                              </a:solidFill>
+                              <a:latin typeface="Cambria Math" panose="02040503050406030204" pitchFamily="18" charset="0"/>
+                            </a:rPr>
+                          </m:ctrlPr>
+                        </m:sSubPr>
+                        <m:e>
+                          <m:r>
+                            <a:rPr lang="en-US" sz="3200" i="1">
+                              <a:solidFill>
+                                <a:srgbClr val="000000"/>
+                              </a:solidFill>
+                              <a:latin typeface="Cambria Math" panose="02040503050406030204" pitchFamily="18" charset="0"/>
+                            </a:rPr>
+                            <m:t>𝑁</m:t>
+                          </m:r>
+                        </m:e>
+                        <m:sub>
+                          <m:r>
+                            <a:rPr lang="en-US" sz="3200" i="1">
+                              <a:solidFill>
+                                <a:srgbClr val="000000"/>
+                              </a:solidFill>
+                              <a:latin typeface="Cambria Math" panose="02040503050406030204" pitchFamily="18" charset="0"/>
+                            </a:rPr>
+                            <m:t>0</m:t>
+                          </m:r>
+                        </m:sub>
+                      </m:sSub>
+                      <m:sSup>
+                        <m:sSupPr>
+                          <m:ctrlPr>
+                            <a:rPr lang="en-US" sz="3200" i="1">
+                              <a:solidFill>
+                                <a:srgbClr val="000000"/>
+                              </a:solidFill>
+                              <a:latin typeface="Cambria Math" panose="02040503050406030204" pitchFamily="18" charset="0"/>
+                            </a:rPr>
+                          </m:ctrlPr>
+                        </m:sSupPr>
+                        <m:e>
+                          <m:r>
+                            <a:rPr lang="en-US" sz="3200" i="1">
+                              <a:solidFill>
+                                <a:srgbClr val="000000"/>
+                              </a:solidFill>
+                              <a:latin typeface="Cambria Math" panose="02040503050406030204" pitchFamily="18" charset="0"/>
+                            </a:rPr>
+                            <m:t>𝑒</m:t>
+                          </m:r>
+                        </m:e>
+                        <m:sup>
+                          <m:r>
+                            <a:rPr lang="en-US" sz="3200" i="1">
+                              <a:solidFill>
+                                <a:srgbClr val="000000"/>
+                              </a:solidFill>
+                              <a:latin typeface="Cambria Math" panose="02040503050406030204" pitchFamily="18" charset="0"/>
+                            </a:rPr>
+                            <m:t>𝑟𝑡</m:t>
+                          </m:r>
+                        </m:sup>
+                      </m:sSup>
+                    </m:oMath>
+                  </m:oMathPara>
+                </a14:m>
+                <a:endParaRPr lang="en-US" sz="3200" dirty="0"/>
+              </a:p>
+            </p:txBody>
+          </p:sp>
+        </mc:Choice>
+        <mc:Fallback xmlns="">
+          <p:sp>
+            <p:nvSpPr>
+              <p:cNvPr id="111619" name="Object 3">
+                <a:extLst>
+                  <a:ext uri="{FF2B5EF4-FFF2-40B4-BE49-F238E27FC236}">
+                    <a16:creationId xmlns:a16="http://schemas.microsoft.com/office/drawing/2014/main" id="{49B706E0-0423-4E28-8245-B27AF33E4E5B}"/>
+                  </a:ext>
+                </a:extLst>
+              </p:cNvPr>
+              <p:cNvSpPr txBox="1">
+                <a:spLocks noRot="1" noChangeAspect="1" noMove="1" noResize="1" noEditPoints="1" noAdjustHandles="1" noChangeArrowheads="1" noChangeShapeType="1" noTextEdit="1"/>
+              </p:cNvSpPr>
+              <p:nvPr>
+                <p:ph idx="1"/>
+              </p:nvPr>
+            </p:nvSpPr>
+            <p:spPr bwMode="auto">
+              <a:xfrm>
+                <a:off x="457200" y="914400"/>
+                <a:ext cx="8229600" cy="4779963"/>
+              </a:xfrm>
+              <a:prstGeom prst="rect">
+                <a:avLst/>
+              </a:prstGeom>
+              <a:blipFill>
+                <a:blip r:embed="rId3"/>
+                <a:stretch>
+                  <a:fillRect/>
+                </a:stretch>
+              </a:blipFill>
+              <a:ln>
+                <a:noFill/>
+              </a:ln>
+              <a:effectLst/>
+            </p:spPr>
+            <p:txBody>
+              <a:bodyPr/>
+              <a:lstStyle/>
+              <a:p>
+                <a:r>
+                  <a:rPr lang="en-US">
+                    <a:noFill/>
+                  </a:rPr>
+                  <a:t> </a:t>
+                </a:r>
+              </a:p>
+            </p:txBody>
+          </p:sp>
+        </mc:Fallback>
+      </mc:AlternateContent>
+    </p:spTree>
+  </p:cSld>
+  <p:clrMapOvr>
+    <a:masterClrMapping/>
+  </p:clrMapOvr>
+</p:sld>
+</file>
+
+<file path=ppt/slides/slide11.xml><?xml version="1.0" encoding="utf-8"?>
+<p:sld xmlns:a="http://schemas.openxmlformats.org/drawingml/2006/main" xmlns:r="http://schemas.openxmlformats.org/officeDocument/2006/relationships" xmlns:p="http://schemas.openxmlformats.org/presentationml/2006/main">
+  <p:cSld>
+    <p:spTree>
+      <p:nvGrpSpPr>
+        <p:cNvPr id="1" name=""/>
+        <p:cNvGrpSpPr/>
+        <p:nvPr/>
+      </p:nvGrpSpPr>
+      <p:grpSpPr>
+        <a:xfrm>
+          <a:off x="0" y="0"/>
+          <a:ext cx="0" cy="0"/>
+          <a:chOff x="0" y="0"/>
+          <a:chExt cx="0" cy="0"/>
+        </a:xfrm>
+      </p:grpSpPr>
+      <p:sp>
+        <p:nvSpPr>
+          <p:cNvPr id="2" name="Title 1">
+            <a:extLst>
+              <a:ext uri="{FF2B5EF4-FFF2-40B4-BE49-F238E27FC236}">
+                <a16:creationId xmlns:a16="http://schemas.microsoft.com/office/drawing/2014/main" id="{67122BA4-159E-1B9A-4883-050014114E1D}"/>
+              </a:ext>
+            </a:extLst>
+          </p:cNvPr>
+          <p:cNvSpPr>
+            <a:spLocks noGrp="1"/>
+          </p:cNvSpPr>
+          <p:nvPr>
+            <p:ph type="title"/>
+          </p:nvPr>
+        </p:nvSpPr>
+        <p:spPr/>
+        <p:txBody>
+          <a:bodyPr/>
+          <a:lstStyle/>
+          <a:p>
+            <a:r>
+              <a:rPr lang="en-US" dirty="0"/>
+              <a:t>For annual time step</a:t>
+            </a:r>
+          </a:p>
+        </p:txBody>
+      </p:sp>
+      <mc:AlternateContent xmlns:mc="http://schemas.openxmlformats.org/markup-compatibility/2006">
+        <mc:Choice xmlns:a14="http://schemas.microsoft.com/office/drawing/2010/main" Requires="a14">
+          <p:sp>
+            <p:nvSpPr>
+              <p:cNvPr id="3" name="Content Placeholder 2">
+                <a:extLst>
+                  <a:ext uri="{FF2B5EF4-FFF2-40B4-BE49-F238E27FC236}">
+                    <a16:creationId xmlns:a16="http://schemas.microsoft.com/office/drawing/2014/main" id="{4BE83C49-7B56-FBD6-8B0C-72BC27C46C46}"/>
+                  </a:ext>
+                </a:extLst>
+              </p:cNvPr>
+              <p:cNvSpPr>
+                <a:spLocks noGrp="1"/>
+              </p:cNvSpPr>
+              <p:nvPr>
+                <p:ph idx="1"/>
+              </p:nvPr>
+            </p:nvSpPr>
+            <p:spPr/>
+            <p:txBody>
+              <a:bodyPr/>
+              <a:lstStyle/>
+              <a:p>
+                <a:pPr marL="0" indent="0">
+                  <a:buNone/>
+                </a:pPr>
+                <a14:m>
+                  <m:oMathPara xmlns:m="http://schemas.openxmlformats.org/officeDocument/2006/math">
+                    <m:oMath>
+                      <m:sSub>
+                        <m:sSubPr>
+                          <m:ctrlPr>
+                            <a:rPr lang="en-US" sz="2800" i="1">
+                              <a:solidFill>
+                                <a:srgbClr val="000000"/>
+                              </a:solidFill>
+                              <a:latin typeface="Cambria Math" panose="02040503050406030204" pitchFamily="18" charset="0"/>
+                            </a:rPr>
+                          </m:ctrlPr>
+                        </m:sSubPr>
+                        <m:e>
+                          <m:r>
+                            <a:rPr lang="en-US" sz="2800" i="1">
+                              <a:solidFill>
+                                <a:srgbClr val="000000"/>
+                              </a:solidFill>
+                              <a:latin typeface="Cambria Math" panose="02040503050406030204" pitchFamily="18" charset="0"/>
+                            </a:rPr>
+                            <m:t>𝑁</m:t>
+                          </m:r>
+                        </m:e>
+                        <m:sub>
+                          <m:r>
+                            <a:rPr lang="en-US" sz="2800" i="1">
+                              <a:solidFill>
+                                <a:srgbClr val="000000"/>
+                              </a:solidFill>
+                              <a:latin typeface="Cambria Math" panose="02040503050406030204" pitchFamily="18" charset="0"/>
+                            </a:rPr>
+                            <m:t>𝑡</m:t>
+                          </m:r>
+                          <m:r>
+                            <a:rPr lang="en-US" sz="2800" b="0" i="1" smtClean="0">
+                              <a:solidFill>
+                                <a:srgbClr val="000000"/>
+                              </a:solidFill>
+                              <a:latin typeface="Cambria Math" panose="02040503050406030204" pitchFamily="18" charset="0"/>
+                            </a:rPr>
+                            <m:t>+1</m:t>
+                          </m:r>
+                        </m:sub>
+                      </m:sSub>
+                      <m:r>
+                        <a:rPr lang="en-US" sz="2800" i="1">
+                          <a:solidFill>
+                            <a:srgbClr val="000000"/>
+                          </a:solidFill>
+                          <a:latin typeface="Cambria Math" panose="02040503050406030204" pitchFamily="18" charset="0"/>
+                        </a:rPr>
+                        <m:t> = </m:t>
+                      </m:r>
+                      <m:sSub>
+                        <m:sSubPr>
+                          <m:ctrlPr>
+                            <a:rPr lang="en-US" sz="2800" i="1">
+                              <a:solidFill>
+                                <a:srgbClr val="000000"/>
+                              </a:solidFill>
+                              <a:latin typeface="Cambria Math" panose="02040503050406030204" pitchFamily="18" charset="0"/>
+                            </a:rPr>
+                          </m:ctrlPr>
+                        </m:sSubPr>
+                        <m:e>
+                          <m:r>
+                            <a:rPr lang="en-US" sz="2800" i="1">
+                              <a:solidFill>
+                                <a:srgbClr val="000000"/>
+                              </a:solidFill>
+                              <a:latin typeface="Cambria Math" panose="02040503050406030204" pitchFamily="18" charset="0"/>
+                            </a:rPr>
+                            <m:t>𝑁</m:t>
+                          </m:r>
+                        </m:e>
+                        <m:sub>
+                          <m:r>
+                            <a:rPr lang="en-US" sz="2800" b="0" i="1" smtClean="0">
+                              <a:solidFill>
+                                <a:srgbClr val="000000"/>
+                              </a:solidFill>
+                              <a:latin typeface="Cambria Math" panose="02040503050406030204" pitchFamily="18" charset="0"/>
+                            </a:rPr>
+                            <m:t>𝑡</m:t>
+                          </m:r>
+                        </m:sub>
+                      </m:sSub>
+                      <m:sSup>
+                        <m:sSupPr>
+                          <m:ctrlPr>
+                            <a:rPr lang="en-US" sz="2800" i="1">
+                              <a:solidFill>
+                                <a:srgbClr val="000000"/>
+                              </a:solidFill>
+                              <a:latin typeface="Cambria Math" panose="02040503050406030204" pitchFamily="18" charset="0"/>
+                            </a:rPr>
+                          </m:ctrlPr>
+                        </m:sSupPr>
+                        <m:e>
+                          <m:r>
+                            <a:rPr lang="en-US" sz="2800" i="1">
+                              <a:solidFill>
+                                <a:srgbClr val="000000"/>
+                              </a:solidFill>
+                              <a:latin typeface="Cambria Math" panose="02040503050406030204" pitchFamily="18" charset="0"/>
+                            </a:rPr>
+                            <m:t>𝑒</m:t>
+                          </m:r>
+                        </m:e>
+                        <m:sup>
+                          <m:r>
+                            <a:rPr lang="en-US" sz="2800" i="1">
+                              <a:solidFill>
+                                <a:srgbClr val="000000"/>
+                              </a:solidFill>
+                              <a:latin typeface="Cambria Math" panose="02040503050406030204" pitchFamily="18" charset="0"/>
+                            </a:rPr>
+                            <m:t>𝑟</m:t>
+                          </m:r>
+                        </m:sup>
+                      </m:sSup>
+                    </m:oMath>
+                  </m:oMathPara>
+                </a14:m>
+                <a:endParaRPr lang="en-US" sz="2800" dirty="0">
+                  <a:solidFill>
+                    <a:srgbClr val="000000"/>
+                  </a:solidFill>
+                </a:endParaRPr>
+              </a:p>
+              <a:p>
+                <a:r>
+                  <a:rPr lang="en-US" dirty="0"/>
+                  <a:t>Which is the same equation we derived for an annual time step before, </a:t>
+                </a:r>
+              </a:p>
+              <a:p>
+                <a:pPr marL="0" indent="0">
+                  <a:buNone/>
+                </a:pPr>
+                <a14:m>
+                  <m:oMathPara xmlns:m="http://schemas.openxmlformats.org/officeDocument/2006/math">
+                    <m:oMath>
+                      <m:r>
+                        <a:rPr lang="en-US" sz="3200" b="0" i="1" smtClean="0">
+                          <a:latin typeface="Cambria Math" panose="02040503050406030204" pitchFamily="18" charset="0"/>
+                        </a:rPr>
+                        <m:t> </m:t>
+                      </m:r>
+                      <m:sSub>
+                        <m:sSubPr>
+                          <m:ctrlPr>
+                            <a:rPr lang="ar-AE" sz="3200">
+                              <a:latin typeface="Cambria Math" panose="02040503050406030204" pitchFamily="18" charset="0"/>
+                            </a:rPr>
+                          </m:ctrlPr>
+                        </m:sSubPr>
+                        <m:e>
+                          <m:r>
+                            <a:rPr lang="ar-AE" sz="3200">
+                              <a:latin typeface="Cambria Math" panose="02040503050406030204" pitchFamily="18" charset="0"/>
+                            </a:rPr>
+                            <m:t>𝑁</m:t>
+                          </m:r>
+                        </m:e>
+                        <m:sub>
+                          <m:r>
+                            <a:rPr lang="ar-AE" sz="3200">
+                              <a:latin typeface="Cambria Math" panose="02040503050406030204" pitchFamily="18" charset="0"/>
+                            </a:rPr>
+                            <m:t>𝑡</m:t>
+                          </m:r>
+                          <m:r>
+                            <a:rPr lang="ar-AE" sz="3200">
+                              <a:latin typeface="Cambria Math" panose="02040503050406030204" pitchFamily="18" charset="0"/>
+                            </a:rPr>
+                            <m:t>+1</m:t>
+                          </m:r>
+                        </m:sub>
+                      </m:sSub>
+                      <m:r>
+                        <a:rPr lang="ar-AE" sz="3200">
+                          <a:latin typeface="Cambria Math" panose="02040503050406030204" pitchFamily="18" charset="0"/>
+                        </a:rPr>
+                        <m:t>=</m:t>
+                      </m:r>
+                      <m:r>
+                        <a:rPr lang="ar-AE" sz="3200">
+                          <a:latin typeface="Cambria Math" panose="02040503050406030204" pitchFamily="18" charset="0"/>
+                        </a:rPr>
+                        <m:t>𝜆</m:t>
+                      </m:r>
+                      <m:sSub>
+                        <m:sSubPr>
+                          <m:ctrlPr>
+                            <a:rPr lang="ar-AE" sz="3200">
+                              <a:latin typeface="Cambria Math" panose="02040503050406030204" pitchFamily="18" charset="0"/>
+                            </a:rPr>
+                          </m:ctrlPr>
+                        </m:sSubPr>
+                        <m:e>
+                          <m:r>
+                            <a:rPr lang="ar-AE" sz="3200">
+                              <a:latin typeface="Cambria Math" panose="02040503050406030204" pitchFamily="18" charset="0"/>
+                            </a:rPr>
+                            <m:t>𝑁</m:t>
+                          </m:r>
+                        </m:e>
+                        <m:sub>
+                          <m:r>
+                            <a:rPr lang="ar-AE" sz="3200">
+                              <a:latin typeface="Cambria Math" panose="02040503050406030204" pitchFamily="18" charset="0"/>
+                            </a:rPr>
+                            <m:t>𝑡</m:t>
+                          </m:r>
+                        </m:sub>
+                      </m:sSub>
+                    </m:oMath>
+                  </m:oMathPara>
+                </a14:m>
+                <a:endParaRPr lang="ar-AE" sz="3200" dirty="0"/>
+              </a:p>
+              <a:p>
+                <a:r>
+                  <a:rPr lang="en-US" dirty="0"/>
+                  <a:t> if we define</a:t>
+                </a:r>
+              </a:p>
+              <a:p>
+                <a:pPr marL="0" indent="0">
+                  <a:buNone/>
+                </a:pPr>
+                <a14:m>
+                  <m:oMathPara xmlns:m="http://schemas.openxmlformats.org/officeDocument/2006/math">
+                    <m:oMath>
+                      <m:r>
+                        <a:rPr lang="ar-AE" sz="2800">
+                          <a:latin typeface="Cambria Math" panose="02040503050406030204" pitchFamily="18" charset="0"/>
+                        </a:rPr>
+                        <m:t>𝜆</m:t>
+                      </m:r>
+                      <m:r>
+                        <a:rPr lang="en-US" sz="2800" b="0" i="0" smtClean="0">
+                          <a:latin typeface="Cambria Math" panose="02040503050406030204" pitchFamily="18" charset="0"/>
+                        </a:rPr>
+                        <m:t>=</m:t>
+                      </m:r>
+                      <m:sSup>
+                        <m:sSupPr>
+                          <m:ctrlPr>
+                            <a:rPr lang="en-US" sz="2800" i="1">
+                              <a:solidFill>
+                                <a:srgbClr val="000000"/>
+                              </a:solidFill>
+                              <a:latin typeface="Cambria Math" panose="02040503050406030204" pitchFamily="18" charset="0"/>
+                            </a:rPr>
+                          </m:ctrlPr>
+                        </m:sSupPr>
+                        <m:e>
+                          <m:r>
+                            <a:rPr lang="en-US" sz="2800" i="1">
+                              <a:solidFill>
+                                <a:srgbClr val="000000"/>
+                              </a:solidFill>
+                              <a:latin typeface="Cambria Math" panose="02040503050406030204" pitchFamily="18" charset="0"/>
+                            </a:rPr>
+                            <m:t>𝑒</m:t>
+                          </m:r>
+                        </m:e>
+                        <m:sup>
+                          <m:r>
+                            <a:rPr lang="en-US" sz="2800" i="1">
+                              <a:solidFill>
+                                <a:srgbClr val="000000"/>
+                              </a:solidFill>
+                              <a:latin typeface="Cambria Math" panose="02040503050406030204" pitchFamily="18" charset="0"/>
+                            </a:rPr>
+                            <m:t>𝑟</m:t>
+                          </m:r>
+                        </m:sup>
+                      </m:sSup>
+                    </m:oMath>
+                  </m:oMathPara>
+                </a14:m>
+                <a:endParaRPr lang="en-US" dirty="0"/>
+              </a:p>
+              <a:p>
+                <a:endParaRPr lang="en-US" dirty="0"/>
+              </a:p>
+              <a:p>
+                <a:endParaRPr lang="en-US" dirty="0"/>
+              </a:p>
+            </p:txBody>
+          </p:sp>
+        </mc:Choice>
+        <mc:Fallback>
+          <p:sp>
+            <p:nvSpPr>
+              <p:cNvPr id="3" name="Content Placeholder 2">
+                <a:extLst>
+                  <a:ext uri="{FF2B5EF4-FFF2-40B4-BE49-F238E27FC236}">
+                    <a16:creationId xmlns:a16="http://schemas.microsoft.com/office/drawing/2014/main" id="{4BE83C49-7B56-FBD6-8B0C-72BC27C46C46}"/>
+                  </a:ext>
+                </a:extLst>
+              </p:cNvPr>
+              <p:cNvSpPr>
+                <a:spLocks noGrp="1" noRot="1" noChangeAspect="1" noMove="1" noResize="1" noEditPoints="1" noAdjustHandles="1" noChangeArrowheads="1" noChangeShapeType="1" noTextEdit="1"/>
+              </p:cNvSpPr>
+              <p:nvPr>
+                <p:ph idx="1"/>
+              </p:nvPr>
+            </p:nvSpPr>
+            <p:spPr>
+              <a:blipFill>
+                <a:blip r:embed="rId2"/>
+                <a:stretch>
+                  <a:fillRect l="-1481" r="-2889"/>
+                </a:stretch>
+              </a:blipFill>
+            </p:spPr>
+            <p:txBody>
+              <a:bodyPr/>
+              <a:lstStyle/>
+              <a:p>
+                <a:r>
+                  <a:rPr lang="en-US">
+                    <a:noFill/>
+                  </a:rPr>
+                  <a:t> </a:t>
+                </a:r>
+              </a:p>
+            </p:txBody>
+          </p:sp>
+        </mc:Fallback>
+      </mc:AlternateContent>
+    </p:spTree>
+    <p:extLst>
+      <p:ext uri="{BB962C8B-B14F-4D97-AF65-F5344CB8AC3E}">
+        <p14:creationId xmlns:p14="http://schemas.microsoft.com/office/powerpoint/2010/main" val="3090565045"/>
+      </p:ext>
+    </p:extLst>
+  </p:cSld>
+  <p:clrMapOvr>
+    <a:masterClrMapping/>
+  </p:clrMapOvr>
+</p:sld>
+</file>
+
+<file path=ppt/slides/slide12.xml><?xml version="1.0" encoding="utf-8"?>
+<p:sld xmlns:a="http://schemas.openxmlformats.org/drawingml/2006/main" xmlns:r="http://schemas.openxmlformats.org/officeDocument/2006/relationships" xmlns:p="http://schemas.openxmlformats.org/presentationml/2006/main">
+  <p:cSld>
+    <p:spTree>
+      <p:nvGrpSpPr>
+        <p:cNvPr id="1" name=""/>
+        <p:cNvGrpSpPr/>
+        <p:nvPr/>
+      </p:nvGrpSpPr>
+      <p:grpSpPr>
+        <a:xfrm>
+          <a:off x="0" y="0"/>
+          <a:ext cx="0" cy="0"/>
+          <a:chOff x="0" y="0"/>
+          <a:chExt cx="0" cy="0"/>
+        </a:xfrm>
+      </p:grpSpPr>
+      <p:sp>
+        <p:nvSpPr>
           <p:cNvPr id="2" name="Title 1">
             <a:extLst>
               <a:ext uri="{FF2B5EF4-FFF2-40B4-BE49-F238E27FC236}">
@@ -8098,13 +9453,13 @@
           <a:p>
             <a:r>
               <a:rPr lang="en-US" dirty="0"/>
-              <a:t>Discrete vs. continuous</a:t>
+              <a:t>Discrete vs. continuous exponential growth equations</a:t>
             </a:r>
           </a:p>
         </p:txBody>
       </p:sp>
-      <mc:AlternateContent xmlns:mc="http://schemas.openxmlformats.org/markup-compatibility/2006" xmlns:a14="http://schemas.microsoft.com/office/drawing/2010/main">
-        <mc:Choice Requires="a14">
+      <mc:AlternateContent xmlns:mc="http://schemas.openxmlformats.org/markup-compatibility/2006">
+        <mc:Choice xmlns:a14="http://schemas.microsoft.com/office/drawing/2010/main" Requires="a14">
           <p:sp>
             <p:nvSpPr>
               <p:cNvPr id="3" name="Text Placeholder 2">
@@ -8138,7 +9493,7 @@
                     </a:solidFill>
                     <a:latin typeface="Cambria Math" panose="02040503050406030204" pitchFamily="18" charset="0"/>
                   </a:rPr>
-                  <a:t>Exponential growth</a:t>
+                  <a:t>Continuous growth</a:t>
                 </a:r>
               </a:p>
               <a:p>
@@ -8147,7 +9502,7 @@
                     <m:sSub>
                       <m:sSubPr>
                         <m:ctrlPr>
-                          <a:rPr lang="en-US" i="1" smtClean="0">
+                          <a:rPr lang="en-US" i="1">
                             <a:solidFill>
                               <a:srgbClr val="000000"/>
                             </a:solidFill>
@@ -8345,7 +9700,7 @@
             </p:txBody>
           </p:sp>
         </mc:Choice>
-        <mc:Fallback xmlns="">
+        <mc:Fallback>
           <p:sp>
             <p:nvSpPr>
               <p:cNvPr id="3" name="Text Placeholder 2">
@@ -8389,8 +9744,8 @@
           </p:sp>
         </mc:Fallback>
       </mc:AlternateContent>
-      <mc:AlternateContent xmlns:mc="http://schemas.openxmlformats.org/markup-compatibility/2006" xmlns:a14="http://schemas.microsoft.com/office/drawing/2010/main">
-        <mc:Choice Requires="a14">
+      <mc:AlternateContent xmlns:mc="http://schemas.openxmlformats.org/markup-compatibility/2006">
+        <mc:Choice xmlns:a14="http://schemas.microsoft.com/office/drawing/2010/main" Requires="a14">
           <p:sp>
             <p:nvSpPr>
               <p:cNvPr id="4" name="Content Placeholder 3">
@@ -8490,7 +9845,7 @@
                     <m:sSub>
                       <m:sSubPr>
                         <m:ctrlPr>
-                          <a:rPr lang="en-US" b="0" i="1" smtClean="0">
+                          <a:rPr lang="en-US" i="1">
                             <a:solidFill>
                               <a:srgbClr val="000000"/>
                             </a:solidFill>
@@ -8765,7 +10120,7 @@
               <a:p>
                 <a:r>
                   <a:rPr lang="en-US" dirty="0"/>
-                  <a:t>Sometimes called geometric growth</a:t>
+                  <a:t>Sometimes called geometric growth. </a:t>
                 </a:r>
               </a:p>
               <a:p>
@@ -8780,7 +10135,7 @@
             </p:txBody>
           </p:sp>
         </mc:Choice>
-        <mc:Fallback xmlns="">
+        <mc:Fallback>
           <p:sp>
             <p:nvSpPr>
               <p:cNvPr id="4" name="Content Placeholder 3">
@@ -8837,7 +10192,7 @@
 </p:sld>
 </file>
 
-<file path=ppt/slides/slide11.xml><?xml version="1.0" encoding="utf-8"?>
+<file path=ppt/slides/slide13.xml><?xml version="1.0" encoding="utf-8"?>
 <p:sld xmlns:a="http://schemas.openxmlformats.org/drawingml/2006/main" xmlns:r="http://schemas.openxmlformats.org/officeDocument/2006/relationships" xmlns:p="http://schemas.openxmlformats.org/presentationml/2006/main">
   <p:cSld>
     <p:spTree>
@@ -8882,8 +10237,8 @@
           </a:p>
         </p:txBody>
       </p:sp>
-      <mc:AlternateContent xmlns:mc="http://schemas.openxmlformats.org/markup-compatibility/2006" xmlns:a14="http://schemas.microsoft.com/office/drawing/2010/main">
-        <mc:Choice Requires="a14">
+      <mc:AlternateContent xmlns:mc="http://schemas.openxmlformats.org/markup-compatibility/2006">
+        <mc:Choice xmlns:a14="http://schemas.microsoft.com/office/drawing/2010/main" Requires="a14">
           <p:sp>
             <p:nvSpPr>
               <p:cNvPr id="3" name="Text Placeholder 2">
@@ -8915,7 +10270,7 @@
                     <m:sSup>
                       <m:sSupPr>
                         <m:ctrlPr>
-                          <a:rPr lang="en-US" b="0" i="1" smtClean="0">
+                          <a:rPr lang="en-US" i="1" smtClean="0">
                             <a:solidFill>
                               <a:srgbClr val="000000"/>
                             </a:solidFill>
@@ -9016,7 +10371,7 @@
                     <m:d>
                       <m:dPr>
                         <m:ctrlPr>
-                          <a:rPr lang="en-US" b="0" i="1" smtClean="0">
+                          <a:rPr lang="en-US" i="1">
                             <a:solidFill>
                               <a:srgbClr val="000000"/>
                             </a:solidFill>
@@ -9108,13 +10463,13 @@
               <a:p>
                 <a:r>
                   <a:rPr lang="en-US" dirty="0"/>
-                  <a:t>The annual time step version is often used because animals have a breeding season so births and deaths are not consistent across years</a:t>
+                  <a:t>The annual time step version is often used because animals have a breeding season so births and deaths don’t occur at a constant rate during a year</a:t>
                 </a:r>
               </a:p>
             </p:txBody>
           </p:sp>
         </mc:Choice>
-        <mc:Fallback xmlns="">
+        <mc:Fallback>
           <p:sp>
             <p:nvSpPr>
               <p:cNvPr id="3" name="Text Placeholder 2">
@@ -9171,7 +10526,7 @@
 </p:sld>
 </file>
 
-<file path=ppt/slides/slide12.xml><?xml version="1.0" encoding="utf-8"?>
+<file path=ppt/slides/slide14.xml><?xml version="1.0" encoding="utf-8"?>
 <p:sld xmlns:a="http://schemas.openxmlformats.org/drawingml/2006/main" xmlns:r="http://schemas.openxmlformats.org/officeDocument/2006/relationships" xmlns:p="http://schemas.openxmlformats.org/presentationml/2006/main">
   <p:cSld>
     <p:spTree>
@@ -9281,7 +10636,7 @@
 </p:sld>
 </file>
 
-<file path=ppt/slides/slide13.xml><?xml version="1.0" encoding="utf-8"?>
+<file path=ppt/slides/slide15.xml><?xml version="1.0" encoding="utf-8"?>
 <p:sld xmlns:a="http://schemas.openxmlformats.org/drawingml/2006/main" xmlns:r="http://schemas.openxmlformats.org/officeDocument/2006/relationships" xmlns:p="http://schemas.openxmlformats.org/presentationml/2006/main">
   <p:cSld>
     <p:spTree>
@@ -9516,7 +10871,7 @@
                     <m:sSub>
                       <m:sSubPr>
                         <m:ctrlPr>
-                          <a:rPr lang="en-US" i="1">
+                          <a:rPr lang="en-US" b="0" i="0" smtClean="0">
                             <a:solidFill>
                               <a:srgbClr val="000000"/>
                             </a:solidFill>
@@ -9589,7 +10944,7 @@
                     <m:sSub>
                       <m:sSubPr>
                         <m:ctrlPr>
-                          <a:rPr lang="en-US" i="1">
+                          <a:rPr lang="en-US" b="0" i="0" smtClean="0">
                             <a:solidFill>
                               <a:srgbClr val="000000"/>
                             </a:solidFill>
@@ -9693,7 +11048,7 @@
                     <m:sSub>
                       <m:sSubPr>
                         <m:ctrlPr>
-                          <a:rPr lang="en-US" i="1">
+                          <a:rPr lang="en-US">
                             <a:solidFill>
                               <a:srgbClr val="000000"/>
                             </a:solidFill>
@@ -10229,306 +11584,6 @@
           </a:p>
         </p:txBody>
       </p:sp>
-      <p:sp>
-        <p:nvSpPr>
-          <p:cNvPr id="82948" name="Date Placeholder 8">
-            <a:extLst>
-              <a:ext uri="{FF2B5EF4-FFF2-40B4-BE49-F238E27FC236}">
-                <a16:creationId xmlns:a16="http://schemas.microsoft.com/office/drawing/2014/main" id="{3473AC62-B6CD-49A5-8AD5-29BE3875219F}"/>
-              </a:ext>
-            </a:extLst>
-          </p:cNvPr>
-          <p:cNvSpPr>
-            <a:spLocks noGrp="1"/>
-          </p:cNvSpPr>
-          <p:nvPr>
-            <p:ph type="dt" sz="quarter" idx="10"/>
-          </p:nvPr>
-        </p:nvSpPr>
-        <p:spPr bwMode="auto">
-          <a:noFill/>
-          <a:extLst>
-            <a:ext uri="{909E8E84-426E-40DD-AFC4-6F175D3DCCD1}">
-              <a14:hiddenFill xmlns:a14="http://schemas.microsoft.com/office/drawing/2010/main">
-                <a:solidFill>
-                  <a:srgbClr val="FFFFFF"/>
-                </a:solidFill>
-              </a14:hiddenFill>
-            </a:ext>
-            <a:ext uri="{91240B29-F687-4F45-9708-019B960494DF}">
-              <a14:hiddenLine xmlns:a14="http://schemas.microsoft.com/office/drawing/2010/main" w="9525">
-                <a:solidFill>
-                  <a:srgbClr val="000000"/>
-                </a:solidFill>
-                <a:miter lim="800000"/>
-                <a:headEnd/>
-                <a:tailEnd/>
-              </a14:hiddenLine>
-            </a:ext>
-          </a:extLst>
-        </p:spPr>
-        <p:txBody>
-          <a:bodyPr wrap="square" numCol="1" anchorCtr="0" compatLnSpc="1">
-            <a:prstTxWarp prst="textNoShape">
-              <a:avLst/>
-            </a:prstTxWarp>
-          </a:bodyPr>
-          <a:lstStyle>
-            <a:lvl1pPr>
-              <a:defRPr>
-                <a:solidFill>
-                  <a:schemeClr val="tx1"/>
-                </a:solidFill>
-                <a:latin typeface="Arial" panose="020B0604020202020204" pitchFamily="34" charset="0"/>
-              </a:defRPr>
-            </a:lvl1pPr>
-            <a:lvl2pPr marL="742950" indent="-285750">
-              <a:defRPr>
-                <a:solidFill>
-                  <a:schemeClr val="tx1"/>
-                </a:solidFill>
-                <a:latin typeface="Arial" panose="020B0604020202020204" pitchFamily="34" charset="0"/>
-              </a:defRPr>
-            </a:lvl2pPr>
-            <a:lvl3pPr marL="1143000" indent="-228600">
-              <a:defRPr>
-                <a:solidFill>
-                  <a:schemeClr val="tx1"/>
-                </a:solidFill>
-                <a:latin typeface="Arial" panose="020B0604020202020204" pitchFamily="34" charset="0"/>
-              </a:defRPr>
-            </a:lvl3pPr>
-            <a:lvl4pPr marL="1600200" indent="-228600">
-              <a:defRPr>
-                <a:solidFill>
-                  <a:schemeClr val="tx1"/>
-                </a:solidFill>
-                <a:latin typeface="Arial" panose="020B0604020202020204" pitchFamily="34" charset="0"/>
-              </a:defRPr>
-            </a:lvl4pPr>
-            <a:lvl5pPr marL="2057400" indent="-228600">
-              <a:defRPr>
-                <a:solidFill>
-                  <a:schemeClr val="tx1"/>
-                </a:solidFill>
-                <a:latin typeface="Arial" panose="020B0604020202020204" pitchFamily="34" charset="0"/>
-              </a:defRPr>
-            </a:lvl5pPr>
-            <a:lvl6pPr marL="2514600" indent="-228600" eaLnBrk="0" fontAlgn="base" hangingPunct="0">
-              <a:spcBef>
-                <a:spcPct val="0"/>
-              </a:spcBef>
-              <a:spcAft>
-                <a:spcPct val="0"/>
-              </a:spcAft>
-              <a:defRPr>
-                <a:solidFill>
-                  <a:schemeClr val="tx1"/>
-                </a:solidFill>
-                <a:latin typeface="Arial" panose="020B0604020202020204" pitchFamily="34" charset="0"/>
-              </a:defRPr>
-            </a:lvl6pPr>
-            <a:lvl7pPr marL="2971800" indent="-228600" eaLnBrk="0" fontAlgn="base" hangingPunct="0">
-              <a:spcBef>
-                <a:spcPct val="0"/>
-              </a:spcBef>
-              <a:spcAft>
-                <a:spcPct val="0"/>
-              </a:spcAft>
-              <a:defRPr>
-                <a:solidFill>
-                  <a:schemeClr val="tx1"/>
-                </a:solidFill>
-                <a:latin typeface="Arial" panose="020B0604020202020204" pitchFamily="34" charset="0"/>
-              </a:defRPr>
-            </a:lvl7pPr>
-            <a:lvl8pPr marL="3429000" indent="-228600" eaLnBrk="0" fontAlgn="base" hangingPunct="0">
-              <a:spcBef>
-                <a:spcPct val="0"/>
-              </a:spcBef>
-              <a:spcAft>
-                <a:spcPct val="0"/>
-              </a:spcAft>
-              <a:defRPr>
-                <a:solidFill>
-                  <a:schemeClr val="tx1"/>
-                </a:solidFill>
-                <a:latin typeface="Arial" panose="020B0604020202020204" pitchFamily="34" charset="0"/>
-              </a:defRPr>
-            </a:lvl8pPr>
-            <a:lvl9pPr marL="3886200" indent="-228600" eaLnBrk="0" fontAlgn="base" hangingPunct="0">
-              <a:spcBef>
-                <a:spcPct val="0"/>
-              </a:spcBef>
-              <a:spcAft>
-                <a:spcPct val="0"/>
-              </a:spcAft>
-              <a:defRPr>
-                <a:solidFill>
-                  <a:schemeClr val="tx1"/>
-                </a:solidFill>
-                <a:latin typeface="Arial" panose="020B0604020202020204" pitchFamily="34" charset="0"/>
-              </a:defRPr>
-            </a:lvl9pPr>
-          </a:lstStyle>
-          <a:p>
-            <a:r>
-              <a:rPr lang="en-US" altLang="en-US" dirty="0"/>
-              <a:t>8/15/2024</a:t>
-            </a:r>
-          </a:p>
-        </p:txBody>
-      </p:sp>
-      <p:sp>
-        <p:nvSpPr>
-          <p:cNvPr id="82949" name="Footer Placeholder 9">
-            <a:extLst>
-              <a:ext uri="{FF2B5EF4-FFF2-40B4-BE49-F238E27FC236}">
-                <a16:creationId xmlns:a16="http://schemas.microsoft.com/office/drawing/2014/main" id="{85DF4A0F-D365-4370-96DF-A97D4396A379}"/>
-              </a:ext>
-            </a:extLst>
-          </p:cNvPr>
-          <p:cNvSpPr>
-            <a:spLocks noGrp="1"/>
-          </p:cNvSpPr>
-          <p:nvPr>
-            <p:ph type="ftr" sz="quarter" idx="11"/>
-          </p:nvPr>
-        </p:nvSpPr>
-        <p:spPr bwMode="auto">
-          <a:noFill/>
-          <a:extLst>
-            <a:ext uri="{909E8E84-426E-40DD-AFC4-6F175D3DCCD1}">
-              <a14:hiddenFill xmlns:a14="http://schemas.microsoft.com/office/drawing/2010/main">
-                <a:solidFill>
-                  <a:srgbClr val="FFFFFF"/>
-                </a:solidFill>
-              </a14:hiddenFill>
-            </a:ext>
-            <a:ext uri="{91240B29-F687-4F45-9708-019B960494DF}">
-              <a14:hiddenLine xmlns:a14="http://schemas.microsoft.com/office/drawing/2010/main" w="9525">
-                <a:solidFill>
-                  <a:srgbClr val="000000"/>
-                </a:solidFill>
-                <a:miter lim="800000"/>
-                <a:headEnd/>
-                <a:tailEnd/>
-              </a14:hiddenLine>
-            </a:ext>
-          </a:extLst>
-        </p:spPr>
-        <p:txBody>
-          <a:bodyPr wrap="square" numCol="1" anchorCtr="0" compatLnSpc="1">
-            <a:prstTxWarp prst="textNoShape">
-              <a:avLst/>
-            </a:prstTxWarp>
-          </a:bodyPr>
-          <a:lstStyle>
-            <a:lvl1pPr>
-              <a:defRPr>
-                <a:solidFill>
-                  <a:schemeClr val="tx1"/>
-                </a:solidFill>
-                <a:latin typeface="Arial" panose="020B0604020202020204" pitchFamily="34" charset="0"/>
-              </a:defRPr>
-            </a:lvl1pPr>
-            <a:lvl2pPr marL="742950" indent="-285750">
-              <a:defRPr>
-                <a:solidFill>
-                  <a:schemeClr val="tx1"/>
-                </a:solidFill>
-                <a:latin typeface="Arial" panose="020B0604020202020204" pitchFamily="34" charset="0"/>
-              </a:defRPr>
-            </a:lvl2pPr>
-            <a:lvl3pPr marL="1143000" indent="-228600">
-              <a:defRPr>
-                <a:solidFill>
-                  <a:schemeClr val="tx1"/>
-                </a:solidFill>
-                <a:latin typeface="Arial" panose="020B0604020202020204" pitchFamily="34" charset="0"/>
-              </a:defRPr>
-            </a:lvl3pPr>
-            <a:lvl4pPr marL="1600200" indent="-228600">
-              <a:defRPr>
-                <a:solidFill>
-                  <a:schemeClr val="tx1"/>
-                </a:solidFill>
-                <a:latin typeface="Arial" panose="020B0604020202020204" pitchFamily="34" charset="0"/>
-              </a:defRPr>
-            </a:lvl4pPr>
-            <a:lvl5pPr marL="2057400" indent="-228600">
-              <a:defRPr>
-                <a:solidFill>
-                  <a:schemeClr val="tx1"/>
-                </a:solidFill>
-                <a:latin typeface="Arial" panose="020B0604020202020204" pitchFamily="34" charset="0"/>
-              </a:defRPr>
-            </a:lvl5pPr>
-            <a:lvl6pPr marL="2514600" indent="-228600" eaLnBrk="0" fontAlgn="base" hangingPunct="0">
-              <a:spcBef>
-                <a:spcPct val="0"/>
-              </a:spcBef>
-              <a:spcAft>
-                <a:spcPct val="0"/>
-              </a:spcAft>
-              <a:defRPr>
-                <a:solidFill>
-                  <a:schemeClr val="tx1"/>
-                </a:solidFill>
-                <a:latin typeface="Arial" panose="020B0604020202020204" pitchFamily="34" charset="0"/>
-              </a:defRPr>
-            </a:lvl6pPr>
-            <a:lvl7pPr marL="2971800" indent="-228600" eaLnBrk="0" fontAlgn="base" hangingPunct="0">
-              <a:spcBef>
-                <a:spcPct val="0"/>
-              </a:spcBef>
-              <a:spcAft>
-                <a:spcPct val="0"/>
-              </a:spcAft>
-              <a:defRPr>
-                <a:solidFill>
-                  <a:schemeClr val="tx1"/>
-                </a:solidFill>
-                <a:latin typeface="Arial" panose="020B0604020202020204" pitchFamily="34" charset="0"/>
-              </a:defRPr>
-            </a:lvl7pPr>
-            <a:lvl8pPr marL="3429000" indent="-228600" eaLnBrk="0" fontAlgn="base" hangingPunct="0">
-              <a:spcBef>
-                <a:spcPct val="0"/>
-              </a:spcBef>
-              <a:spcAft>
-                <a:spcPct val="0"/>
-              </a:spcAft>
-              <a:defRPr>
-                <a:solidFill>
-                  <a:schemeClr val="tx1"/>
-                </a:solidFill>
-                <a:latin typeface="Arial" panose="020B0604020202020204" pitchFamily="34" charset="0"/>
-              </a:defRPr>
-            </a:lvl8pPr>
-            <a:lvl9pPr marL="3886200" indent="-228600" eaLnBrk="0" fontAlgn="base" hangingPunct="0">
-              <a:spcBef>
-                <a:spcPct val="0"/>
-              </a:spcBef>
-              <a:spcAft>
-                <a:spcPct val="0"/>
-              </a:spcAft>
-              <a:defRPr>
-                <a:solidFill>
-                  <a:schemeClr val="tx1"/>
-                </a:solidFill>
-                <a:latin typeface="Arial" panose="020B0604020202020204" pitchFamily="34" charset="0"/>
-              </a:defRPr>
-            </a:lvl9pPr>
-          </a:lstStyle>
-          <a:p>
-            <a:r>
-              <a:rPr lang="en-US" altLang="en-US" dirty="0"/>
-              <a:t>MBE 713 FALL 2024         Instructor D.J. Die</a:t>
-            </a:r>
-          </a:p>
-        </p:txBody>
-      </p:sp>
     </p:spTree>
   </p:cSld>
   <p:clrMapOvr>
@@ -10851,7 +11906,20 @@
             </a:pPr>
             <a:r>
               <a:rPr lang="en-US" altLang="en-US" sz="2400" dirty="0"/>
-              <a:t>Change in abundance</a:t>
+              <a:t>Change </a:t>
+            </a:r>
+            <a:r>
+              <a:rPr lang="el-GR" altLang="en-US" sz="2400" dirty="0">
+                <a:solidFill>
+                  <a:srgbClr val="0000FF"/>
+                </a:solidFill>
+                <a:cs typeface="Arial" panose="020B0604020202020204" pitchFamily="34" charset="0"/>
+              </a:rPr>
+              <a:t>Δ </a:t>
+            </a:r>
+            <a:r>
+              <a:rPr lang="en-US" altLang="en-US" sz="2400" dirty="0"/>
+              <a:t>in abundance</a:t>
             </a:r>
           </a:p>
           <a:p>
@@ -11195,306 +12263,6 @@
                 <a:srgbClr val="0000FF"/>
               </a:solidFill>
             </a:endParaRPr>
-          </a:p>
-        </p:txBody>
-      </p:sp>
-      <p:sp>
-        <p:nvSpPr>
-          <p:cNvPr id="89092" name="Date Placeholder 8">
-            <a:extLst>
-              <a:ext uri="{FF2B5EF4-FFF2-40B4-BE49-F238E27FC236}">
-                <a16:creationId xmlns:a16="http://schemas.microsoft.com/office/drawing/2014/main" id="{174B3A14-6F86-4E74-80FF-47EA1701EC5D}"/>
-              </a:ext>
-            </a:extLst>
-          </p:cNvPr>
-          <p:cNvSpPr>
-            <a:spLocks noGrp="1"/>
-          </p:cNvSpPr>
-          <p:nvPr>
-            <p:ph type="dt" sz="quarter" idx="10"/>
-          </p:nvPr>
-        </p:nvSpPr>
-        <p:spPr bwMode="auto">
-          <a:noFill/>
-          <a:extLst>
-            <a:ext uri="{909E8E84-426E-40DD-AFC4-6F175D3DCCD1}">
-              <a14:hiddenFill xmlns:a14="http://schemas.microsoft.com/office/drawing/2010/main">
-                <a:solidFill>
-                  <a:srgbClr val="FFFFFF"/>
-                </a:solidFill>
-              </a14:hiddenFill>
-            </a:ext>
-            <a:ext uri="{91240B29-F687-4F45-9708-019B960494DF}">
-              <a14:hiddenLine xmlns:a14="http://schemas.microsoft.com/office/drawing/2010/main" w="9525">
-                <a:solidFill>
-                  <a:srgbClr val="000000"/>
-                </a:solidFill>
-                <a:miter lim="800000"/>
-                <a:headEnd/>
-                <a:tailEnd/>
-              </a14:hiddenLine>
-            </a:ext>
-          </a:extLst>
-        </p:spPr>
-        <p:txBody>
-          <a:bodyPr wrap="square" numCol="1" anchorCtr="0" compatLnSpc="1">
-            <a:prstTxWarp prst="textNoShape">
-              <a:avLst/>
-            </a:prstTxWarp>
-          </a:bodyPr>
-          <a:lstStyle>
-            <a:lvl1pPr>
-              <a:defRPr>
-                <a:solidFill>
-                  <a:schemeClr val="tx1"/>
-                </a:solidFill>
-                <a:latin typeface="Arial" panose="020B0604020202020204" pitchFamily="34" charset="0"/>
-              </a:defRPr>
-            </a:lvl1pPr>
-            <a:lvl2pPr marL="742950" indent="-285750">
-              <a:defRPr>
-                <a:solidFill>
-                  <a:schemeClr val="tx1"/>
-                </a:solidFill>
-                <a:latin typeface="Arial" panose="020B0604020202020204" pitchFamily="34" charset="0"/>
-              </a:defRPr>
-            </a:lvl2pPr>
-            <a:lvl3pPr marL="1143000" indent="-228600">
-              <a:defRPr>
-                <a:solidFill>
-                  <a:schemeClr val="tx1"/>
-                </a:solidFill>
-                <a:latin typeface="Arial" panose="020B0604020202020204" pitchFamily="34" charset="0"/>
-              </a:defRPr>
-            </a:lvl3pPr>
-            <a:lvl4pPr marL="1600200" indent="-228600">
-              <a:defRPr>
-                <a:solidFill>
-                  <a:schemeClr val="tx1"/>
-                </a:solidFill>
-                <a:latin typeface="Arial" panose="020B0604020202020204" pitchFamily="34" charset="0"/>
-              </a:defRPr>
-            </a:lvl4pPr>
-            <a:lvl5pPr marL="2057400" indent="-228600">
-              <a:defRPr>
-                <a:solidFill>
-                  <a:schemeClr val="tx1"/>
-                </a:solidFill>
-                <a:latin typeface="Arial" panose="020B0604020202020204" pitchFamily="34" charset="0"/>
-              </a:defRPr>
-            </a:lvl5pPr>
-            <a:lvl6pPr marL="2514600" indent="-228600" eaLnBrk="0" fontAlgn="base" hangingPunct="0">
-              <a:spcBef>
-                <a:spcPct val="0"/>
-              </a:spcBef>
-              <a:spcAft>
-                <a:spcPct val="0"/>
-              </a:spcAft>
-              <a:defRPr>
-                <a:solidFill>
-                  <a:schemeClr val="tx1"/>
-                </a:solidFill>
-                <a:latin typeface="Arial" panose="020B0604020202020204" pitchFamily="34" charset="0"/>
-              </a:defRPr>
-            </a:lvl6pPr>
-            <a:lvl7pPr marL="2971800" indent="-228600" eaLnBrk="0" fontAlgn="base" hangingPunct="0">
-              <a:spcBef>
-                <a:spcPct val="0"/>
-              </a:spcBef>
-              <a:spcAft>
-                <a:spcPct val="0"/>
-              </a:spcAft>
-              <a:defRPr>
-                <a:solidFill>
-                  <a:schemeClr val="tx1"/>
-                </a:solidFill>
-                <a:latin typeface="Arial" panose="020B0604020202020204" pitchFamily="34" charset="0"/>
-              </a:defRPr>
-            </a:lvl7pPr>
-            <a:lvl8pPr marL="3429000" indent="-228600" eaLnBrk="0" fontAlgn="base" hangingPunct="0">
-              <a:spcBef>
-                <a:spcPct val="0"/>
-              </a:spcBef>
-              <a:spcAft>
-                <a:spcPct val="0"/>
-              </a:spcAft>
-              <a:defRPr>
-                <a:solidFill>
-                  <a:schemeClr val="tx1"/>
-                </a:solidFill>
-                <a:latin typeface="Arial" panose="020B0604020202020204" pitchFamily="34" charset="0"/>
-              </a:defRPr>
-            </a:lvl8pPr>
-            <a:lvl9pPr marL="3886200" indent="-228600" eaLnBrk="0" fontAlgn="base" hangingPunct="0">
-              <a:spcBef>
-                <a:spcPct val="0"/>
-              </a:spcBef>
-              <a:spcAft>
-                <a:spcPct val="0"/>
-              </a:spcAft>
-              <a:defRPr>
-                <a:solidFill>
-                  <a:schemeClr val="tx1"/>
-                </a:solidFill>
-                <a:latin typeface="Arial" panose="020B0604020202020204" pitchFamily="34" charset="0"/>
-              </a:defRPr>
-            </a:lvl9pPr>
-          </a:lstStyle>
-          <a:p>
-            <a:r>
-              <a:rPr lang="en-US" altLang="en-US" dirty="0"/>
-              <a:t>8/15/2024</a:t>
-            </a:r>
-          </a:p>
-        </p:txBody>
-      </p:sp>
-      <p:sp>
-        <p:nvSpPr>
-          <p:cNvPr id="89093" name="Footer Placeholder 9">
-            <a:extLst>
-              <a:ext uri="{FF2B5EF4-FFF2-40B4-BE49-F238E27FC236}">
-                <a16:creationId xmlns:a16="http://schemas.microsoft.com/office/drawing/2014/main" id="{F9B032D3-C3EF-45BB-8CE5-53868C5BF506}"/>
-              </a:ext>
-            </a:extLst>
-          </p:cNvPr>
-          <p:cNvSpPr>
-            <a:spLocks noGrp="1"/>
-          </p:cNvSpPr>
-          <p:nvPr>
-            <p:ph type="ftr" sz="quarter" idx="11"/>
-          </p:nvPr>
-        </p:nvSpPr>
-        <p:spPr bwMode="auto">
-          <a:noFill/>
-          <a:extLst>
-            <a:ext uri="{909E8E84-426E-40DD-AFC4-6F175D3DCCD1}">
-              <a14:hiddenFill xmlns:a14="http://schemas.microsoft.com/office/drawing/2010/main">
-                <a:solidFill>
-                  <a:srgbClr val="FFFFFF"/>
-                </a:solidFill>
-              </a14:hiddenFill>
-            </a:ext>
-            <a:ext uri="{91240B29-F687-4F45-9708-019B960494DF}">
-              <a14:hiddenLine xmlns:a14="http://schemas.microsoft.com/office/drawing/2010/main" w="9525">
-                <a:solidFill>
-                  <a:srgbClr val="000000"/>
-                </a:solidFill>
-                <a:miter lim="800000"/>
-                <a:headEnd/>
-                <a:tailEnd/>
-              </a14:hiddenLine>
-            </a:ext>
-          </a:extLst>
-        </p:spPr>
-        <p:txBody>
-          <a:bodyPr wrap="square" numCol="1" anchorCtr="0" compatLnSpc="1">
-            <a:prstTxWarp prst="textNoShape">
-              <a:avLst/>
-            </a:prstTxWarp>
-          </a:bodyPr>
-          <a:lstStyle>
-            <a:lvl1pPr>
-              <a:defRPr>
-                <a:solidFill>
-                  <a:schemeClr val="tx1"/>
-                </a:solidFill>
-                <a:latin typeface="Arial" panose="020B0604020202020204" pitchFamily="34" charset="0"/>
-              </a:defRPr>
-            </a:lvl1pPr>
-            <a:lvl2pPr marL="742950" indent="-285750">
-              <a:defRPr>
-                <a:solidFill>
-                  <a:schemeClr val="tx1"/>
-                </a:solidFill>
-                <a:latin typeface="Arial" panose="020B0604020202020204" pitchFamily="34" charset="0"/>
-              </a:defRPr>
-            </a:lvl2pPr>
-            <a:lvl3pPr marL="1143000" indent="-228600">
-              <a:defRPr>
-                <a:solidFill>
-                  <a:schemeClr val="tx1"/>
-                </a:solidFill>
-                <a:latin typeface="Arial" panose="020B0604020202020204" pitchFamily="34" charset="0"/>
-              </a:defRPr>
-            </a:lvl3pPr>
-            <a:lvl4pPr marL="1600200" indent="-228600">
-              <a:defRPr>
-                <a:solidFill>
-                  <a:schemeClr val="tx1"/>
-                </a:solidFill>
-                <a:latin typeface="Arial" panose="020B0604020202020204" pitchFamily="34" charset="0"/>
-              </a:defRPr>
-            </a:lvl4pPr>
-            <a:lvl5pPr marL="2057400" indent="-228600">
-              <a:defRPr>
-                <a:solidFill>
-                  <a:schemeClr val="tx1"/>
-                </a:solidFill>
-                <a:latin typeface="Arial" panose="020B0604020202020204" pitchFamily="34" charset="0"/>
-              </a:defRPr>
-            </a:lvl5pPr>
-            <a:lvl6pPr marL="2514600" indent="-228600" eaLnBrk="0" fontAlgn="base" hangingPunct="0">
-              <a:spcBef>
-                <a:spcPct val="0"/>
-              </a:spcBef>
-              <a:spcAft>
-                <a:spcPct val="0"/>
-              </a:spcAft>
-              <a:defRPr>
-                <a:solidFill>
-                  <a:schemeClr val="tx1"/>
-                </a:solidFill>
-                <a:latin typeface="Arial" panose="020B0604020202020204" pitchFamily="34" charset="0"/>
-              </a:defRPr>
-            </a:lvl6pPr>
-            <a:lvl7pPr marL="2971800" indent="-228600" eaLnBrk="0" fontAlgn="base" hangingPunct="0">
-              <a:spcBef>
-                <a:spcPct val="0"/>
-              </a:spcBef>
-              <a:spcAft>
-                <a:spcPct val="0"/>
-              </a:spcAft>
-              <a:defRPr>
-                <a:solidFill>
-                  <a:schemeClr val="tx1"/>
-                </a:solidFill>
-                <a:latin typeface="Arial" panose="020B0604020202020204" pitchFamily="34" charset="0"/>
-              </a:defRPr>
-            </a:lvl7pPr>
-            <a:lvl8pPr marL="3429000" indent="-228600" eaLnBrk="0" fontAlgn="base" hangingPunct="0">
-              <a:spcBef>
-                <a:spcPct val="0"/>
-              </a:spcBef>
-              <a:spcAft>
-                <a:spcPct val="0"/>
-              </a:spcAft>
-              <a:defRPr>
-                <a:solidFill>
-                  <a:schemeClr val="tx1"/>
-                </a:solidFill>
-                <a:latin typeface="Arial" panose="020B0604020202020204" pitchFamily="34" charset="0"/>
-              </a:defRPr>
-            </a:lvl8pPr>
-            <a:lvl9pPr marL="3886200" indent="-228600" eaLnBrk="0" fontAlgn="base" hangingPunct="0">
-              <a:spcBef>
-                <a:spcPct val="0"/>
-              </a:spcBef>
-              <a:spcAft>
-                <a:spcPct val="0"/>
-              </a:spcAft>
-              <a:defRPr>
-                <a:solidFill>
-                  <a:schemeClr val="tx1"/>
-                </a:solidFill>
-                <a:latin typeface="Arial" panose="020B0604020202020204" pitchFamily="34" charset="0"/>
-              </a:defRPr>
-            </a:lvl9pPr>
-          </a:lstStyle>
-          <a:p>
-            <a:r>
-              <a:rPr lang="en-US" altLang="en-US" dirty="0"/>
-              <a:t>MBE 713 FALL 2024         Instructor D.J. Die</a:t>
-            </a:r>
           </a:p>
         </p:txBody>
       </p:sp>
@@ -11632,8 +12400,8 @@
               <a:buNone/>
             </a:pPr>
             <a:r>
-              <a:rPr lang="en-US" altLang="en-US" sz="2800"/>
-              <a:t>	Now let’s think about births and deaths per individual,</a:t>
+              <a:rPr lang="en-US" altLang="en-US" sz="2800" dirty="0"/>
+              <a:t>	Per individual birth and death rates</a:t>
             </a:r>
           </a:p>
           <a:p>
@@ -11641,42 +12409,42 @@
               <a:buFontTx/>
               <a:buNone/>
             </a:pPr>
-            <a:endParaRPr lang="en-US" altLang="en-US" sz="2800"/>
+            <a:endParaRPr lang="en-US" altLang="en-US" sz="2800" dirty="0"/>
           </a:p>
           <a:p>
             <a:pPr eaLnBrk="1" hangingPunct="1">
               <a:buFontTx/>
               <a:buNone/>
             </a:pPr>
-            <a:endParaRPr lang="en-US" altLang="en-US" sz="2800"/>
+            <a:endParaRPr lang="en-US" altLang="en-US" sz="2800" dirty="0"/>
           </a:p>
           <a:p>
             <a:pPr eaLnBrk="1" hangingPunct="1">
               <a:buFontTx/>
               <a:buNone/>
             </a:pPr>
-            <a:endParaRPr lang="en-US" altLang="en-US" sz="2800"/>
+            <a:endParaRPr lang="en-US" altLang="en-US" sz="2800" dirty="0"/>
           </a:p>
           <a:p>
             <a:pPr eaLnBrk="1" hangingPunct="1">
               <a:buFontTx/>
               <a:buNone/>
             </a:pPr>
-            <a:endParaRPr lang="en-US" altLang="en-US" sz="2800"/>
+            <a:endParaRPr lang="en-US" altLang="en-US" sz="2800" dirty="0"/>
           </a:p>
           <a:p>
             <a:pPr eaLnBrk="1" hangingPunct="1">
               <a:buFontTx/>
               <a:buNone/>
             </a:pPr>
-            <a:endParaRPr lang="en-US" altLang="en-US" sz="2800"/>
+            <a:endParaRPr lang="en-US" altLang="en-US" sz="2800" dirty="0"/>
           </a:p>
           <a:p>
             <a:pPr eaLnBrk="1" hangingPunct="1">
               <a:buFontTx/>
               <a:buNone/>
             </a:pPr>
-            <a:endParaRPr lang="en-US" altLang="en-US" sz="2800"/>
+            <a:endParaRPr lang="en-US" altLang="en-US" sz="2800" dirty="0"/>
           </a:p>
         </p:txBody>
       </p:sp>
@@ -11894,504 +12662,6 @@
           </a:graphicData>
         </a:graphic>
       </p:graphicFrame>
-      <p:sp>
-        <p:nvSpPr>
-          <p:cNvPr id="93190" name="Date Placeholder 11">
-            <a:extLst>
-              <a:ext uri="{FF2B5EF4-FFF2-40B4-BE49-F238E27FC236}">
-                <a16:creationId xmlns:a16="http://schemas.microsoft.com/office/drawing/2014/main" id="{D8257014-8C9C-4F83-9191-A6E934D1A2CE}"/>
-              </a:ext>
-            </a:extLst>
-          </p:cNvPr>
-          <p:cNvSpPr>
-            <a:spLocks noGrp="1"/>
-          </p:cNvSpPr>
-          <p:nvPr>
-            <p:ph type="dt" sz="quarter" idx="10"/>
-          </p:nvPr>
-        </p:nvSpPr>
-        <p:spPr bwMode="auto">
-          <a:noFill/>
-          <a:extLst>
-            <a:ext uri="{909E8E84-426E-40DD-AFC4-6F175D3DCCD1}">
-              <a14:hiddenFill xmlns:a14="http://schemas.microsoft.com/office/drawing/2010/main">
-                <a:solidFill>
-                  <a:srgbClr val="FFFFFF"/>
-                </a:solidFill>
-              </a14:hiddenFill>
-            </a:ext>
-            <a:ext uri="{91240B29-F687-4F45-9708-019B960494DF}">
-              <a14:hiddenLine xmlns:a14="http://schemas.microsoft.com/office/drawing/2010/main" w="9525">
-                <a:solidFill>
-                  <a:srgbClr val="000000"/>
-                </a:solidFill>
-                <a:miter lim="800000"/>
-                <a:headEnd/>
-                <a:tailEnd/>
-              </a14:hiddenLine>
-            </a:ext>
-          </a:extLst>
-        </p:spPr>
-        <p:txBody>
-          <a:bodyPr wrap="square" numCol="1" anchorCtr="0" compatLnSpc="1">
-            <a:prstTxWarp prst="textNoShape">
-              <a:avLst/>
-            </a:prstTxWarp>
-          </a:bodyPr>
-          <a:lstStyle>
-            <a:lvl1pPr>
-              <a:defRPr>
-                <a:solidFill>
-                  <a:schemeClr val="tx1"/>
-                </a:solidFill>
-                <a:latin typeface="Arial" panose="020B0604020202020204" pitchFamily="34" charset="0"/>
-              </a:defRPr>
-            </a:lvl1pPr>
-            <a:lvl2pPr marL="742950" indent="-285750">
-              <a:defRPr>
-                <a:solidFill>
-                  <a:schemeClr val="tx1"/>
-                </a:solidFill>
-                <a:latin typeface="Arial" panose="020B0604020202020204" pitchFamily="34" charset="0"/>
-              </a:defRPr>
-            </a:lvl2pPr>
-            <a:lvl3pPr marL="1143000" indent="-228600">
-              <a:defRPr>
-                <a:solidFill>
-                  <a:schemeClr val="tx1"/>
-                </a:solidFill>
-                <a:latin typeface="Arial" panose="020B0604020202020204" pitchFamily="34" charset="0"/>
-              </a:defRPr>
-            </a:lvl3pPr>
-            <a:lvl4pPr marL="1600200" indent="-228600">
-              <a:defRPr>
-                <a:solidFill>
-                  <a:schemeClr val="tx1"/>
-                </a:solidFill>
-                <a:latin typeface="Arial" panose="020B0604020202020204" pitchFamily="34" charset="0"/>
-              </a:defRPr>
-            </a:lvl4pPr>
-            <a:lvl5pPr marL="2057400" indent="-228600">
-              <a:defRPr>
-                <a:solidFill>
-                  <a:schemeClr val="tx1"/>
-                </a:solidFill>
-                <a:latin typeface="Arial" panose="020B0604020202020204" pitchFamily="34" charset="0"/>
-              </a:defRPr>
-            </a:lvl5pPr>
-            <a:lvl6pPr marL="2514600" indent="-228600" eaLnBrk="0" fontAlgn="base" hangingPunct="0">
-              <a:spcBef>
-                <a:spcPct val="0"/>
-              </a:spcBef>
-              <a:spcAft>
-                <a:spcPct val="0"/>
-              </a:spcAft>
-              <a:defRPr>
-                <a:solidFill>
-                  <a:schemeClr val="tx1"/>
-                </a:solidFill>
-                <a:latin typeface="Arial" panose="020B0604020202020204" pitchFamily="34" charset="0"/>
-              </a:defRPr>
-            </a:lvl6pPr>
-            <a:lvl7pPr marL="2971800" indent="-228600" eaLnBrk="0" fontAlgn="base" hangingPunct="0">
-              <a:spcBef>
-                <a:spcPct val="0"/>
-              </a:spcBef>
-              <a:spcAft>
-                <a:spcPct val="0"/>
-              </a:spcAft>
-              <a:defRPr>
-                <a:solidFill>
-                  <a:schemeClr val="tx1"/>
-                </a:solidFill>
-                <a:latin typeface="Arial" panose="020B0604020202020204" pitchFamily="34" charset="0"/>
-              </a:defRPr>
-            </a:lvl7pPr>
-            <a:lvl8pPr marL="3429000" indent="-228600" eaLnBrk="0" fontAlgn="base" hangingPunct="0">
-              <a:spcBef>
-                <a:spcPct val="0"/>
-              </a:spcBef>
-              <a:spcAft>
-                <a:spcPct val="0"/>
-              </a:spcAft>
-              <a:defRPr>
-                <a:solidFill>
-                  <a:schemeClr val="tx1"/>
-                </a:solidFill>
-                <a:latin typeface="Arial" panose="020B0604020202020204" pitchFamily="34" charset="0"/>
-              </a:defRPr>
-            </a:lvl8pPr>
-            <a:lvl9pPr marL="3886200" indent="-228600" eaLnBrk="0" fontAlgn="base" hangingPunct="0">
-              <a:spcBef>
-                <a:spcPct val="0"/>
-              </a:spcBef>
-              <a:spcAft>
-                <a:spcPct val="0"/>
-              </a:spcAft>
-              <a:defRPr>
-                <a:solidFill>
-                  <a:schemeClr val="tx1"/>
-                </a:solidFill>
-                <a:latin typeface="Arial" panose="020B0604020202020204" pitchFamily="34" charset="0"/>
-              </a:defRPr>
-            </a:lvl9pPr>
-          </a:lstStyle>
-          <a:p>
-            <a:r>
-              <a:rPr lang="en-US" altLang="en-US" dirty="0"/>
-              <a:t>8/15/2024</a:t>
-            </a:r>
-          </a:p>
-        </p:txBody>
-      </p:sp>
-      <p:sp>
-        <p:nvSpPr>
-          <p:cNvPr id="93191" name="Footer Placeholder 12">
-            <a:extLst>
-              <a:ext uri="{FF2B5EF4-FFF2-40B4-BE49-F238E27FC236}">
-                <a16:creationId xmlns:a16="http://schemas.microsoft.com/office/drawing/2014/main" id="{7B63A042-215F-4855-9363-E7245053550E}"/>
-              </a:ext>
-            </a:extLst>
-          </p:cNvPr>
-          <p:cNvSpPr>
-            <a:spLocks noGrp="1"/>
-          </p:cNvSpPr>
-          <p:nvPr>
-            <p:ph type="ftr" sz="quarter" idx="11"/>
-          </p:nvPr>
-        </p:nvSpPr>
-        <p:spPr bwMode="auto">
-          <a:noFill/>
-          <a:extLst>
-            <a:ext uri="{909E8E84-426E-40DD-AFC4-6F175D3DCCD1}">
-              <a14:hiddenFill xmlns:a14="http://schemas.microsoft.com/office/drawing/2010/main">
-                <a:solidFill>
-                  <a:srgbClr val="FFFFFF"/>
-                </a:solidFill>
-              </a14:hiddenFill>
-            </a:ext>
-            <a:ext uri="{91240B29-F687-4F45-9708-019B960494DF}">
-              <a14:hiddenLine xmlns:a14="http://schemas.microsoft.com/office/drawing/2010/main" w="9525">
-                <a:solidFill>
-                  <a:srgbClr val="000000"/>
-                </a:solidFill>
-                <a:miter lim="800000"/>
-                <a:headEnd/>
-                <a:tailEnd/>
-              </a14:hiddenLine>
-            </a:ext>
-          </a:extLst>
-        </p:spPr>
-        <p:txBody>
-          <a:bodyPr wrap="square" numCol="1" anchorCtr="0" compatLnSpc="1">
-            <a:prstTxWarp prst="textNoShape">
-              <a:avLst/>
-            </a:prstTxWarp>
-          </a:bodyPr>
-          <a:lstStyle>
-            <a:lvl1pPr>
-              <a:defRPr>
-                <a:solidFill>
-                  <a:schemeClr val="tx1"/>
-                </a:solidFill>
-                <a:latin typeface="Arial" panose="020B0604020202020204" pitchFamily="34" charset="0"/>
-              </a:defRPr>
-            </a:lvl1pPr>
-            <a:lvl2pPr marL="742950" indent="-285750">
-              <a:defRPr>
-                <a:solidFill>
-                  <a:schemeClr val="tx1"/>
-                </a:solidFill>
-                <a:latin typeface="Arial" panose="020B0604020202020204" pitchFamily="34" charset="0"/>
-              </a:defRPr>
-            </a:lvl2pPr>
-            <a:lvl3pPr marL="1143000" indent="-228600">
-              <a:defRPr>
-                <a:solidFill>
-                  <a:schemeClr val="tx1"/>
-                </a:solidFill>
-                <a:latin typeface="Arial" panose="020B0604020202020204" pitchFamily="34" charset="0"/>
-              </a:defRPr>
-            </a:lvl3pPr>
-            <a:lvl4pPr marL="1600200" indent="-228600">
-              <a:defRPr>
-                <a:solidFill>
-                  <a:schemeClr val="tx1"/>
-                </a:solidFill>
-                <a:latin typeface="Arial" panose="020B0604020202020204" pitchFamily="34" charset="0"/>
-              </a:defRPr>
-            </a:lvl4pPr>
-            <a:lvl5pPr marL="2057400" indent="-228600">
-              <a:defRPr>
-                <a:solidFill>
-                  <a:schemeClr val="tx1"/>
-                </a:solidFill>
-                <a:latin typeface="Arial" panose="020B0604020202020204" pitchFamily="34" charset="0"/>
-              </a:defRPr>
-            </a:lvl5pPr>
-            <a:lvl6pPr marL="2514600" indent="-228600" eaLnBrk="0" fontAlgn="base" hangingPunct="0">
-              <a:spcBef>
-                <a:spcPct val="0"/>
-              </a:spcBef>
-              <a:spcAft>
-                <a:spcPct val="0"/>
-              </a:spcAft>
-              <a:defRPr>
-                <a:solidFill>
-                  <a:schemeClr val="tx1"/>
-                </a:solidFill>
-                <a:latin typeface="Arial" panose="020B0604020202020204" pitchFamily="34" charset="0"/>
-              </a:defRPr>
-            </a:lvl6pPr>
-            <a:lvl7pPr marL="2971800" indent="-228600" eaLnBrk="0" fontAlgn="base" hangingPunct="0">
-              <a:spcBef>
-                <a:spcPct val="0"/>
-              </a:spcBef>
-              <a:spcAft>
-                <a:spcPct val="0"/>
-              </a:spcAft>
-              <a:defRPr>
-                <a:solidFill>
-                  <a:schemeClr val="tx1"/>
-                </a:solidFill>
-                <a:latin typeface="Arial" panose="020B0604020202020204" pitchFamily="34" charset="0"/>
-              </a:defRPr>
-            </a:lvl7pPr>
-            <a:lvl8pPr marL="3429000" indent="-228600" eaLnBrk="0" fontAlgn="base" hangingPunct="0">
-              <a:spcBef>
-                <a:spcPct val="0"/>
-              </a:spcBef>
-              <a:spcAft>
-                <a:spcPct val="0"/>
-              </a:spcAft>
-              <a:defRPr>
-                <a:solidFill>
-                  <a:schemeClr val="tx1"/>
-                </a:solidFill>
-                <a:latin typeface="Arial" panose="020B0604020202020204" pitchFamily="34" charset="0"/>
-              </a:defRPr>
-            </a:lvl8pPr>
-            <a:lvl9pPr marL="3886200" indent="-228600" eaLnBrk="0" fontAlgn="base" hangingPunct="0">
-              <a:spcBef>
-                <a:spcPct val="0"/>
-              </a:spcBef>
-              <a:spcAft>
-                <a:spcPct val="0"/>
-              </a:spcAft>
-              <a:defRPr>
-                <a:solidFill>
-                  <a:schemeClr val="tx1"/>
-                </a:solidFill>
-                <a:latin typeface="Arial" panose="020B0604020202020204" pitchFamily="34" charset="0"/>
-              </a:defRPr>
-            </a:lvl9pPr>
-          </a:lstStyle>
-          <a:p>
-            <a:r>
-              <a:rPr lang="nl-NL" altLang="en-US" dirty="0"/>
-              <a:t>MBE 713 FALL 2024         Instructor D.J. Die</a:t>
-            </a:r>
-            <a:endParaRPr lang="en-US" altLang="en-US" dirty="0"/>
-          </a:p>
-        </p:txBody>
-      </p:sp>
-      <p:sp>
-        <p:nvSpPr>
-          <p:cNvPr id="93192" name="Text Box 6">
-            <a:extLst>
-              <a:ext uri="{FF2B5EF4-FFF2-40B4-BE49-F238E27FC236}">
-                <a16:creationId xmlns:a16="http://schemas.microsoft.com/office/drawing/2014/main" id="{53731DDF-3C64-4C52-9758-80EB1BB24C45}"/>
-              </a:ext>
-            </a:extLst>
-          </p:cNvPr>
-          <p:cNvSpPr txBox="1">
-            <a:spLocks noChangeArrowheads="1"/>
-          </p:cNvSpPr>
-          <p:nvPr/>
-        </p:nvSpPr>
-        <p:spPr bwMode="auto">
-          <a:xfrm>
-            <a:off x="838200" y="4876800"/>
-            <a:ext cx="6492875" cy="946150"/>
-          </a:xfrm>
-          <a:prstGeom prst="rect">
-            <a:avLst/>
-          </a:prstGeom>
-          <a:noFill/>
-          <a:ln>
-            <a:noFill/>
-          </a:ln>
-          <a:extLst>
-            <a:ext uri="{909E8E84-426E-40DD-AFC4-6F175D3DCCD1}">
-              <a14:hiddenFill xmlns:a14="http://schemas.microsoft.com/office/drawing/2010/main">
-                <a:solidFill>
-                  <a:srgbClr val="FFFFFF"/>
-                </a:solidFill>
-              </a14:hiddenFill>
-            </a:ext>
-            <a:ext uri="{91240B29-F687-4F45-9708-019B960494DF}">
-              <a14:hiddenLine xmlns:a14="http://schemas.microsoft.com/office/drawing/2010/main" w="9525">
-                <a:solidFill>
-                  <a:srgbClr val="000000"/>
-                </a:solidFill>
-                <a:miter lim="800000"/>
-                <a:headEnd/>
-                <a:tailEnd/>
-              </a14:hiddenLine>
-            </a:ext>
-          </a:extLst>
-        </p:spPr>
-        <p:txBody>
-          <a:bodyPr>
-            <a:spAutoFit/>
-          </a:bodyPr>
-          <a:lstStyle>
-            <a:lvl1pPr>
-              <a:defRPr>
-                <a:solidFill>
-                  <a:schemeClr val="tx1"/>
-                </a:solidFill>
-                <a:latin typeface="Arial" panose="020B0604020202020204" pitchFamily="34" charset="0"/>
-              </a:defRPr>
-            </a:lvl1pPr>
-            <a:lvl2pPr marL="742950" indent="-285750">
-              <a:defRPr>
-                <a:solidFill>
-                  <a:schemeClr val="tx1"/>
-                </a:solidFill>
-                <a:latin typeface="Arial" panose="020B0604020202020204" pitchFamily="34" charset="0"/>
-              </a:defRPr>
-            </a:lvl2pPr>
-            <a:lvl3pPr marL="1143000" indent="-228600">
-              <a:defRPr>
-                <a:solidFill>
-                  <a:schemeClr val="tx1"/>
-                </a:solidFill>
-                <a:latin typeface="Arial" panose="020B0604020202020204" pitchFamily="34" charset="0"/>
-              </a:defRPr>
-            </a:lvl3pPr>
-            <a:lvl4pPr marL="1600200" indent="-228600">
-              <a:defRPr>
-                <a:solidFill>
-                  <a:schemeClr val="tx1"/>
-                </a:solidFill>
-                <a:latin typeface="Arial" panose="020B0604020202020204" pitchFamily="34" charset="0"/>
-              </a:defRPr>
-            </a:lvl4pPr>
-            <a:lvl5pPr marL="2057400" indent="-228600">
-              <a:defRPr>
-                <a:solidFill>
-                  <a:schemeClr val="tx1"/>
-                </a:solidFill>
-                <a:latin typeface="Arial" panose="020B0604020202020204" pitchFamily="34" charset="0"/>
-              </a:defRPr>
-            </a:lvl5pPr>
-            <a:lvl6pPr marL="2514600" indent="-228600" eaLnBrk="0" fontAlgn="base" hangingPunct="0">
-              <a:spcBef>
-                <a:spcPct val="0"/>
-              </a:spcBef>
-              <a:spcAft>
-                <a:spcPct val="0"/>
-              </a:spcAft>
-              <a:defRPr>
-                <a:solidFill>
-                  <a:schemeClr val="tx1"/>
-                </a:solidFill>
-                <a:latin typeface="Arial" panose="020B0604020202020204" pitchFamily="34" charset="0"/>
-              </a:defRPr>
-            </a:lvl6pPr>
-            <a:lvl7pPr marL="2971800" indent="-228600" eaLnBrk="0" fontAlgn="base" hangingPunct="0">
-              <a:spcBef>
-                <a:spcPct val="0"/>
-              </a:spcBef>
-              <a:spcAft>
-                <a:spcPct val="0"/>
-              </a:spcAft>
-              <a:defRPr>
-                <a:solidFill>
-                  <a:schemeClr val="tx1"/>
-                </a:solidFill>
-                <a:latin typeface="Arial" panose="020B0604020202020204" pitchFamily="34" charset="0"/>
-              </a:defRPr>
-            </a:lvl7pPr>
-            <a:lvl8pPr marL="3429000" indent="-228600" eaLnBrk="0" fontAlgn="base" hangingPunct="0">
-              <a:spcBef>
-                <a:spcPct val="0"/>
-              </a:spcBef>
-              <a:spcAft>
-                <a:spcPct val="0"/>
-              </a:spcAft>
-              <a:defRPr>
-                <a:solidFill>
-                  <a:schemeClr val="tx1"/>
-                </a:solidFill>
-                <a:latin typeface="Arial" panose="020B0604020202020204" pitchFamily="34" charset="0"/>
-              </a:defRPr>
-            </a:lvl8pPr>
-            <a:lvl9pPr marL="3886200" indent="-228600" eaLnBrk="0" fontAlgn="base" hangingPunct="0">
-              <a:spcBef>
-                <a:spcPct val="0"/>
-              </a:spcBef>
-              <a:spcAft>
-                <a:spcPct val="0"/>
-              </a:spcAft>
-              <a:defRPr>
-                <a:solidFill>
-                  <a:schemeClr val="tx1"/>
-                </a:solidFill>
-                <a:latin typeface="Arial" panose="020B0604020202020204" pitchFamily="34" charset="0"/>
-              </a:defRPr>
-            </a:lvl9pPr>
-          </a:lstStyle>
-          <a:p>
-            <a:pPr eaLnBrk="1" hangingPunct="1"/>
-            <a:r>
-              <a:rPr lang="en-US" altLang="en-US" sz="2800">
-                <a:solidFill>
-                  <a:srgbClr val="0000FF"/>
-                </a:solidFill>
-              </a:rPr>
-              <a:t>b</a:t>
-            </a:r>
-            <a:r>
-              <a:rPr lang="en-US" altLang="en-US" sz="2800" baseline="-25000">
-                <a:solidFill>
-                  <a:srgbClr val="0000FF"/>
-                </a:solidFill>
-              </a:rPr>
-              <a:t>t</a:t>
-            </a:r>
-            <a:r>
-              <a:rPr lang="en-US" altLang="en-US" sz="2800" baseline="-25000"/>
-              <a:t> </a:t>
-            </a:r>
-            <a:r>
-              <a:rPr lang="en-US" altLang="en-US" sz="2800"/>
-              <a:t>and </a:t>
-            </a:r>
-            <a:r>
-              <a:rPr lang="en-US" altLang="en-US" sz="2800">
-                <a:solidFill>
-                  <a:srgbClr val="0000FF"/>
-                </a:solidFill>
-              </a:rPr>
-              <a:t>d</a:t>
-            </a:r>
-            <a:r>
-              <a:rPr lang="en-US" altLang="en-US" sz="2800" baseline="-25000">
-                <a:solidFill>
-                  <a:srgbClr val="0000FF"/>
-                </a:solidFill>
-              </a:rPr>
-              <a:t>t</a:t>
-            </a:r>
-            <a:r>
-              <a:rPr lang="en-US" altLang="en-US" sz="2800"/>
-              <a:t> are now rates per individual, per capita rates</a:t>
-            </a:r>
-          </a:p>
-        </p:txBody>
-      </p:sp>
     </p:spTree>
   </p:cSld>
   <p:clrMapOvr>
@@ -12689,8 +12959,8 @@
           </a:graphicData>
         </a:graphic>
       </p:graphicFrame>
-      <mc:AlternateContent xmlns:mc="http://schemas.openxmlformats.org/markup-compatibility/2006">
-        <mc:Choice xmlns:a14="http://schemas.microsoft.com/office/drawing/2010/main" Requires="a14">
+      <mc:AlternateContent xmlns:mc="http://schemas.openxmlformats.org/markup-compatibility/2006" xmlns:a14="http://schemas.microsoft.com/office/drawing/2010/main">
+        <mc:Choice Requires="a14">
           <p:sp>
             <p:nvSpPr>
               <p:cNvPr id="99333" name="Object 5">
@@ -12700,7 +12970,9 @@
                   </a:ext>
                 </a:extLst>
               </p:cNvPr>
-              <p:cNvSpPr txBox="1"/>
+              <p:cNvSpPr txBox="1">
+                <a:spLocks noGrp="1"/>
+              </p:cNvSpPr>
               <p:nvPr>
                 <p:ph sz="quarter" idx="3"/>
               </p:nvPr>
@@ -12733,11 +13005,11 @@
                     <m:oMathParaPr>
                       <m:jc m:val="left"/>
                     </m:oMathParaPr>
-                    <m:oMath xmlns:m="http://schemas.openxmlformats.org/officeDocument/2006/math">
+                    <m:oMath>
                       <m:f>
                         <m:fPr>
                           <m:ctrlPr>
-                            <a:rPr lang="en-US" sz="2800" i="1" smtClean="0">
+                            <a:rPr lang="en-US" sz="2800" i="1">
                               <a:solidFill>
                                 <a:srgbClr val="000000"/>
                               </a:solidFill>
@@ -12972,7 +13244,7 @@
             </p:txBody>
           </p:sp>
         </mc:Choice>
-        <mc:Fallback>
+        <mc:Fallback xmlns="">
           <p:sp>
             <p:nvSpPr>
               <p:cNvPr id="99333" name="Object 5">
@@ -13025,307 +13297,6 @@
       </mc:AlternateContent>
       <p:sp>
         <p:nvSpPr>
-          <p:cNvPr id="99334" name="Date Placeholder 11">
-            <a:extLst>
-              <a:ext uri="{FF2B5EF4-FFF2-40B4-BE49-F238E27FC236}">
-                <a16:creationId xmlns:a16="http://schemas.microsoft.com/office/drawing/2014/main" id="{AE776842-5594-403D-A950-F9ABDC48C4F1}"/>
-              </a:ext>
-            </a:extLst>
-          </p:cNvPr>
-          <p:cNvSpPr>
-            <a:spLocks noGrp="1"/>
-          </p:cNvSpPr>
-          <p:nvPr>
-            <p:ph type="dt" sz="quarter" idx="10"/>
-          </p:nvPr>
-        </p:nvSpPr>
-        <p:spPr bwMode="auto">
-          <a:noFill/>
-          <a:extLst>
-            <a:ext uri="{909E8E84-426E-40DD-AFC4-6F175D3DCCD1}">
-              <a14:hiddenFill xmlns:a14="http://schemas.microsoft.com/office/drawing/2010/main">
-                <a:solidFill>
-                  <a:srgbClr val="FFFFFF"/>
-                </a:solidFill>
-              </a14:hiddenFill>
-            </a:ext>
-            <a:ext uri="{91240B29-F687-4F45-9708-019B960494DF}">
-              <a14:hiddenLine xmlns:a14="http://schemas.microsoft.com/office/drawing/2010/main" w="9525">
-                <a:solidFill>
-                  <a:srgbClr val="000000"/>
-                </a:solidFill>
-                <a:miter lim="800000"/>
-                <a:headEnd/>
-                <a:tailEnd/>
-              </a14:hiddenLine>
-            </a:ext>
-          </a:extLst>
-        </p:spPr>
-        <p:txBody>
-          <a:bodyPr wrap="square" numCol="1" anchorCtr="0" compatLnSpc="1">
-            <a:prstTxWarp prst="textNoShape">
-              <a:avLst/>
-            </a:prstTxWarp>
-          </a:bodyPr>
-          <a:lstStyle>
-            <a:lvl1pPr>
-              <a:defRPr>
-                <a:solidFill>
-                  <a:schemeClr val="tx1"/>
-                </a:solidFill>
-                <a:latin typeface="Arial" panose="020B0604020202020204" pitchFamily="34" charset="0"/>
-              </a:defRPr>
-            </a:lvl1pPr>
-            <a:lvl2pPr marL="742950" indent="-285750">
-              <a:defRPr>
-                <a:solidFill>
-                  <a:schemeClr val="tx1"/>
-                </a:solidFill>
-                <a:latin typeface="Arial" panose="020B0604020202020204" pitchFamily="34" charset="0"/>
-              </a:defRPr>
-            </a:lvl2pPr>
-            <a:lvl3pPr marL="1143000" indent="-228600">
-              <a:defRPr>
-                <a:solidFill>
-                  <a:schemeClr val="tx1"/>
-                </a:solidFill>
-                <a:latin typeface="Arial" panose="020B0604020202020204" pitchFamily="34" charset="0"/>
-              </a:defRPr>
-            </a:lvl3pPr>
-            <a:lvl4pPr marL="1600200" indent="-228600">
-              <a:defRPr>
-                <a:solidFill>
-                  <a:schemeClr val="tx1"/>
-                </a:solidFill>
-                <a:latin typeface="Arial" panose="020B0604020202020204" pitchFamily="34" charset="0"/>
-              </a:defRPr>
-            </a:lvl4pPr>
-            <a:lvl5pPr marL="2057400" indent="-228600">
-              <a:defRPr>
-                <a:solidFill>
-                  <a:schemeClr val="tx1"/>
-                </a:solidFill>
-                <a:latin typeface="Arial" panose="020B0604020202020204" pitchFamily="34" charset="0"/>
-              </a:defRPr>
-            </a:lvl5pPr>
-            <a:lvl6pPr marL="2514600" indent="-228600" eaLnBrk="0" fontAlgn="base" hangingPunct="0">
-              <a:spcBef>
-                <a:spcPct val="0"/>
-              </a:spcBef>
-              <a:spcAft>
-                <a:spcPct val="0"/>
-              </a:spcAft>
-              <a:defRPr>
-                <a:solidFill>
-                  <a:schemeClr val="tx1"/>
-                </a:solidFill>
-                <a:latin typeface="Arial" panose="020B0604020202020204" pitchFamily="34" charset="0"/>
-              </a:defRPr>
-            </a:lvl6pPr>
-            <a:lvl7pPr marL="2971800" indent="-228600" eaLnBrk="0" fontAlgn="base" hangingPunct="0">
-              <a:spcBef>
-                <a:spcPct val="0"/>
-              </a:spcBef>
-              <a:spcAft>
-                <a:spcPct val="0"/>
-              </a:spcAft>
-              <a:defRPr>
-                <a:solidFill>
-                  <a:schemeClr val="tx1"/>
-                </a:solidFill>
-                <a:latin typeface="Arial" panose="020B0604020202020204" pitchFamily="34" charset="0"/>
-              </a:defRPr>
-            </a:lvl7pPr>
-            <a:lvl8pPr marL="3429000" indent="-228600" eaLnBrk="0" fontAlgn="base" hangingPunct="0">
-              <a:spcBef>
-                <a:spcPct val="0"/>
-              </a:spcBef>
-              <a:spcAft>
-                <a:spcPct val="0"/>
-              </a:spcAft>
-              <a:defRPr>
-                <a:solidFill>
-                  <a:schemeClr val="tx1"/>
-                </a:solidFill>
-                <a:latin typeface="Arial" panose="020B0604020202020204" pitchFamily="34" charset="0"/>
-              </a:defRPr>
-            </a:lvl8pPr>
-            <a:lvl9pPr marL="3886200" indent="-228600" eaLnBrk="0" fontAlgn="base" hangingPunct="0">
-              <a:spcBef>
-                <a:spcPct val="0"/>
-              </a:spcBef>
-              <a:spcAft>
-                <a:spcPct val="0"/>
-              </a:spcAft>
-              <a:defRPr>
-                <a:solidFill>
-                  <a:schemeClr val="tx1"/>
-                </a:solidFill>
-                <a:latin typeface="Arial" panose="020B0604020202020204" pitchFamily="34" charset="0"/>
-              </a:defRPr>
-            </a:lvl9pPr>
-          </a:lstStyle>
-          <a:p>
-            <a:r>
-              <a:rPr lang="en-US" altLang="en-US" dirty="0"/>
-              <a:t>8/15/2024</a:t>
-            </a:r>
-          </a:p>
-        </p:txBody>
-      </p:sp>
-      <p:sp>
-        <p:nvSpPr>
-          <p:cNvPr id="99335" name="Footer Placeholder 12">
-            <a:extLst>
-              <a:ext uri="{FF2B5EF4-FFF2-40B4-BE49-F238E27FC236}">
-                <a16:creationId xmlns:a16="http://schemas.microsoft.com/office/drawing/2014/main" id="{B0A14B3E-73B9-4B31-BCF3-E805422C691A}"/>
-              </a:ext>
-            </a:extLst>
-          </p:cNvPr>
-          <p:cNvSpPr>
-            <a:spLocks noGrp="1"/>
-          </p:cNvSpPr>
-          <p:nvPr>
-            <p:ph type="ftr" sz="quarter" idx="11"/>
-          </p:nvPr>
-        </p:nvSpPr>
-        <p:spPr bwMode="auto">
-          <a:noFill/>
-          <a:extLst>
-            <a:ext uri="{909E8E84-426E-40DD-AFC4-6F175D3DCCD1}">
-              <a14:hiddenFill xmlns:a14="http://schemas.microsoft.com/office/drawing/2010/main">
-                <a:solidFill>
-                  <a:srgbClr val="FFFFFF"/>
-                </a:solidFill>
-              </a14:hiddenFill>
-            </a:ext>
-            <a:ext uri="{91240B29-F687-4F45-9708-019B960494DF}">
-              <a14:hiddenLine xmlns:a14="http://schemas.microsoft.com/office/drawing/2010/main" w="9525">
-                <a:solidFill>
-                  <a:srgbClr val="000000"/>
-                </a:solidFill>
-                <a:miter lim="800000"/>
-                <a:headEnd/>
-                <a:tailEnd/>
-              </a14:hiddenLine>
-            </a:ext>
-          </a:extLst>
-        </p:spPr>
-        <p:txBody>
-          <a:bodyPr wrap="square" numCol="1" anchorCtr="0" compatLnSpc="1">
-            <a:prstTxWarp prst="textNoShape">
-              <a:avLst/>
-            </a:prstTxWarp>
-          </a:bodyPr>
-          <a:lstStyle>
-            <a:lvl1pPr>
-              <a:defRPr>
-                <a:solidFill>
-                  <a:schemeClr val="tx1"/>
-                </a:solidFill>
-                <a:latin typeface="Arial" panose="020B0604020202020204" pitchFamily="34" charset="0"/>
-              </a:defRPr>
-            </a:lvl1pPr>
-            <a:lvl2pPr marL="742950" indent="-285750">
-              <a:defRPr>
-                <a:solidFill>
-                  <a:schemeClr val="tx1"/>
-                </a:solidFill>
-                <a:latin typeface="Arial" panose="020B0604020202020204" pitchFamily="34" charset="0"/>
-              </a:defRPr>
-            </a:lvl2pPr>
-            <a:lvl3pPr marL="1143000" indent="-228600">
-              <a:defRPr>
-                <a:solidFill>
-                  <a:schemeClr val="tx1"/>
-                </a:solidFill>
-                <a:latin typeface="Arial" panose="020B0604020202020204" pitchFamily="34" charset="0"/>
-              </a:defRPr>
-            </a:lvl3pPr>
-            <a:lvl4pPr marL="1600200" indent="-228600">
-              <a:defRPr>
-                <a:solidFill>
-                  <a:schemeClr val="tx1"/>
-                </a:solidFill>
-                <a:latin typeface="Arial" panose="020B0604020202020204" pitchFamily="34" charset="0"/>
-              </a:defRPr>
-            </a:lvl4pPr>
-            <a:lvl5pPr marL="2057400" indent="-228600">
-              <a:defRPr>
-                <a:solidFill>
-                  <a:schemeClr val="tx1"/>
-                </a:solidFill>
-                <a:latin typeface="Arial" panose="020B0604020202020204" pitchFamily="34" charset="0"/>
-              </a:defRPr>
-            </a:lvl5pPr>
-            <a:lvl6pPr marL="2514600" indent="-228600" eaLnBrk="0" fontAlgn="base" hangingPunct="0">
-              <a:spcBef>
-                <a:spcPct val="0"/>
-              </a:spcBef>
-              <a:spcAft>
-                <a:spcPct val="0"/>
-              </a:spcAft>
-              <a:defRPr>
-                <a:solidFill>
-                  <a:schemeClr val="tx1"/>
-                </a:solidFill>
-                <a:latin typeface="Arial" panose="020B0604020202020204" pitchFamily="34" charset="0"/>
-              </a:defRPr>
-            </a:lvl6pPr>
-            <a:lvl7pPr marL="2971800" indent="-228600" eaLnBrk="0" fontAlgn="base" hangingPunct="0">
-              <a:spcBef>
-                <a:spcPct val="0"/>
-              </a:spcBef>
-              <a:spcAft>
-                <a:spcPct val="0"/>
-              </a:spcAft>
-              <a:defRPr>
-                <a:solidFill>
-                  <a:schemeClr val="tx1"/>
-                </a:solidFill>
-                <a:latin typeface="Arial" panose="020B0604020202020204" pitchFamily="34" charset="0"/>
-              </a:defRPr>
-            </a:lvl7pPr>
-            <a:lvl8pPr marL="3429000" indent="-228600" eaLnBrk="0" fontAlgn="base" hangingPunct="0">
-              <a:spcBef>
-                <a:spcPct val="0"/>
-              </a:spcBef>
-              <a:spcAft>
-                <a:spcPct val="0"/>
-              </a:spcAft>
-              <a:defRPr>
-                <a:solidFill>
-                  <a:schemeClr val="tx1"/>
-                </a:solidFill>
-                <a:latin typeface="Arial" panose="020B0604020202020204" pitchFamily="34" charset="0"/>
-              </a:defRPr>
-            </a:lvl8pPr>
-            <a:lvl9pPr marL="3886200" indent="-228600" eaLnBrk="0" fontAlgn="base" hangingPunct="0">
-              <a:spcBef>
-                <a:spcPct val="0"/>
-              </a:spcBef>
-              <a:spcAft>
-                <a:spcPct val="0"/>
-              </a:spcAft>
-              <a:defRPr>
-                <a:solidFill>
-                  <a:schemeClr val="tx1"/>
-                </a:solidFill>
-                <a:latin typeface="Arial" panose="020B0604020202020204" pitchFamily="34" charset="0"/>
-              </a:defRPr>
-            </a:lvl9pPr>
-          </a:lstStyle>
-          <a:p>
-            <a:r>
-              <a:rPr lang="nl-NL" altLang="en-US" dirty="0"/>
-              <a:t>MBE 713 FALL 2024         Instructor D.J. Die</a:t>
-            </a:r>
-            <a:endParaRPr lang="en-US" altLang="en-US" dirty="0"/>
-          </a:p>
-        </p:txBody>
-      </p:sp>
-      <p:sp>
-        <p:nvSpPr>
           <p:cNvPr id="99336" name="Text Box 6">
             <a:extLst>
               <a:ext uri="{FF2B5EF4-FFF2-40B4-BE49-F238E27FC236}">
@@ -13341,7 +13312,7 @@
         <p:spPr bwMode="auto">
           <a:xfrm>
             <a:off x="5486400" y="4572000"/>
-            <a:ext cx="3124200" cy="822325"/>
+            <a:ext cx="3124200" cy="1200329"/>
           </a:xfrm>
           <a:prstGeom prst="rect">
             <a:avLst/>
@@ -13476,7 +13447,7 @@
             <a:pPr eaLnBrk="1" hangingPunct="1"/>
             <a:r>
               <a:rPr lang="en-US" altLang="en-US" sz="2400" dirty="0"/>
-              <a:t>These are rates</a:t>
+              <a:t>These are rates (animals per animal)</a:t>
             </a:r>
           </a:p>
           <a:p>
@@ -13617,7 +13588,7 @@
                     <m:oMathParaPr>
                       <m:jc m:val="left"/>
                     </m:oMathParaPr>
-                    <m:oMath xmlns:m="http://schemas.openxmlformats.org/officeDocument/2006/math">
+                    <m:oMath>
                       <m:r>
                         <m:rPr>
                           <m:sty m:val="p"/>
@@ -13964,306 +13935,6 @@
           </p:sp>
         </mc:Fallback>
       </mc:AlternateContent>
-      <p:sp>
-        <p:nvSpPr>
-          <p:cNvPr id="101380" name="Date Placeholder 8">
-            <a:extLst>
-              <a:ext uri="{FF2B5EF4-FFF2-40B4-BE49-F238E27FC236}">
-                <a16:creationId xmlns:a16="http://schemas.microsoft.com/office/drawing/2014/main" id="{4D7D3E7A-1420-4144-9F4D-0B4788D35A10}"/>
-              </a:ext>
-            </a:extLst>
-          </p:cNvPr>
-          <p:cNvSpPr>
-            <a:spLocks noGrp="1"/>
-          </p:cNvSpPr>
-          <p:nvPr>
-            <p:ph type="dt" sz="quarter" idx="10"/>
-          </p:nvPr>
-        </p:nvSpPr>
-        <p:spPr bwMode="auto">
-          <a:noFill/>
-          <a:extLst>
-            <a:ext uri="{909E8E84-426E-40DD-AFC4-6F175D3DCCD1}">
-              <a14:hiddenFill xmlns:a14="http://schemas.microsoft.com/office/drawing/2010/main">
-                <a:solidFill>
-                  <a:srgbClr val="FFFFFF"/>
-                </a:solidFill>
-              </a14:hiddenFill>
-            </a:ext>
-            <a:ext uri="{91240B29-F687-4F45-9708-019B960494DF}">
-              <a14:hiddenLine xmlns:a14="http://schemas.microsoft.com/office/drawing/2010/main" w="9525">
-                <a:solidFill>
-                  <a:srgbClr val="000000"/>
-                </a:solidFill>
-                <a:miter lim="800000"/>
-                <a:headEnd/>
-                <a:tailEnd/>
-              </a14:hiddenLine>
-            </a:ext>
-          </a:extLst>
-        </p:spPr>
-        <p:txBody>
-          <a:bodyPr wrap="square" numCol="1" anchorCtr="0" compatLnSpc="1">
-            <a:prstTxWarp prst="textNoShape">
-              <a:avLst/>
-            </a:prstTxWarp>
-          </a:bodyPr>
-          <a:lstStyle>
-            <a:lvl1pPr>
-              <a:defRPr>
-                <a:solidFill>
-                  <a:schemeClr val="tx1"/>
-                </a:solidFill>
-                <a:latin typeface="Arial" panose="020B0604020202020204" pitchFamily="34" charset="0"/>
-              </a:defRPr>
-            </a:lvl1pPr>
-            <a:lvl2pPr marL="742950" indent="-285750">
-              <a:defRPr>
-                <a:solidFill>
-                  <a:schemeClr val="tx1"/>
-                </a:solidFill>
-                <a:latin typeface="Arial" panose="020B0604020202020204" pitchFamily="34" charset="0"/>
-              </a:defRPr>
-            </a:lvl2pPr>
-            <a:lvl3pPr marL="1143000" indent="-228600">
-              <a:defRPr>
-                <a:solidFill>
-                  <a:schemeClr val="tx1"/>
-                </a:solidFill>
-                <a:latin typeface="Arial" panose="020B0604020202020204" pitchFamily="34" charset="0"/>
-              </a:defRPr>
-            </a:lvl3pPr>
-            <a:lvl4pPr marL="1600200" indent="-228600">
-              <a:defRPr>
-                <a:solidFill>
-                  <a:schemeClr val="tx1"/>
-                </a:solidFill>
-                <a:latin typeface="Arial" panose="020B0604020202020204" pitchFamily="34" charset="0"/>
-              </a:defRPr>
-            </a:lvl4pPr>
-            <a:lvl5pPr marL="2057400" indent="-228600">
-              <a:defRPr>
-                <a:solidFill>
-                  <a:schemeClr val="tx1"/>
-                </a:solidFill>
-                <a:latin typeface="Arial" panose="020B0604020202020204" pitchFamily="34" charset="0"/>
-              </a:defRPr>
-            </a:lvl5pPr>
-            <a:lvl6pPr marL="2514600" indent="-228600" eaLnBrk="0" fontAlgn="base" hangingPunct="0">
-              <a:spcBef>
-                <a:spcPct val="0"/>
-              </a:spcBef>
-              <a:spcAft>
-                <a:spcPct val="0"/>
-              </a:spcAft>
-              <a:defRPr>
-                <a:solidFill>
-                  <a:schemeClr val="tx1"/>
-                </a:solidFill>
-                <a:latin typeface="Arial" panose="020B0604020202020204" pitchFamily="34" charset="0"/>
-              </a:defRPr>
-            </a:lvl6pPr>
-            <a:lvl7pPr marL="2971800" indent="-228600" eaLnBrk="0" fontAlgn="base" hangingPunct="0">
-              <a:spcBef>
-                <a:spcPct val="0"/>
-              </a:spcBef>
-              <a:spcAft>
-                <a:spcPct val="0"/>
-              </a:spcAft>
-              <a:defRPr>
-                <a:solidFill>
-                  <a:schemeClr val="tx1"/>
-                </a:solidFill>
-                <a:latin typeface="Arial" panose="020B0604020202020204" pitchFamily="34" charset="0"/>
-              </a:defRPr>
-            </a:lvl7pPr>
-            <a:lvl8pPr marL="3429000" indent="-228600" eaLnBrk="0" fontAlgn="base" hangingPunct="0">
-              <a:spcBef>
-                <a:spcPct val="0"/>
-              </a:spcBef>
-              <a:spcAft>
-                <a:spcPct val="0"/>
-              </a:spcAft>
-              <a:defRPr>
-                <a:solidFill>
-                  <a:schemeClr val="tx1"/>
-                </a:solidFill>
-                <a:latin typeface="Arial" panose="020B0604020202020204" pitchFamily="34" charset="0"/>
-              </a:defRPr>
-            </a:lvl8pPr>
-            <a:lvl9pPr marL="3886200" indent="-228600" eaLnBrk="0" fontAlgn="base" hangingPunct="0">
-              <a:spcBef>
-                <a:spcPct val="0"/>
-              </a:spcBef>
-              <a:spcAft>
-                <a:spcPct val="0"/>
-              </a:spcAft>
-              <a:defRPr>
-                <a:solidFill>
-                  <a:schemeClr val="tx1"/>
-                </a:solidFill>
-                <a:latin typeface="Arial" panose="020B0604020202020204" pitchFamily="34" charset="0"/>
-              </a:defRPr>
-            </a:lvl9pPr>
-          </a:lstStyle>
-          <a:p>
-            <a:r>
-              <a:rPr lang="en-US" altLang="en-US" dirty="0"/>
-              <a:t>8/15/2024</a:t>
-            </a:r>
-          </a:p>
-        </p:txBody>
-      </p:sp>
-      <p:sp>
-        <p:nvSpPr>
-          <p:cNvPr id="101381" name="Footer Placeholder 9">
-            <a:extLst>
-              <a:ext uri="{FF2B5EF4-FFF2-40B4-BE49-F238E27FC236}">
-                <a16:creationId xmlns:a16="http://schemas.microsoft.com/office/drawing/2014/main" id="{D4E075BC-7916-4144-854F-F6F5DBA241FA}"/>
-              </a:ext>
-            </a:extLst>
-          </p:cNvPr>
-          <p:cNvSpPr>
-            <a:spLocks noGrp="1"/>
-          </p:cNvSpPr>
-          <p:nvPr>
-            <p:ph type="ftr" sz="quarter" idx="11"/>
-          </p:nvPr>
-        </p:nvSpPr>
-        <p:spPr bwMode="auto">
-          <a:noFill/>
-          <a:extLst>
-            <a:ext uri="{909E8E84-426E-40DD-AFC4-6F175D3DCCD1}">
-              <a14:hiddenFill xmlns:a14="http://schemas.microsoft.com/office/drawing/2010/main">
-                <a:solidFill>
-                  <a:srgbClr val="FFFFFF"/>
-                </a:solidFill>
-              </a14:hiddenFill>
-            </a:ext>
-            <a:ext uri="{91240B29-F687-4F45-9708-019B960494DF}">
-              <a14:hiddenLine xmlns:a14="http://schemas.microsoft.com/office/drawing/2010/main" w="9525">
-                <a:solidFill>
-                  <a:srgbClr val="000000"/>
-                </a:solidFill>
-                <a:miter lim="800000"/>
-                <a:headEnd/>
-                <a:tailEnd/>
-              </a14:hiddenLine>
-            </a:ext>
-          </a:extLst>
-        </p:spPr>
-        <p:txBody>
-          <a:bodyPr wrap="square" numCol="1" anchorCtr="0" compatLnSpc="1">
-            <a:prstTxWarp prst="textNoShape">
-              <a:avLst/>
-            </a:prstTxWarp>
-          </a:bodyPr>
-          <a:lstStyle>
-            <a:lvl1pPr>
-              <a:defRPr>
-                <a:solidFill>
-                  <a:schemeClr val="tx1"/>
-                </a:solidFill>
-                <a:latin typeface="Arial" panose="020B0604020202020204" pitchFamily="34" charset="0"/>
-              </a:defRPr>
-            </a:lvl1pPr>
-            <a:lvl2pPr marL="742950" indent="-285750">
-              <a:defRPr>
-                <a:solidFill>
-                  <a:schemeClr val="tx1"/>
-                </a:solidFill>
-                <a:latin typeface="Arial" panose="020B0604020202020204" pitchFamily="34" charset="0"/>
-              </a:defRPr>
-            </a:lvl2pPr>
-            <a:lvl3pPr marL="1143000" indent="-228600">
-              <a:defRPr>
-                <a:solidFill>
-                  <a:schemeClr val="tx1"/>
-                </a:solidFill>
-                <a:latin typeface="Arial" panose="020B0604020202020204" pitchFamily="34" charset="0"/>
-              </a:defRPr>
-            </a:lvl3pPr>
-            <a:lvl4pPr marL="1600200" indent="-228600">
-              <a:defRPr>
-                <a:solidFill>
-                  <a:schemeClr val="tx1"/>
-                </a:solidFill>
-                <a:latin typeface="Arial" panose="020B0604020202020204" pitchFamily="34" charset="0"/>
-              </a:defRPr>
-            </a:lvl4pPr>
-            <a:lvl5pPr marL="2057400" indent="-228600">
-              <a:defRPr>
-                <a:solidFill>
-                  <a:schemeClr val="tx1"/>
-                </a:solidFill>
-                <a:latin typeface="Arial" panose="020B0604020202020204" pitchFamily="34" charset="0"/>
-              </a:defRPr>
-            </a:lvl5pPr>
-            <a:lvl6pPr marL="2514600" indent="-228600" eaLnBrk="0" fontAlgn="base" hangingPunct="0">
-              <a:spcBef>
-                <a:spcPct val="0"/>
-              </a:spcBef>
-              <a:spcAft>
-                <a:spcPct val="0"/>
-              </a:spcAft>
-              <a:defRPr>
-                <a:solidFill>
-                  <a:schemeClr val="tx1"/>
-                </a:solidFill>
-                <a:latin typeface="Arial" panose="020B0604020202020204" pitchFamily="34" charset="0"/>
-              </a:defRPr>
-            </a:lvl6pPr>
-            <a:lvl7pPr marL="2971800" indent="-228600" eaLnBrk="0" fontAlgn="base" hangingPunct="0">
-              <a:spcBef>
-                <a:spcPct val="0"/>
-              </a:spcBef>
-              <a:spcAft>
-                <a:spcPct val="0"/>
-              </a:spcAft>
-              <a:defRPr>
-                <a:solidFill>
-                  <a:schemeClr val="tx1"/>
-                </a:solidFill>
-                <a:latin typeface="Arial" panose="020B0604020202020204" pitchFamily="34" charset="0"/>
-              </a:defRPr>
-            </a:lvl7pPr>
-            <a:lvl8pPr marL="3429000" indent="-228600" eaLnBrk="0" fontAlgn="base" hangingPunct="0">
-              <a:spcBef>
-                <a:spcPct val="0"/>
-              </a:spcBef>
-              <a:spcAft>
-                <a:spcPct val="0"/>
-              </a:spcAft>
-              <a:defRPr>
-                <a:solidFill>
-                  <a:schemeClr val="tx1"/>
-                </a:solidFill>
-                <a:latin typeface="Arial" panose="020B0604020202020204" pitchFamily="34" charset="0"/>
-              </a:defRPr>
-            </a:lvl8pPr>
-            <a:lvl9pPr marL="3886200" indent="-228600" eaLnBrk="0" fontAlgn="base" hangingPunct="0">
-              <a:spcBef>
-                <a:spcPct val="0"/>
-              </a:spcBef>
-              <a:spcAft>
-                <a:spcPct val="0"/>
-              </a:spcAft>
-              <a:defRPr>
-                <a:solidFill>
-                  <a:schemeClr val="tx1"/>
-                </a:solidFill>
-                <a:latin typeface="Arial" panose="020B0604020202020204" pitchFamily="34" charset="0"/>
-              </a:defRPr>
-            </a:lvl9pPr>
-          </a:lstStyle>
-          <a:p>
-            <a:r>
-              <a:rPr lang="en-US" altLang="en-US" dirty="0"/>
-              <a:t>MBE 713 FALL 2024         Instructor D.J. Die</a:t>
-            </a:r>
-          </a:p>
-        </p:txBody>
-      </p:sp>
     </p:spTree>
   </p:cSld>
   <p:clrMapOvr>
@@ -14273,6 +13944,1401 @@
 </file>
 
 <file path=ppt/slides/slide7.xml><?xml version="1.0" encoding="utf-8"?>
+<p:sld xmlns:a="http://schemas.openxmlformats.org/drawingml/2006/main" xmlns:r="http://schemas.openxmlformats.org/officeDocument/2006/relationships" xmlns:p="http://schemas.openxmlformats.org/presentationml/2006/main">
+  <p:cSld>
+    <p:spTree>
+      <p:nvGrpSpPr>
+        <p:cNvPr id="1" name=""/>
+        <p:cNvGrpSpPr/>
+        <p:nvPr/>
+      </p:nvGrpSpPr>
+      <p:grpSpPr>
+        <a:xfrm>
+          <a:off x="0" y="0"/>
+          <a:ext cx="0" cy="0"/>
+          <a:chOff x="0" y="0"/>
+          <a:chExt cx="0" cy="0"/>
+        </a:xfrm>
+      </p:grpSpPr>
+      <p:sp>
+        <p:nvSpPr>
+          <p:cNvPr id="2" name="Title 1">
+            <a:extLst>
+              <a:ext uri="{FF2B5EF4-FFF2-40B4-BE49-F238E27FC236}">
+                <a16:creationId xmlns:a16="http://schemas.microsoft.com/office/drawing/2014/main" id="{AA0599A6-9480-B9AE-FEE0-8A96A6D091ED}"/>
+              </a:ext>
+            </a:extLst>
+          </p:cNvPr>
+          <p:cNvSpPr>
+            <a:spLocks noGrp="1"/>
+          </p:cNvSpPr>
+          <p:nvPr>
+            <p:ph type="title"/>
+          </p:nvPr>
+        </p:nvSpPr>
+        <p:spPr/>
+        <p:txBody>
+          <a:bodyPr/>
+          <a:lstStyle/>
+          <a:p>
+            <a:r>
+              <a:rPr lang="en-US" dirty="0"/>
+              <a:t>Annual time step difference equation</a:t>
+            </a:r>
+          </a:p>
+        </p:txBody>
+      </p:sp>
+      <mc:AlternateContent xmlns:mc="http://schemas.openxmlformats.org/markup-compatibility/2006">
+        <mc:Choice xmlns:a14="http://schemas.microsoft.com/office/drawing/2010/main" Requires="a14">
+          <p:sp>
+            <p:nvSpPr>
+              <p:cNvPr id="3" name="Content Placeholder 2">
+                <a:extLst>
+                  <a:ext uri="{FF2B5EF4-FFF2-40B4-BE49-F238E27FC236}">
+                    <a16:creationId xmlns:a16="http://schemas.microsoft.com/office/drawing/2014/main" id="{E95BB003-E52E-C9D9-A8D9-E63734A3E47D}"/>
+                  </a:ext>
+                </a:extLst>
+              </p:cNvPr>
+              <p:cNvSpPr>
+                <a:spLocks noGrp="1"/>
+              </p:cNvSpPr>
+              <p:nvPr>
+                <p:ph idx="1"/>
+              </p:nvPr>
+            </p:nvSpPr>
+            <p:spPr/>
+            <p:txBody>
+              <a:bodyPr/>
+              <a:lstStyle/>
+              <a:p>
+                <a:pPr marL="0" lvl="0" indent="0">
+                  <a:buNone/>
+                </a:pPr>
+                <a:r>
+                  <a:rPr lang="en-US" sz="2800" dirty="0"/>
+                  <a:t>As a difference equation</a:t>
+                </a:r>
+              </a:p>
+              <a:p>
+                <a:pPr marL="0" lvl="0" indent="0">
+                  <a:buNone/>
+                </a:pPr>
+                <a14:m>
+                  <m:oMathPara xmlns:m="http://schemas.openxmlformats.org/officeDocument/2006/math">
+                    <m:oMathParaPr>
+                      <m:jc m:val="center"/>
+                    </m:oMathParaPr>
+                    <m:oMath>
+                      <m:sSub>
+                        <m:sSubPr>
+                          <m:ctrlPr>
+                            <a:rPr lang="ar-AE" sz="2800">
+                              <a:latin typeface="Cambria Math" panose="02040503050406030204" pitchFamily="18" charset="0"/>
+                            </a:rPr>
+                          </m:ctrlPr>
+                        </m:sSubPr>
+                        <m:e>
+                          <m:r>
+                            <a:rPr lang="ar-AE" sz="2800">
+                              <a:latin typeface="Cambria Math" panose="02040503050406030204" pitchFamily="18" charset="0"/>
+                            </a:rPr>
+                            <m:t>𝑁</m:t>
+                          </m:r>
+                        </m:e>
+                        <m:sub>
+                          <m:r>
+                            <a:rPr lang="ar-AE" sz="2800">
+                              <a:latin typeface="Cambria Math" panose="02040503050406030204" pitchFamily="18" charset="0"/>
+                            </a:rPr>
+                            <m:t>𝑡</m:t>
+                          </m:r>
+                          <m:r>
+                            <a:rPr lang="ar-AE" sz="2800">
+                              <a:latin typeface="Cambria Math" panose="02040503050406030204" pitchFamily="18" charset="0"/>
+                            </a:rPr>
+                            <m:t>+</m:t>
+                          </m:r>
+                          <m:sSub>
+                            <m:sSubPr>
+                              <m:ctrlPr>
+                                <a:rPr lang="el-GR" sz="2800">
+                                  <a:latin typeface="Cambria Math" panose="02040503050406030204" pitchFamily="18" charset="0"/>
+                                </a:rPr>
+                              </m:ctrlPr>
+                            </m:sSubPr>
+                            <m:e>
+                              <m:r>
+                                <m:rPr>
+                                  <m:sty m:val="p"/>
+                                </m:rPr>
+                                <a:rPr lang="el-GR" sz="2800">
+                                  <a:latin typeface="Cambria Math" panose="02040503050406030204" pitchFamily="18" charset="0"/>
+                                </a:rPr>
+                                <m:t>Δ</m:t>
+                              </m:r>
+                            </m:e>
+                            <m:sub>
+                              <m:r>
+                                <a:rPr lang="ar-AE" sz="2800">
+                                  <a:latin typeface="Cambria Math" panose="02040503050406030204" pitchFamily="18" charset="0"/>
+                                </a:rPr>
+                                <m:t>𝑡</m:t>
+                              </m:r>
+                            </m:sub>
+                          </m:sSub>
+                        </m:sub>
+                      </m:sSub>
+                      <m:r>
+                        <a:rPr lang="ar-AE" sz="2800">
+                          <a:latin typeface="Cambria Math" panose="02040503050406030204" pitchFamily="18" charset="0"/>
+                        </a:rPr>
+                        <m:t>=</m:t>
+                      </m:r>
+                      <m:sSub>
+                        <m:sSubPr>
+                          <m:ctrlPr>
+                            <a:rPr lang="ar-AE" sz="2800">
+                              <a:latin typeface="Cambria Math" panose="02040503050406030204" pitchFamily="18" charset="0"/>
+                            </a:rPr>
+                          </m:ctrlPr>
+                        </m:sSubPr>
+                        <m:e>
+                          <m:r>
+                            <a:rPr lang="ar-AE" sz="2800">
+                              <a:latin typeface="Cambria Math" panose="02040503050406030204" pitchFamily="18" charset="0"/>
+                            </a:rPr>
+                            <m:t>𝑁</m:t>
+                          </m:r>
+                        </m:e>
+                        <m:sub>
+                          <m:r>
+                            <a:rPr lang="ar-AE" sz="2800">
+                              <a:latin typeface="Cambria Math" panose="02040503050406030204" pitchFamily="18" charset="0"/>
+                            </a:rPr>
+                            <m:t>𝑡</m:t>
+                          </m:r>
+                        </m:sub>
+                      </m:sSub>
+                      <m:r>
+                        <a:rPr lang="ar-AE" sz="2800">
+                          <a:latin typeface="Cambria Math" panose="02040503050406030204" pitchFamily="18" charset="0"/>
+                        </a:rPr>
+                        <m:t>+</m:t>
+                      </m:r>
+                      <m:sSub>
+                        <m:sSubPr>
+                          <m:ctrlPr>
+                            <a:rPr lang="ar-AE" sz="2800">
+                              <a:latin typeface="Cambria Math" panose="02040503050406030204" pitchFamily="18" charset="0"/>
+                            </a:rPr>
+                          </m:ctrlPr>
+                        </m:sSubPr>
+                        <m:e>
+                          <m:r>
+                            <a:rPr lang="ar-AE" sz="2800">
+                              <a:latin typeface="Cambria Math" panose="02040503050406030204" pitchFamily="18" charset="0"/>
+                            </a:rPr>
+                            <m:t>𝑁</m:t>
+                          </m:r>
+                        </m:e>
+                        <m:sub>
+                          <m:r>
+                            <a:rPr lang="ar-AE" sz="2800">
+                              <a:latin typeface="Cambria Math" panose="02040503050406030204" pitchFamily="18" charset="0"/>
+                            </a:rPr>
+                            <m:t>𝑡</m:t>
+                          </m:r>
+                        </m:sub>
+                      </m:sSub>
+                      <m:r>
+                        <a:rPr lang="ar-AE" sz="2800">
+                          <a:latin typeface="Cambria Math" panose="02040503050406030204" pitchFamily="18" charset="0"/>
+                        </a:rPr>
+                        <m:t>(</m:t>
+                      </m:r>
+                      <m:r>
+                        <a:rPr lang="ar-AE" sz="2800">
+                          <a:latin typeface="Cambria Math" panose="02040503050406030204" pitchFamily="18" charset="0"/>
+                        </a:rPr>
+                        <m:t>𝑏</m:t>
+                      </m:r>
+                      <m:r>
+                        <a:rPr lang="ar-AE" sz="2800">
+                          <a:latin typeface="Cambria Math" panose="02040503050406030204" pitchFamily="18" charset="0"/>
+                        </a:rPr>
+                        <m:t>−</m:t>
+                      </m:r>
+                      <m:r>
+                        <a:rPr lang="ar-AE" sz="2800">
+                          <a:latin typeface="Cambria Math" panose="02040503050406030204" pitchFamily="18" charset="0"/>
+                        </a:rPr>
+                        <m:t>𝑑</m:t>
+                      </m:r>
+                      <m:r>
+                        <a:rPr lang="ar-AE" sz="2800">
+                          <a:latin typeface="Cambria Math" panose="02040503050406030204" pitchFamily="18" charset="0"/>
+                        </a:rPr>
+                        <m:t>)</m:t>
+                      </m:r>
+                      <m:sSub>
+                        <m:sSubPr>
+                          <m:ctrlPr>
+                            <a:rPr lang="el-GR" sz="2800">
+                              <a:latin typeface="Cambria Math" panose="02040503050406030204" pitchFamily="18" charset="0"/>
+                            </a:rPr>
+                          </m:ctrlPr>
+                        </m:sSubPr>
+                        <m:e>
+                          <m:r>
+                            <m:rPr>
+                              <m:sty m:val="p"/>
+                            </m:rPr>
+                            <a:rPr lang="el-GR" sz="2800">
+                              <a:latin typeface="Cambria Math" panose="02040503050406030204" pitchFamily="18" charset="0"/>
+                            </a:rPr>
+                            <m:t>Δ</m:t>
+                          </m:r>
+                        </m:e>
+                        <m:sub>
+                          <m:r>
+                            <a:rPr lang="ar-AE" sz="2800">
+                              <a:latin typeface="Cambria Math" panose="02040503050406030204" pitchFamily="18" charset="0"/>
+                            </a:rPr>
+                            <m:t>𝑡</m:t>
+                          </m:r>
+                        </m:sub>
+                      </m:sSub>
+                    </m:oMath>
+                  </m:oMathPara>
+                </a14:m>
+                <a:endParaRPr lang="ar-AE" sz="2800" dirty="0"/>
+              </a:p>
+              <a:p>
+                <a:pPr marL="0" lvl="0" indent="0">
+                  <a:buNone/>
+                </a:pPr>
+                <a:r>
+                  <a:rPr lang="en-US" sz="2800" dirty="0"/>
+                  <a:t>Simplify to a time step of </a:t>
+                </a:r>
+                <a14:m>
+                  <m:oMath xmlns:m="http://schemas.openxmlformats.org/officeDocument/2006/math">
+                    <m:sSub>
+                      <m:sSubPr>
+                        <m:ctrlPr>
+                          <a:rPr lang="el-GR" sz="2800">
+                            <a:latin typeface="Cambria Math" panose="02040503050406030204" pitchFamily="18" charset="0"/>
+                          </a:rPr>
+                        </m:ctrlPr>
+                      </m:sSubPr>
+                      <m:e>
+                        <m:r>
+                          <m:rPr>
+                            <m:sty m:val="p"/>
+                          </m:rPr>
+                          <a:rPr lang="el-GR" sz="2800">
+                            <a:latin typeface="Cambria Math" panose="02040503050406030204" pitchFamily="18" charset="0"/>
+                          </a:rPr>
+                          <m:t>Δ</m:t>
+                        </m:r>
+                      </m:e>
+                      <m:sub>
+                        <m:r>
+                          <a:rPr lang="ar-AE" sz="2800">
+                            <a:latin typeface="Cambria Math" panose="02040503050406030204" pitchFamily="18" charset="0"/>
+                          </a:rPr>
+                          <m:t>𝑡</m:t>
+                        </m:r>
+                      </m:sub>
+                    </m:sSub>
+                    <m:r>
+                      <a:rPr lang="en-US" sz="2800" b="0" i="0" smtClean="0">
+                        <a:latin typeface="Cambria Math" panose="02040503050406030204" pitchFamily="18" charset="0"/>
+                      </a:rPr>
+                      <m:t>=1</m:t>
+                    </m:r>
+                  </m:oMath>
+                </a14:m>
+                <a:endParaRPr lang="en-US" sz="2800" dirty="0"/>
+              </a:p>
+              <a:p>
+                <a:pPr marL="0" lvl="0" indent="0">
+                  <a:buNone/>
+                </a:pPr>
+                <a14:m>
+                  <m:oMathPara xmlns:m="http://schemas.openxmlformats.org/officeDocument/2006/math">
+                    <m:oMathParaPr>
+                      <m:jc m:val="center"/>
+                    </m:oMathParaPr>
+                    <m:oMath>
+                      <m:sSub>
+                        <m:sSubPr>
+                          <m:ctrlPr>
+                            <a:rPr lang="ar-AE" sz="2800">
+                              <a:latin typeface="Cambria Math" panose="02040503050406030204" pitchFamily="18" charset="0"/>
+                            </a:rPr>
+                          </m:ctrlPr>
+                        </m:sSubPr>
+                        <m:e>
+                          <m:r>
+                            <a:rPr lang="ar-AE" sz="2800">
+                              <a:latin typeface="Cambria Math" panose="02040503050406030204" pitchFamily="18" charset="0"/>
+                            </a:rPr>
+                            <m:t>𝑁</m:t>
+                          </m:r>
+                        </m:e>
+                        <m:sub>
+                          <m:r>
+                            <a:rPr lang="ar-AE" sz="2800">
+                              <a:latin typeface="Cambria Math" panose="02040503050406030204" pitchFamily="18" charset="0"/>
+                            </a:rPr>
+                            <m:t>𝑡</m:t>
+                          </m:r>
+                          <m:r>
+                            <a:rPr lang="ar-AE" sz="2800">
+                              <a:latin typeface="Cambria Math" panose="02040503050406030204" pitchFamily="18" charset="0"/>
+                            </a:rPr>
+                            <m:t>+1</m:t>
+                          </m:r>
+                        </m:sub>
+                      </m:sSub>
+                      <m:r>
+                        <a:rPr lang="ar-AE" sz="2800">
+                          <a:latin typeface="Cambria Math" panose="02040503050406030204" pitchFamily="18" charset="0"/>
+                        </a:rPr>
+                        <m:t>=</m:t>
+                      </m:r>
+                      <m:sSub>
+                        <m:sSubPr>
+                          <m:ctrlPr>
+                            <a:rPr lang="ar-AE" sz="2800">
+                              <a:latin typeface="Cambria Math" panose="02040503050406030204" pitchFamily="18" charset="0"/>
+                            </a:rPr>
+                          </m:ctrlPr>
+                        </m:sSubPr>
+                        <m:e>
+                          <m:r>
+                            <a:rPr lang="ar-AE" sz="2800">
+                              <a:latin typeface="Cambria Math" panose="02040503050406030204" pitchFamily="18" charset="0"/>
+                            </a:rPr>
+                            <m:t>𝑁</m:t>
+                          </m:r>
+                        </m:e>
+                        <m:sub>
+                          <m:r>
+                            <a:rPr lang="ar-AE" sz="2800">
+                              <a:latin typeface="Cambria Math" panose="02040503050406030204" pitchFamily="18" charset="0"/>
+                            </a:rPr>
+                            <m:t>𝑡</m:t>
+                          </m:r>
+                        </m:sub>
+                      </m:sSub>
+                      <m:r>
+                        <a:rPr lang="ar-AE" sz="2800">
+                          <a:latin typeface="Cambria Math" panose="02040503050406030204" pitchFamily="18" charset="0"/>
+                        </a:rPr>
+                        <m:t>+</m:t>
+                      </m:r>
+                      <m:sSub>
+                        <m:sSubPr>
+                          <m:ctrlPr>
+                            <a:rPr lang="ar-AE" sz="2800">
+                              <a:latin typeface="Cambria Math" panose="02040503050406030204" pitchFamily="18" charset="0"/>
+                            </a:rPr>
+                          </m:ctrlPr>
+                        </m:sSubPr>
+                        <m:e>
+                          <m:r>
+                            <a:rPr lang="ar-AE" sz="2800">
+                              <a:latin typeface="Cambria Math" panose="02040503050406030204" pitchFamily="18" charset="0"/>
+                            </a:rPr>
+                            <m:t>𝑁</m:t>
+                          </m:r>
+                        </m:e>
+                        <m:sub>
+                          <m:r>
+                            <a:rPr lang="ar-AE" sz="2800">
+                              <a:latin typeface="Cambria Math" panose="02040503050406030204" pitchFamily="18" charset="0"/>
+                            </a:rPr>
+                            <m:t>𝑡</m:t>
+                          </m:r>
+                        </m:sub>
+                      </m:sSub>
+                      <m:r>
+                        <a:rPr lang="ar-AE" sz="2800">
+                          <a:latin typeface="Cambria Math" panose="02040503050406030204" pitchFamily="18" charset="0"/>
+                        </a:rPr>
+                        <m:t>(</m:t>
+                      </m:r>
+                      <m:r>
+                        <a:rPr lang="ar-AE" sz="2800">
+                          <a:latin typeface="Cambria Math" panose="02040503050406030204" pitchFamily="18" charset="0"/>
+                        </a:rPr>
+                        <m:t>𝑏</m:t>
+                      </m:r>
+                      <m:r>
+                        <a:rPr lang="ar-AE" sz="2800">
+                          <a:latin typeface="Cambria Math" panose="02040503050406030204" pitchFamily="18" charset="0"/>
+                        </a:rPr>
+                        <m:t>−</m:t>
+                      </m:r>
+                      <m:r>
+                        <a:rPr lang="ar-AE" sz="2800">
+                          <a:latin typeface="Cambria Math" panose="02040503050406030204" pitchFamily="18" charset="0"/>
+                        </a:rPr>
+                        <m:t>𝑑</m:t>
+                      </m:r>
+                      <m:r>
+                        <a:rPr lang="ar-AE" sz="2800">
+                          <a:latin typeface="Cambria Math" panose="02040503050406030204" pitchFamily="18" charset="0"/>
+                        </a:rPr>
+                        <m:t>)</m:t>
+                      </m:r>
+                    </m:oMath>
+                  </m:oMathPara>
+                </a14:m>
+                <a:endParaRPr lang="ar-AE" sz="2800" dirty="0"/>
+              </a:p>
+              <a:p>
+                <a:pPr marL="0" lvl="0" indent="0">
+                  <a:buNone/>
+                </a:pPr>
+                <a:r>
+                  <a:rPr lang="en-US" sz="2800" dirty="0"/>
+                  <a:t>And simplify again to define the population growth rate as </a:t>
+                </a:r>
+                <a14:m>
+                  <m:oMath xmlns:m="http://schemas.openxmlformats.org/officeDocument/2006/math">
+                    <m:sSub>
+                      <m:sSubPr>
+                        <m:ctrlPr>
+                          <a:rPr lang="ar-AE" sz="2800">
+                            <a:latin typeface="Cambria Math" panose="02040503050406030204" pitchFamily="18" charset="0"/>
+                          </a:rPr>
+                        </m:ctrlPr>
+                      </m:sSubPr>
+                      <m:e>
+                        <m:r>
+                          <a:rPr lang="ar-AE" sz="2800">
+                            <a:latin typeface="Cambria Math" panose="02040503050406030204" pitchFamily="18" charset="0"/>
+                          </a:rPr>
+                          <m:t>𝑅</m:t>
+                        </m:r>
+                      </m:e>
+                      <m:sub>
+                        <m:r>
+                          <a:rPr lang="ar-AE" sz="2800">
+                            <a:latin typeface="Cambria Math" panose="02040503050406030204" pitchFamily="18" charset="0"/>
+                          </a:rPr>
+                          <m:t>𝑚</m:t>
+                        </m:r>
+                      </m:sub>
+                    </m:sSub>
+                    <m:r>
+                      <a:rPr lang="ar-AE" sz="2800">
+                        <a:latin typeface="Cambria Math" panose="02040503050406030204" pitchFamily="18" charset="0"/>
+                      </a:rPr>
+                      <m:t>=</m:t>
+                    </m:r>
+                    <m:r>
+                      <a:rPr lang="ar-AE" sz="2800">
+                        <a:latin typeface="Cambria Math" panose="02040503050406030204" pitchFamily="18" charset="0"/>
+                      </a:rPr>
+                      <m:t>𝑏</m:t>
+                    </m:r>
+                    <m:r>
+                      <a:rPr lang="ar-AE" sz="2800">
+                        <a:latin typeface="Cambria Math" panose="02040503050406030204" pitchFamily="18" charset="0"/>
+                      </a:rPr>
+                      <m:t>−</m:t>
+                    </m:r>
+                    <m:r>
+                      <a:rPr lang="ar-AE" sz="2800">
+                        <a:latin typeface="Cambria Math" panose="02040503050406030204" pitchFamily="18" charset="0"/>
+                      </a:rPr>
+                      <m:t>𝑑</m:t>
+                    </m:r>
+                  </m:oMath>
+                </a14:m>
+                <a:endParaRPr lang="ar-AE" sz="2800" dirty="0"/>
+              </a:p>
+              <a:p>
+                <a:pPr marL="0" lvl="0" indent="0">
+                  <a:buNone/>
+                </a:pPr>
+                <a14:m>
+                  <m:oMathPara xmlns:m="http://schemas.openxmlformats.org/officeDocument/2006/math">
+                    <m:oMathParaPr>
+                      <m:jc m:val="center"/>
+                    </m:oMathParaPr>
+                    <m:oMath>
+                      <m:sSub>
+                        <m:sSubPr>
+                          <m:ctrlPr>
+                            <a:rPr lang="ar-AE" sz="2800">
+                              <a:latin typeface="Cambria Math" panose="02040503050406030204" pitchFamily="18" charset="0"/>
+                            </a:rPr>
+                          </m:ctrlPr>
+                        </m:sSubPr>
+                        <m:e>
+                          <m:r>
+                            <a:rPr lang="ar-AE" sz="2800">
+                              <a:latin typeface="Cambria Math" panose="02040503050406030204" pitchFamily="18" charset="0"/>
+                            </a:rPr>
+                            <m:t>𝑁</m:t>
+                          </m:r>
+                        </m:e>
+                        <m:sub>
+                          <m:r>
+                            <a:rPr lang="ar-AE" sz="2800">
+                              <a:latin typeface="Cambria Math" panose="02040503050406030204" pitchFamily="18" charset="0"/>
+                            </a:rPr>
+                            <m:t>𝑡</m:t>
+                          </m:r>
+                          <m:r>
+                            <a:rPr lang="ar-AE" sz="2800">
+                              <a:latin typeface="Cambria Math" panose="02040503050406030204" pitchFamily="18" charset="0"/>
+                            </a:rPr>
+                            <m:t>+1</m:t>
+                          </m:r>
+                        </m:sub>
+                      </m:sSub>
+                      <m:r>
+                        <a:rPr lang="ar-AE" sz="2800">
+                          <a:latin typeface="Cambria Math" panose="02040503050406030204" pitchFamily="18" charset="0"/>
+                        </a:rPr>
+                        <m:t>=</m:t>
+                      </m:r>
+                      <m:sSub>
+                        <m:sSubPr>
+                          <m:ctrlPr>
+                            <a:rPr lang="ar-AE" sz="2800">
+                              <a:latin typeface="Cambria Math" panose="02040503050406030204" pitchFamily="18" charset="0"/>
+                            </a:rPr>
+                          </m:ctrlPr>
+                        </m:sSubPr>
+                        <m:e>
+                          <m:r>
+                            <a:rPr lang="ar-AE" sz="2800">
+                              <a:latin typeface="Cambria Math" panose="02040503050406030204" pitchFamily="18" charset="0"/>
+                            </a:rPr>
+                            <m:t>𝑁</m:t>
+                          </m:r>
+                        </m:e>
+                        <m:sub>
+                          <m:r>
+                            <a:rPr lang="ar-AE" sz="2800">
+                              <a:latin typeface="Cambria Math" panose="02040503050406030204" pitchFamily="18" charset="0"/>
+                            </a:rPr>
+                            <m:t>𝑡</m:t>
+                          </m:r>
+                        </m:sub>
+                      </m:sSub>
+                      <m:r>
+                        <a:rPr lang="ar-AE" sz="2800">
+                          <a:latin typeface="Cambria Math" panose="02040503050406030204" pitchFamily="18" charset="0"/>
+                        </a:rPr>
+                        <m:t>+</m:t>
+                      </m:r>
+                      <m:sSub>
+                        <m:sSubPr>
+                          <m:ctrlPr>
+                            <a:rPr lang="ar-AE" sz="2800">
+                              <a:latin typeface="Cambria Math" panose="02040503050406030204" pitchFamily="18" charset="0"/>
+                            </a:rPr>
+                          </m:ctrlPr>
+                        </m:sSubPr>
+                        <m:e>
+                          <m:r>
+                            <a:rPr lang="ar-AE" sz="2800">
+                              <a:latin typeface="Cambria Math" panose="02040503050406030204" pitchFamily="18" charset="0"/>
+                            </a:rPr>
+                            <m:t>𝑁</m:t>
+                          </m:r>
+                        </m:e>
+                        <m:sub>
+                          <m:r>
+                            <a:rPr lang="ar-AE" sz="2800">
+                              <a:latin typeface="Cambria Math" panose="02040503050406030204" pitchFamily="18" charset="0"/>
+                            </a:rPr>
+                            <m:t>𝑡</m:t>
+                          </m:r>
+                        </m:sub>
+                      </m:sSub>
+                      <m:sSub>
+                        <m:sSubPr>
+                          <m:ctrlPr>
+                            <a:rPr lang="ar-AE" sz="2800">
+                              <a:latin typeface="Cambria Math" panose="02040503050406030204" pitchFamily="18" charset="0"/>
+                            </a:rPr>
+                          </m:ctrlPr>
+                        </m:sSubPr>
+                        <m:e>
+                          <m:r>
+                            <a:rPr lang="ar-AE" sz="2800">
+                              <a:latin typeface="Cambria Math" panose="02040503050406030204" pitchFamily="18" charset="0"/>
+                            </a:rPr>
+                            <m:t>𝑅</m:t>
+                          </m:r>
+                        </m:e>
+                        <m:sub>
+                          <m:r>
+                            <a:rPr lang="ar-AE" sz="2800">
+                              <a:latin typeface="Cambria Math" panose="02040503050406030204" pitchFamily="18" charset="0"/>
+                            </a:rPr>
+                            <m:t>𝑚</m:t>
+                          </m:r>
+                        </m:sub>
+                      </m:sSub>
+                    </m:oMath>
+                  </m:oMathPara>
+                </a14:m>
+                <a:endParaRPr lang="ar-AE" sz="2800" dirty="0"/>
+              </a:p>
+              <a:p>
+                <a:pPr marL="0" lvl="0" indent="0">
+                  <a:buNone/>
+                </a:pPr>
+                <a:r>
+                  <a:rPr lang="en-US" sz="2800" dirty="0"/>
+                  <a:t>The change in abundance per unit time is.</a:t>
+                </a:r>
+              </a:p>
+              <a:p>
+                <a:pPr marL="0" lvl="0" indent="0">
+                  <a:buNone/>
+                </a:pPr>
+                <a14:m>
+                  <m:oMathPara xmlns:m="http://schemas.openxmlformats.org/officeDocument/2006/math">
+                    <m:oMathParaPr>
+                      <m:jc m:val="center"/>
+                    </m:oMathParaPr>
+                    <m:oMath>
+                      <m:r>
+                        <m:rPr>
+                          <m:sty m:val="p"/>
+                        </m:rPr>
+                        <a:rPr lang="el-GR" sz="2800">
+                          <a:latin typeface="Cambria Math" panose="02040503050406030204" pitchFamily="18" charset="0"/>
+                        </a:rPr>
+                        <m:t>Δ</m:t>
+                      </m:r>
+                      <m:r>
+                        <a:rPr lang="el-GR" sz="2800">
+                          <a:latin typeface="Cambria Math" panose="02040503050406030204" pitchFamily="18" charset="0"/>
+                        </a:rPr>
+                        <m:t>𝑁</m:t>
+                      </m:r>
+                      <m:r>
+                        <a:rPr lang="el-GR" sz="2800">
+                          <a:latin typeface="Cambria Math" panose="02040503050406030204" pitchFamily="18" charset="0"/>
+                        </a:rPr>
+                        <m:t>/</m:t>
+                      </m:r>
+                      <m:r>
+                        <m:rPr>
+                          <m:sty m:val="p"/>
+                        </m:rPr>
+                        <a:rPr lang="el-GR" sz="2800">
+                          <a:latin typeface="Cambria Math" panose="02040503050406030204" pitchFamily="18" charset="0"/>
+                        </a:rPr>
+                        <m:t>Δ</m:t>
+                      </m:r>
+                      <m:r>
+                        <a:rPr lang="el-GR" sz="2800">
+                          <a:latin typeface="Cambria Math" panose="02040503050406030204" pitchFamily="18" charset="0"/>
+                        </a:rPr>
+                        <m:t>𝑡</m:t>
+                      </m:r>
+                      <m:r>
+                        <a:rPr lang="el-GR" sz="2800">
+                          <a:latin typeface="Cambria Math" panose="02040503050406030204" pitchFamily="18" charset="0"/>
+                        </a:rPr>
+                        <m:t>=</m:t>
+                      </m:r>
+                      <m:sSub>
+                        <m:sSubPr>
+                          <m:ctrlPr>
+                            <a:rPr lang="ar-AE" sz="2800">
+                              <a:latin typeface="Cambria Math" panose="02040503050406030204" pitchFamily="18" charset="0"/>
+                            </a:rPr>
+                          </m:ctrlPr>
+                        </m:sSubPr>
+                        <m:e>
+                          <m:r>
+                            <a:rPr lang="ar-AE" sz="2800">
+                              <a:latin typeface="Cambria Math" panose="02040503050406030204" pitchFamily="18" charset="0"/>
+                            </a:rPr>
+                            <m:t>𝑅</m:t>
+                          </m:r>
+                        </m:e>
+                        <m:sub>
+                          <m:r>
+                            <a:rPr lang="ar-AE" sz="2800">
+                              <a:latin typeface="Cambria Math" panose="02040503050406030204" pitchFamily="18" charset="0"/>
+                            </a:rPr>
+                            <m:t>𝑚</m:t>
+                          </m:r>
+                        </m:sub>
+                      </m:sSub>
+                      <m:sSub>
+                        <m:sSubPr>
+                          <m:ctrlPr>
+                            <a:rPr lang="ar-AE" sz="2800">
+                              <a:latin typeface="Cambria Math" panose="02040503050406030204" pitchFamily="18" charset="0"/>
+                            </a:rPr>
+                          </m:ctrlPr>
+                        </m:sSubPr>
+                        <m:e>
+                          <m:r>
+                            <a:rPr lang="ar-AE" sz="2800">
+                              <a:latin typeface="Cambria Math" panose="02040503050406030204" pitchFamily="18" charset="0"/>
+                            </a:rPr>
+                            <m:t>𝑁</m:t>
+                          </m:r>
+                        </m:e>
+                        <m:sub>
+                          <m:r>
+                            <a:rPr lang="ar-AE" sz="2800">
+                              <a:latin typeface="Cambria Math" panose="02040503050406030204" pitchFamily="18" charset="0"/>
+                            </a:rPr>
+                            <m:t>𝑡</m:t>
+                          </m:r>
+                        </m:sub>
+                      </m:sSub>
+                    </m:oMath>
+                  </m:oMathPara>
+                </a14:m>
+                <a:endParaRPr lang="ar-AE" sz="2800" dirty="0"/>
+              </a:p>
+              <a:p>
+                <a:pPr marL="0" lvl="0" indent="0">
+                  <a:buNone/>
+                </a:pPr>
+                <a:r>
+                  <a:rPr lang="en-US" sz="2800" dirty="0"/>
+                  <a:t>Population growth is also defined by the multiplication rate, </a:t>
+                </a:r>
+                <a14:m>
+                  <m:oMath xmlns:m="http://schemas.openxmlformats.org/officeDocument/2006/math">
+                    <m:r>
+                      <a:rPr lang="en-US" sz="2800">
+                        <a:latin typeface="Cambria Math" panose="02040503050406030204" pitchFamily="18" charset="0"/>
+                      </a:rPr>
+                      <m:t>𝜆</m:t>
+                    </m:r>
+                  </m:oMath>
+                </a14:m>
+                <a:r>
+                  <a:rPr lang="en-US" sz="2800" dirty="0"/>
+                  <a:t> which is </a:t>
+                </a:r>
+                <a14:m>
+                  <m:oMath xmlns:m="http://schemas.openxmlformats.org/officeDocument/2006/math">
+                    <m:r>
+                      <a:rPr lang="en-US" sz="2800">
+                        <a:latin typeface="Cambria Math" panose="02040503050406030204" pitchFamily="18" charset="0"/>
+                      </a:rPr>
+                      <m:t>𝜆</m:t>
+                    </m:r>
+                    <m:r>
+                      <a:rPr lang="en-US" sz="2800">
+                        <a:latin typeface="Cambria Math" panose="02040503050406030204" pitchFamily="18" charset="0"/>
+                      </a:rPr>
+                      <m:t>=1+</m:t>
+                    </m:r>
+                    <m:sSub>
+                      <m:sSubPr>
+                        <m:ctrlPr>
+                          <a:rPr lang="ar-AE" sz="2800">
+                            <a:latin typeface="Cambria Math" panose="02040503050406030204" pitchFamily="18" charset="0"/>
+                          </a:rPr>
+                        </m:ctrlPr>
+                      </m:sSubPr>
+                      <m:e>
+                        <m:r>
+                          <a:rPr lang="ar-AE" sz="2800">
+                            <a:latin typeface="Cambria Math" panose="02040503050406030204" pitchFamily="18" charset="0"/>
+                          </a:rPr>
+                          <m:t>𝑅</m:t>
+                        </m:r>
+                      </m:e>
+                      <m:sub>
+                        <m:r>
+                          <a:rPr lang="ar-AE" sz="2800">
+                            <a:latin typeface="Cambria Math" panose="02040503050406030204" pitchFamily="18" charset="0"/>
+                          </a:rPr>
+                          <m:t>𝑚</m:t>
+                        </m:r>
+                      </m:sub>
+                    </m:sSub>
+                  </m:oMath>
+                </a14:m>
+                <a:r>
+                  <a:rPr lang="ar-AE" sz="2800" dirty="0"/>
+                  <a:t> </a:t>
+                </a:r>
+                <a:r>
+                  <a:rPr lang="en-US" sz="2800" dirty="0"/>
+                  <a:t>so that</a:t>
+                </a:r>
+                <a14:m>
+                  <m:oMath xmlns:m="http://schemas.openxmlformats.org/officeDocument/2006/math">
+                    <m:r>
+                      <a:rPr lang="en-US" sz="2800" b="0" i="0" smtClean="0">
+                        <a:latin typeface="Cambria Math" panose="02040503050406030204" pitchFamily="18" charset="0"/>
+                      </a:rPr>
+                      <m:t>   </m:t>
+                    </m:r>
+                    <m:sSub>
+                      <m:sSubPr>
+                        <m:ctrlPr>
+                          <a:rPr lang="ar-AE" sz="2800">
+                            <a:latin typeface="Cambria Math" panose="02040503050406030204" pitchFamily="18" charset="0"/>
+                          </a:rPr>
+                        </m:ctrlPr>
+                      </m:sSubPr>
+                      <m:e>
+                        <m:r>
+                          <a:rPr lang="ar-AE" sz="2800">
+                            <a:latin typeface="Cambria Math" panose="02040503050406030204" pitchFamily="18" charset="0"/>
+                          </a:rPr>
+                          <m:t>𝑁</m:t>
+                        </m:r>
+                      </m:e>
+                      <m:sub>
+                        <m:r>
+                          <a:rPr lang="ar-AE" sz="2800">
+                            <a:latin typeface="Cambria Math" panose="02040503050406030204" pitchFamily="18" charset="0"/>
+                          </a:rPr>
+                          <m:t>𝑡</m:t>
+                        </m:r>
+                        <m:r>
+                          <a:rPr lang="ar-AE" sz="2800">
+                            <a:latin typeface="Cambria Math" panose="02040503050406030204" pitchFamily="18" charset="0"/>
+                          </a:rPr>
+                          <m:t>+1</m:t>
+                        </m:r>
+                      </m:sub>
+                    </m:sSub>
+                    <m:r>
+                      <a:rPr lang="ar-AE" sz="2800">
+                        <a:latin typeface="Cambria Math" panose="02040503050406030204" pitchFamily="18" charset="0"/>
+                      </a:rPr>
+                      <m:t>=</m:t>
+                    </m:r>
+                    <m:r>
+                      <a:rPr lang="ar-AE" sz="2800">
+                        <a:latin typeface="Cambria Math" panose="02040503050406030204" pitchFamily="18" charset="0"/>
+                      </a:rPr>
+                      <m:t>𝜆</m:t>
+                    </m:r>
+                    <m:sSub>
+                      <m:sSubPr>
+                        <m:ctrlPr>
+                          <a:rPr lang="ar-AE" sz="2800">
+                            <a:latin typeface="Cambria Math" panose="02040503050406030204" pitchFamily="18" charset="0"/>
+                          </a:rPr>
+                        </m:ctrlPr>
+                      </m:sSubPr>
+                      <m:e>
+                        <m:r>
+                          <a:rPr lang="ar-AE" sz="2800">
+                            <a:latin typeface="Cambria Math" panose="02040503050406030204" pitchFamily="18" charset="0"/>
+                          </a:rPr>
+                          <m:t>𝑁</m:t>
+                        </m:r>
+                      </m:e>
+                      <m:sub>
+                        <m:r>
+                          <a:rPr lang="ar-AE" sz="2800">
+                            <a:latin typeface="Cambria Math" panose="02040503050406030204" pitchFamily="18" charset="0"/>
+                          </a:rPr>
+                          <m:t>𝑡</m:t>
+                        </m:r>
+                      </m:sub>
+                    </m:sSub>
+                  </m:oMath>
+                </a14:m>
+                <a:endParaRPr lang="ar-AE" sz="2800" dirty="0"/>
+              </a:p>
+              <a:p>
+                <a:endParaRPr lang="en-US" sz="2800" dirty="0"/>
+              </a:p>
+            </p:txBody>
+          </p:sp>
+        </mc:Choice>
+        <mc:Fallback>
+          <p:sp>
+            <p:nvSpPr>
+              <p:cNvPr id="3" name="Content Placeholder 2">
+                <a:extLst>
+                  <a:ext uri="{FF2B5EF4-FFF2-40B4-BE49-F238E27FC236}">
+                    <a16:creationId xmlns:a16="http://schemas.microsoft.com/office/drawing/2014/main" id="{E95BB003-E52E-C9D9-A8D9-E63734A3E47D}"/>
+                  </a:ext>
+                </a:extLst>
+              </p:cNvPr>
+              <p:cNvSpPr>
+                <a:spLocks noGrp="1" noRot="1" noChangeAspect="1" noMove="1" noResize="1" noEditPoints="1" noAdjustHandles="1" noChangeArrowheads="1" noChangeShapeType="1" noTextEdit="1"/>
+              </p:cNvSpPr>
+              <p:nvPr>
+                <p:ph idx="1"/>
+              </p:nvPr>
+            </p:nvSpPr>
+            <p:spPr>
+              <a:blipFill>
+                <a:blip r:embed="rId2"/>
+                <a:stretch>
+                  <a:fillRect l="-1481" t="-1306" r="-444" b="-12114"/>
+                </a:stretch>
+              </a:blipFill>
+            </p:spPr>
+            <p:txBody>
+              <a:bodyPr/>
+              <a:lstStyle/>
+              <a:p>
+                <a:r>
+                  <a:rPr lang="en-US">
+                    <a:noFill/>
+                  </a:rPr>
+                  <a:t> </a:t>
+                </a:r>
+              </a:p>
+            </p:txBody>
+          </p:sp>
+        </mc:Fallback>
+      </mc:AlternateContent>
+    </p:spTree>
+    <p:extLst>
+      <p:ext uri="{BB962C8B-B14F-4D97-AF65-F5344CB8AC3E}">
+        <p14:creationId xmlns:p14="http://schemas.microsoft.com/office/powerpoint/2010/main" val="3785082339"/>
+      </p:ext>
+    </p:extLst>
+  </p:cSld>
+  <p:clrMapOvr>
+    <a:masterClrMapping/>
+  </p:clrMapOvr>
+</p:sld>
+</file>
+
+<file path=ppt/slides/slide8.xml><?xml version="1.0" encoding="utf-8"?>
+<p:sld xmlns:a="http://schemas.openxmlformats.org/drawingml/2006/main" xmlns:r="http://schemas.openxmlformats.org/officeDocument/2006/relationships" xmlns:p="http://schemas.openxmlformats.org/presentationml/2006/main">
+  <p:cSld>
+    <p:spTree>
+      <p:nvGrpSpPr>
+        <p:cNvPr id="1" name=""/>
+        <p:cNvGrpSpPr/>
+        <p:nvPr/>
+      </p:nvGrpSpPr>
+      <p:grpSpPr>
+        <a:xfrm>
+          <a:off x="0" y="0"/>
+          <a:ext cx="0" cy="0"/>
+          <a:chOff x="0" y="0"/>
+          <a:chExt cx="0" cy="0"/>
+        </a:xfrm>
+      </p:grpSpPr>
+      <p:sp>
+        <p:nvSpPr>
+          <p:cNvPr id="119810" name="Rectangle 2">
+            <a:extLst>
+              <a:ext uri="{FF2B5EF4-FFF2-40B4-BE49-F238E27FC236}">
+                <a16:creationId xmlns:a16="http://schemas.microsoft.com/office/drawing/2014/main" id="{32D41F02-8E01-46BD-8EF5-B3CCDD62C5D0}"/>
+              </a:ext>
+            </a:extLst>
+          </p:cNvPr>
+          <p:cNvSpPr>
+            <a:spLocks noGrp="1" noChangeArrowheads="1"/>
+          </p:cNvSpPr>
+          <p:nvPr>
+            <p:ph type="title"/>
+          </p:nvPr>
+        </p:nvSpPr>
+        <p:spPr bwMode="auto">
+          <a:noFill/>
+          <a:extLst>
+            <a:ext uri="{909E8E84-426E-40DD-AFC4-6F175D3DCCD1}">
+              <a14:hiddenFill xmlns:a14="http://schemas.microsoft.com/office/drawing/2010/main">
+                <a:solidFill>
+                  <a:srgbClr val="FFFFFF"/>
+                </a:solidFill>
+              </a14:hiddenFill>
+            </a:ext>
+            <a:ext uri="{91240B29-F687-4F45-9708-019B960494DF}">
+              <a14:hiddenLine xmlns:a14="http://schemas.microsoft.com/office/drawing/2010/main" w="9525">
+                <a:solidFill>
+                  <a:srgbClr val="000000"/>
+                </a:solidFill>
+                <a:miter lim="800000"/>
+                <a:headEnd/>
+                <a:tailEnd/>
+              </a14:hiddenLine>
+            </a:ext>
+          </a:extLst>
+        </p:spPr>
+        <p:txBody>
+          <a:bodyPr vert="horz" wrap="square" lIns="91440" tIns="45720" rIns="91440" bIns="45720" numCol="1" anchor="t" anchorCtr="0" compatLnSpc="1">
+            <a:prstTxWarp prst="textNoShape">
+              <a:avLst/>
+            </a:prstTxWarp>
+          </a:bodyPr>
+          <a:lstStyle/>
+          <a:p>
+            <a:pPr eaLnBrk="1" hangingPunct="1"/>
+            <a:r>
+              <a:rPr lang="en-US" altLang="en-US" b="1" dirty="0"/>
+              <a:t>Population growth rates</a:t>
+            </a:r>
+          </a:p>
+        </p:txBody>
+      </p:sp>
+      <mc:AlternateContent xmlns:mc="http://schemas.openxmlformats.org/markup-compatibility/2006">
+        <mc:Choice xmlns:a14="http://schemas.microsoft.com/office/drawing/2010/main" Requires="a14">
+          <p:sp>
+            <p:nvSpPr>
+              <p:cNvPr id="119811" name="Rectangle 3">
+                <a:extLst>
+                  <a:ext uri="{FF2B5EF4-FFF2-40B4-BE49-F238E27FC236}">
+                    <a16:creationId xmlns:a16="http://schemas.microsoft.com/office/drawing/2014/main" id="{9AEC5CAD-12AE-4030-821F-6315D6FA24A7}"/>
+                  </a:ext>
+                </a:extLst>
+              </p:cNvPr>
+              <p:cNvSpPr>
+                <a:spLocks noGrp="1" noChangeArrowheads="1"/>
+              </p:cNvSpPr>
+              <p:nvPr>
+                <p:ph idx="1"/>
+              </p:nvPr>
+            </p:nvSpPr>
+            <p:spPr bwMode="auto">
+              <a:xfrm>
+                <a:off x="457200" y="2057400"/>
+                <a:ext cx="8229600" cy="3429000"/>
+              </a:xfrm>
+              <a:noFill/>
+              <a:extLst>
+                <a:ext uri="{909E8E84-426E-40DD-AFC4-6F175D3DCCD1}">
+                  <a14:hiddenFill>
+                    <a:solidFill>
+                      <a:srgbClr val="FFFFFF"/>
+                    </a:solidFill>
+                  </a14:hiddenFill>
+                </a:ext>
+                <a:ext uri="{91240B29-F687-4F45-9708-019B960494DF}">
+                  <a14:hiddenLine w="9525">
+                    <a:solidFill>
+                      <a:srgbClr val="000000"/>
+                    </a:solidFill>
+                    <a:miter lim="800000"/>
+                    <a:headEnd/>
+                    <a:tailEnd/>
+                  </a14:hiddenLine>
+                </a:ext>
+              </a:extLst>
+            </p:spPr>
+            <p:txBody>
+              <a:bodyPr vert="horz" wrap="square" lIns="91440" tIns="45720" rIns="91440" bIns="45720" numCol="1" anchor="t" anchorCtr="0" compatLnSpc="1">
+                <a:prstTxWarp prst="textNoShape">
+                  <a:avLst/>
+                </a:prstTxWarp>
+              </a:bodyPr>
+              <a:lstStyle/>
+              <a:p>
+                <a:pPr eaLnBrk="1" hangingPunct="1"/>
+                <a:r>
+                  <a:rPr lang="en-US" altLang="en-US" dirty="0"/>
+                  <a:t>If </a:t>
+                </a:r>
+                <a14:m>
+                  <m:oMath xmlns:m="http://schemas.openxmlformats.org/officeDocument/2006/math">
+                    <m:sSub>
+                      <m:sSubPr>
+                        <m:ctrlPr>
+                          <a:rPr lang="ar-AE" sz="3200">
+                            <a:latin typeface="Cambria Math" panose="02040503050406030204" pitchFamily="18" charset="0"/>
+                          </a:rPr>
+                        </m:ctrlPr>
+                      </m:sSubPr>
+                      <m:e>
+                        <m:r>
+                          <a:rPr lang="ar-AE" sz="3200">
+                            <a:latin typeface="Cambria Math" panose="02040503050406030204" pitchFamily="18" charset="0"/>
+                          </a:rPr>
+                          <m:t>𝑅</m:t>
+                        </m:r>
+                      </m:e>
+                      <m:sub>
+                        <m:r>
+                          <a:rPr lang="ar-AE" sz="3200">
+                            <a:latin typeface="Cambria Math" panose="02040503050406030204" pitchFamily="18" charset="0"/>
+                          </a:rPr>
+                          <m:t>𝑚</m:t>
+                        </m:r>
+                      </m:sub>
+                    </m:sSub>
+                    <m:r>
+                      <a:rPr lang="ar-AE" sz="3200" i="1">
+                        <a:latin typeface="Cambria Math" panose="02040503050406030204" pitchFamily="18" charset="0"/>
+                      </a:rPr>
+                      <m:t> </m:t>
+                    </m:r>
+                  </m:oMath>
+                </a14:m>
+                <a:r>
+                  <a:rPr lang="en-US" altLang="en-US" dirty="0"/>
+                  <a:t>is positive (</a:t>
+                </a:r>
+                <a14:m>
+                  <m:oMath xmlns:m="http://schemas.openxmlformats.org/officeDocument/2006/math">
+                    <m:r>
+                      <a:rPr lang="ar-AE" sz="3200">
+                        <a:latin typeface="Cambria Math" panose="02040503050406030204" pitchFamily="18" charset="0"/>
+                      </a:rPr>
+                      <m:t>𝜆</m:t>
+                    </m:r>
+                    <m:r>
+                      <a:rPr lang="ar-AE" sz="3200" i="1">
+                        <a:latin typeface="Cambria Math" panose="02040503050406030204" pitchFamily="18" charset="0"/>
+                      </a:rPr>
+                      <m:t> </m:t>
+                    </m:r>
+                  </m:oMath>
+                </a14:m>
+                <a:r>
+                  <a:rPr lang="en-US" altLang="en-US" dirty="0"/>
+                  <a:t>&gt;1) the population increases</a:t>
+                </a:r>
+              </a:p>
+              <a:p>
+                <a:pPr eaLnBrk="1" hangingPunct="1"/>
+                <a:endParaRPr lang="en-US" altLang="en-US" dirty="0"/>
+              </a:p>
+              <a:p>
+                <a:pPr eaLnBrk="1" hangingPunct="1"/>
+                <a:r>
+                  <a:rPr lang="en-US" altLang="en-US" dirty="0"/>
+                  <a:t>If </a:t>
+                </a:r>
+                <a14:m>
+                  <m:oMath xmlns:m="http://schemas.openxmlformats.org/officeDocument/2006/math">
+                    <m:sSub>
+                      <m:sSubPr>
+                        <m:ctrlPr>
+                          <a:rPr lang="ar-AE" sz="3200">
+                            <a:latin typeface="Cambria Math" panose="02040503050406030204" pitchFamily="18" charset="0"/>
+                          </a:rPr>
+                        </m:ctrlPr>
+                      </m:sSubPr>
+                      <m:e>
+                        <m:r>
+                          <a:rPr lang="ar-AE" sz="3200">
+                            <a:latin typeface="Cambria Math" panose="02040503050406030204" pitchFamily="18" charset="0"/>
+                          </a:rPr>
+                          <m:t>𝑅</m:t>
+                        </m:r>
+                      </m:e>
+                      <m:sub>
+                        <m:r>
+                          <a:rPr lang="ar-AE" sz="3200">
+                            <a:latin typeface="Cambria Math" panose="02040503050406030204" pitchFamily="18" charset="0"/>
+                          </a:rPr>
+                          <m:t>𝑚</m:t>
+                        </m:r>
+                      </m:sub>
+                    </m:sSub>
+                    <m:r>
+                      <a:rPr lang="en-US" sz="3200" b="0" i="0" smtClean="0">
+                        <a:latin typeface="Cambria Math" panose="02040503050406030204" pitchFamily="18" charset="0"/>
+                      </a:rPr>
+                      <m:t>=0 </m:t>
+                    </m:r>
+                  </m:oMath>
+                </a14:m>
+                <a:r>
+                  <a:rPr lang="en-US" altLang="en-US" dirty="0"/>
+                  <a:t>(</a:t>
+                </a:r>
+                <a14:m>
+                  <m:oMath xmlns:m="http://schemas.openxmlformats.org/officeDocument/2006/math">
+                    <m:r>
+                      <a:rPr lang="ar-AE" sz="3200">
+                        <a:latin typeface="Cambria Math" panose="02040503050406030204" pitchFamily="18" charset="0"/>
+                      </a:rPr>
+                      <m:t>𝜆</m:t>
+                    </m:r>
+                    <m:r>
+                      <a:rPr lang="en-US" sz="3200" b="0" i="0" smtClean="0">
+                        <a:latin typeface="Cambria Math" panose="02040503050406030204" pitchFamily="18" charset="0"/>
+                      </a:rPr>
+                      <m:t>=</m:t>
+                    </m:r>
+                  </m:oMath>
+                </a14:m>
+                <a:r>
+                  <a:rPr lang="en-US" altLang="en-US" dirty="0"/>
+                  <a:t>1) population is stationary</a:t>
+                </a:r>
+              </a:p>
+              <a:p>
+                <a:pPr eaLnBrk="1" hangingPunct="1"/>
+                <a:endParaRPr lang="en-US" altLang="en-US" dirty="0"/>
+              </a:p>
+              <a:p>
+                <a:pPr eaLnBrk="1" hangingPunct="1"/>
+                <a:r>
+                  <a:rPr lang="en-US" altLang="en-US" dirty="0"/>
+                  <a:t>If </a:t>
+                </a:r>
+                <a14:m>
+                  <m:oMath xmlns:m="http://schemas.openxmlformats.org/officeDocument/2006/math">
+                    <m:sSub>
+                      <m:sSubPr>
+                        <m:ctrlPr>
+                          <a:rPr lang="ar-AE" sz="2800">
+                            <a:latin typeface="Cambria Math" panose="02040503050406030204" pitchFamily="18" charset="0"/>
+                          </a:rPr>
+                        </m:ctrlPr>
+                      </m:sSubPr>
+                      <m:e>
+                        <m:r>
+                          <a:rPr lang="ar-AE" sz="2800">
+                            <a:latin typeface="Cambria Math" panose="02040503050406030204" pitchFamily="18" charset="0"/>
+                          </a:rPr>
+                          <m:t>𝑅</m:t>
+                        </m:r>
+                      </m:e>
+                      <m:sub>
+                        <m:r>
+                          <a:rPr lang="ar-AE" sz="2800">
+                            <a:latin typeface="Cambria Math" panose="02040503050406030204" pitchFamily="18" charset="0"/>
+                          </a:rPr>
+                          <m:t>𝑚</m:t>
+                        </m:r>
+                      </m:sub>
+                    </m:sSub>
+                    <m:r>
+                      <a:rPr lang="en-US" sz="2800" b="0" i="0" smtClean="0">
+                        <a:latin typeface="Cambria Math" panose="02040503050406030204" pitchFamily="18" charset="0"/>
+                      </a:rPr>
+                      <m:t>&lt;</m:t>
+                    </m:r>
+                    <m:r>
+                      <a:rPr lang="en-US" sz="2800">
+                        <a:latin typeface="Cambria Math" panose="02040503050406030204" pitchFamily="18" charset="0"/>
+                      </a:rPr>
+                      <m:t>0 </m:t>
+                    </m:r>
+                  </m:oMath>
+                </a14:m>
+                <a:r>
+                  <a:rPr lang="en-US" altLang="en-US" dirty="0"/>
+                  <a:t>(</a:t>
+                </a:r>
+                <a14:m>
+                  <m:oMath xmlns:m="http://schemas.openxmlformats.org/officeDocument/2006/math">
+                    <m:r>
+                      <a:rPr lang="ar-AE" sz="2800">
+                        <a:latin typeface="Cambria Math" panose="02040503050406030204" pitchFamily="18" charset="0"/>
+                      </a:rPr>
+                      <m:t>𝜆</m:t>
+                    </m:r>
+                    <m:r>
+                      <a:rPr lang="en-US" sz="2800" b="0" i="0" smtClean="0">
+                        <a:latin typeface="Cambria Math" panose="02040503050406030204" pitchFamily="18" charset="0"/>
+                      </a:rPr>
+                      <m:t>&lt;</m:t>
+                    </m:r>
+                  </m:oMath>
+                </a14:m>
+                <a:r>
+                  <a:rPr lang="en-US" altLang="en-US" dirty="0"/>
+                  <a:t>1) population decreases</a:t>
+                </a:r>
+              </a:p>
+              <a:p>
+                <a:pPr eaLnBrk="1" hangingPunct="1"/>
+                <a:endParaRPr lang="en-US" altLang="en-US" dirty="0"/>
+              </a:p>
+            </p:txBody>
+          </p:sp>
+        </mc:Choice>
+        <mc:Fallback>
+          <p:sp>
+            <p:nvSpPr>
+              <p:cNvPr id="119811" name="Rectangle 3">
+                <a:extLst>
+                  <a:ext uri="{FF2B5EF4-FFF2-40B4-BE49-F238E27FC236}">
+                    <a16:creationId xmlns:a16="http://schemas.microsoft.com/office/drawing/2014/main" id="{9AEC5CAD-12AE-4030-821F-6315D6FA24A7}"/>
+                  </a:ext>
+                </a:extLst>
+              </p:cNvPr>
+              <p:cNvSpPr>
+                <a:spLocks noGrp="1" noRot="1" noChangeAspect="1" noMove="1" noResize="1" noEditPoints="1" noAdjustHandles="1" noChangeArrowheads="1" noChangeShapeType="1" noTextEdit="1"/>
+              </p:cNvSpPr>
+              <p:nvPr>
+                <p:ph idx="1"/>
+              </p:nvPr>
+            </p:nvSpPr>
+            <p:spPr bwMode="auto">
+              <a:xfrm>
+                <a:off x="457200" y="2057400"/>
+                <a:ext cx="8229600" cy="3429000"/>
+              </a:xfrm>
+              <a:blipFill>
+                <a:blip r:embed="rId3"/>
+                <a:stretch>
+                  <a:fillRect l="-1481" t="-1957"/>
+                </a:stretch>
+              </a:blipFill>
+              <a:extLst>
+                <a:ext uri="{909E8E84-426E-40DD-AFC4-6F175D3DCCD1}">
+                  <a14:hiddenFill xmlns:a14="http://schemas.microsoft.com/office/drawing/2010/main">
+                    <a:solidFill>
+                      <a:srgbClr val="FFFFFF"/>
+                    </a:solidFill>
+                  </a14:hiddenFill>
+                </a:ext>
+                <a:ext uri="{91240B29-F687-4F45-9708-019B960494DF}">
+                  <a14:hiddenLine xmlns:a14="http://schemas.microsoft.com/office/drawing/2010/main" w="9525">
+                    <a:solidFill>
+                      <a:srgbClr val="000000"/>
+                    </a:solidFill>
+                    <a:miter lim="800000"/>
+                    <a:headEnd/>
+                    <a:tailEnd/>
+                  </a14:hiddenLine>
+                </a:ext>
+              </a:extLst>
+            </p:spPr>
+            <p:txBody>
+              <a:bodyPr/>
+              <a:lstStyle/>
+              <a:p>
+                <a:r>
+                  <a:rPr lang="en-US">
+                    <a:noFill/>
+                  </a:rPr>
+                  <a:t> </a:t>
+                </a:r>
+              </a:p>
+            </p:txBody>
+          </p:sp>
+        </mc:Fallback>
+      </mc:AlternateContent>
+    </p:spTree>
+    <p:extLst>
+      <p:ext uri="{BB962C8B-B14F-4D97-AF65-F5344CB8AC3E}">
+        <p14:creationId xmlns:p14="http://schemas.microsoft.com/office/powerpoint/2010/main" val="964181056"/>
+      </p:ext>
+    </p:extLst>
+  </p:cSld>
+  <p:clrMapOvr>
+    <a:masterClrMapping/>
+  </p:clrMapOvr>
+</p:sld>
+</file>
+
+<file path=ppt/slides/slide9.xml><?xml version="1.0" encoding="utf-8"?>
 <p:sld xmlns:a="http://schemas.openxmlformats.org/drawingml/2006/main" xmlns:r="http://schemas.openxmlformats.org/officeDocument/2006/relationships" xmlns:p="http://schemas.openxmlformats.org/presentationml/2006/main">
   <p:cSld>
     <p:spTree>
@@ -14601,118 +15667,279 @@
           </a:p>
         </p:txBody>
       </p:sp>
-      <p:graphicFrame>
-        <p:nvGraphicFramePr>
-          <p:cNvPr id="105476" name="Object 4">
-            <a:extLst>
-              <a:ext uri="{FF2B5EF4-FFF2-40B4-BE49-F238E27FC236}">
-                <a16:creationId xmlns:a16="http://schemas.microsoft.com/office/drawing/2014/main" id="{BE645804-9E9B-4088-8BA8-5B8D98F0ECFC}"/>
-              </a:ext>
-            </a:extLst>
-          </p:cNvPr>
-          <p:cNvGraphicFramePr>
-            <a:graphicFrameLocks noGrp="1" noChangeAspect="1"/>
-          </p:cNvGraphicFramePr>
-          <p:nvPr>
-            <p:ph sz="quarter" idx="2"/>
-            <p:extLst>
-              <p:ext uri="{D42A27DB-BD31-4B8C-83A1-F6EECF244321}">
-                <p14:modId xmlns:p14="http://schemas.microsoft.com/office/powerpoint/2010/main" val="2376591631"/>
-              </p:ext>
-            </p:extLst>
-          </p:nvPr>
-        </p:nvGraphicFramePr>
-        <p:xfrm>
-          <a:off x="1066800" y="1627188"/>
-          <a:ext cx="4114800" cy="1149350"/>
-        </p:xfrm>
-        <a:graphic>
-          <a:graphicData uri="http://schemas.openxmlformats.org/presentationml/2006/ole">
-            <mc:AlternateContent xmlns:mc="http://schemas.openxmlformats.org/markup-compatibility/2006">
-              <mc:Choice xmlns:v="urn:schemas-microsoft-com:vml" Requires="v">
-                <p:oleObj name="Equation" r:id="rId3" imgW="1409088" imgH="393529" progId="Equation.3">
-                  <p:embed/>
-                </p:oleObj>
-              </mc:Choice>
-              <mc:Fallback>
-                <p:oleObj name="Equation" r:id="rId3" imgW="1409088" imgH="393529" progId="Equation.3">
-                  <p:embed/>
-                  <p:pic>
-                    <p:nvPicPr>
-                      <p:cNvPr id="105476" name="Object 4">
-                        <a:extLst>
-                          <a:ext uri="{FF2B5EF4-FFF2-40B4-BE49-F238E27FC236}">
-                            <a16:creationId xmlns:a16="http://schemas.microsoft.com/office/drawing/2014/main" id="{BE645804-9E9B-4088-8BA8-5B8D98F0ECFC}"/>
-                          </a:ext>
-                        </a:extLst>
-                      </p:cNvPr>
-                      <p:cNvPicPr>
-                        <a:picLocks noChangeAspect="1" noChangeArrowheads="1"/>
-                      </p:cNvPicPr>
-                      <p:nvPr/>
-                    </p:nvPicPr>
-                    <p:blipFill>
-                      <a:blip r:embed="rId4">
-                        <a:extLst>
-                          <a:ext uri="{28A0092B-C50C-407E-A947-70E740481C1C}">
-                            <a14:useLocalDpi xmlns:a14="http://schemas.microsoft.com/office/drawing/2010/main" val="0"/>
-                          </a:ext>
-                        </a:extLst>
-                      </a:blip>
-                      <a:srcRect/>
-                      <a:stretch>
-                        <a:fillRect/>
-                      </a:stretch>
-                    </p:blipFill>
-                    <p:spPr bwMode="auto">
-                      <a:xfrm>
-                        <a:off x="1066800" y="1627188"/>
-                        <a:ext cx="4114800" cy="1149350"/>
-                      </a:xfrm>
-                      <a:prstGeom prst="rect">
-                        <a:avLst/>
-                      </a:prstGeom>
-                      <a:noFill/>
-                      <a:ln>
-                        <a:noFill/>
-                      </a:ln>
-                      <a:effectLst/>
-                      <a:extLst>
-                        <a:ext uri="{909E8E84-426E-40DD-AFC4-6F175D3DCCD1}">
-                          <a14:hiddenFill xmlns:a14="http://schemas.microsoft.com/office/drawing/2010/main">
-                            <a:solidFill>
-                              <a:srgbClr val="FFFFFF"/>
-                            </a:solidFill>
-                          </a14:hiddenFill>
-                        </a:ext>
-                        <a:ext uri="{91240B29-F687-4F45-9708-019B960494DF}">
-                          <a14:hiddenLine xmlns:a14="http://schemas.microsoft.com/office/drawing/2010/main" w="9525">
-                            <a:solidFill>
-                              <a:srgbClr val="000000"/>
-                            </a:solidFill>
-                            <a:miter lim="800000"/>
-                            <a:headEnd/>
-                            <a:tailEnd/>
-                          </a14:hiddenLine>
-                        </a:ext>
-                        <a:ext uri="{AF507438-7753-43E0-B8FC-AC1667EBCBE1}">
-                          <a14:hiddenEffects xmlns:a14="http://schemas.microsoft.com/office/drawing/2010/main">
-                            <a:effectLst>
-                              <a:outerShdw dist="35921" dir="2700000" algn="ctr" rotWithShape="0">
-                                <a:srgbClr val="808080"/>
-                              </a:outerShdw>
-                            </a:effectLst>
-                          </a14:hiddenEffects>
-                        </a:ext>
-                      </a:extLst>
-                    </p:spPr>
-                  </p:pic>
-                </p:oleObj>
-              </mc:Fallback>
-            </mc:AlternateContent>
-          </a:graphicData>
-        </a:graphic>
-      </p:graphicFrame>
+      <mc:AlternateContent xmlns:mc="http://schemas.openxmlformats.org/markup-compatibility/2006">
+        <mc:Choice xmlns:a14="http://schemas.microsoft.com/office/drawing/2010/main" Requires="a14">
+          <p:sp>
+            <p:nvSpPr>
+              <p:cNvPr id="105476" name="Object 4">
+                <a:extLst>
+                  <a:ext uri="{FF2B5EF4-FFF2-40B4-BE49-F238E27FC236}">
+                    <a16:creationId xmlns:a16="http://schemas.microsoft.com/office/drawing/2014/main" id="{BE645804-9E9B-4088-8BA8-5B8D98F0ECFC}"/>
+                  </a:ext>
+                </a:extLst>
+              </p:cNvPr>
+              <p:cNvSpPr txBox="1"/>
+              <p:nvPr>
+                <p:ph sz="quarter" idx="2"/>
+              </p:nvPr>
+            </p:nvSpPr>
+            <p:spPr bwMode="auto">
+              <a:xfrm>
+                <a:off x="1066800" y="1627188"/>
+                <a:ext cx="6781800" cy="735012"/>
+              </a:xfrm>
+              <a:prstGeom prst="rect">
+                <a:avLst/>
+              </a:prstGeom>
+              <a:noFill/>
+              <a:ln>
+                <a:noFill/>
+              </a:ln>
+              <a:effectLst/>
+            </p:spPr>
+            <p:txBody>
+              <a:bodyPr>
+                <a:noAutofit/>
+              </a:bodyPr>
+              <a:lstStyle/>
+              <a:p>
+                <a:pPr>
+                  <a:buNone/>
+                </a:pPr>
+                <a14:m>
+                  <m:oMathPara xmlns:m="http://schemas.openxmlformats.org/officeDocument/2006/math">
+                    <m:oMathParaPr>
+                      <m:jc m:val="left"/>
+                    </m:oMathParaPr>
+                    <m:oMath>
+                      <m:f>
+                        <m:fPr>
+                          <m:ctrlPr>
+                            <a:rPr lang="en-US" sz="3600" i="1" smtClean="0">
+                              <a:solidFill>
+                                <a:srgbClr val="000000"/>
+                              </a:solidFill>
+                              <a:latin typeface="Cambria Math" panose="02040503050406030204" pitchFamily="18" charset="0"/>
+                            </a:rPr>
+                          </m:ctrlPr>
+                        </m:fPr>
+                        <m:num>
+                          <m:r>
+                            <m:rPr>
+                              <m:sty m:val="p"/>
+                            </m:rPr>
+                            <a:rPr lang="en-US" sz="3600" i="1" smtClean="0">
+                              <a:solidFill>
+                                <a:srgbClr val="000000"/>
+                              </a:solidFill>
+                              <a:latin typeface="Cambria Math" panose="02040503050406030204" pitchFamily="18" charset="0"/>
+                            </a:rPr>
+                            <m:t>Δ</m:t>
+                          </m:r>
+                          <m:r>
+                            <a:rPr lang="en-US" sz="3600" b="0" i="1" smtClean="0">
+                              <a:solidFill>
+                                <a:srgbClr val="000000"/>
+                              </a:solidFill>
+                              <a:latin typeface="Cambria Math" panose="02040503050406030204" pitchFamily="18" charset="0"/>
+                            </a:rPr>
+                            <m:t>𝑁</m:t>
+                          </m:r>
+                        </m:num>
+                        <m:den>
+                          <m:r>
+                            <m:rPr>
+                              <m:sty m:val="p"/>
+                            </m:rPr>
+                            <a:rPr lang="en-US" sz="3600" i="1">
+                              <a:solidFill>
+                                <a:srgbClr val="000000"/>
+                              </a:solidFill>
+                              <a:latin typeface="Cambria Math" panose="02040503050406030204" pitchFamily="18" charset="0"/>
+                            </a:rPr>
+                            <m:t>Δ</m:t>
+                          </m:r>
+                          <m:r>
+                            <a:rPr lang="en-US" sz="3600" b="0" i="1" smtClean="0">
+                              <a:solidFill>
+                                <a:srgbClr val="000000"/>
+                              </a:solidFill>
+                              <a:latin typeface="Cambria Math" panose="02040503050406030204" pitchFamily="18" charset="0"/>
+                            </a:rPr>
+                            <m:t>𝑡</m:t>
+                          </m:r>
+                        </m:den>
+                      </m:f>
+                      <m:r>
+                        <a:rPr lang="en-US" sz="3600" i="1">
+                          <a:solidFill>
+                            <a:srgbClr val="000000"/>
+                          </a:solidFill>
+                          <a:latin typeface="Cambria Math" panose="02040503050406030204" pitchFamily="18" charset="0"/>
+                        </a:rPr>
+                        <m:t> →</m:t>
+                      </m:r>
+                      <m:r>
+                        <a:rPr lang="en-US" sz="3600" i="0">
+                          <a:solidFill>
+                            <a:srgbClr val="000000"/>
+                          </a:solidFill>
+                          <a:latin typeface="Cambria Math" panose="02040503050406030204" pitchFamily="18" charset="0"/>
+                        </a:rPr>
+                        <m:t> </m:t>
+                      </m:r>
+                      <m:f>
+                        <m:fPr>
+                          <m:ctrlPr>
+                            <a:rPr lang="en-US" sz="3600" i="1">
+                              <a:solidFill>
+                                <a:srgbClr val="000000"/>
+                              </a:solidFill>
+                              <a:latin typeface="Cambria Math" panose="02040503050406030204" pitchFamily="18" charset="0"/>
+                            </a:rPr>
+                          </m:ctrlPr>
+                        </m:fPr>
+                        <m:num>
+                          <m:r>
+                            <a:rPr lang="en-US" sz="3600" i="1">
+                              <a:solidFill>
+                                <a:srgbClr val="000000"/>
+                              </a:solidFill>
+                              <a:latin typeface="Cambria Math" panose="02040503050406030204" pitchFamily="18" charset="0"/>
+                            </a:rPr>
+                            <m:t>𝑑𝑁</m:t>
+                          </m:r>
+                        </m:num>
+                        <m:den>
+                          <m:r>
+                            <a:rPr lang="en-US" sz="3600" i="1">
+                              <a:solidFill>
+                                <a:srgbClr val="000000"/>
+                              </a:solidFill>
+                              <a:latin typeface="Cambria Math" panose="02040503050406030204" pitchFamily="18" charset="0"/>
+                            </a:rPr>
+                            <m:t>𝑑𝑡</m:t>
+                          </m:r>
+                        </m:den>
+                      </m:f>
+                      <m:r>
+                        <a:rPr lang="en-US" sz="3600" i="1">
+                          <a:solidFill>
+                            <a:srgbClr val="000000"/>
+                          </a:solidFill>
+                          <a:latin typeface="Cambria Math" panose="02040503050406030204" pitchFamily="18" charset="0"/>
+                        </a:rPr>
+                        <m:t>=</m:t>
+                      </m:r>
+                      <m:r>
+                        <a:rPr lang="en-US" sz="3600" i="1">
+                          <a:solidFill>
+                            <a:srgbClr val="000000"/>
+                          </a:solidFill>
+                          <a:latin typeface="Cambria Math" panose="02040503050406030204" pitchFamily="18" charset="0"/>
+                        </a:rPr>
+                        <m:t>𝑁</m:t>
+                      </m:r>
+                      <m:d>
+                        <m:dPr>
+                          <m:ctrlPr>
+                            <a:rPr lang="en-US" sz="3600" i="1">
+                              <a:solidFill>
+                                <a:srgbClr val="000000"/>
+                              </a:solidFill>
+                              <a:latin typeface="Cambria Math" panose="02040503050406030204" pitchFamily="18" charset="0"/>
+                            </a:rPr>
+                          </m:ctrlPr>
+                        </m:dPr>
+                        <m:e>
+                          <m:r>
+                            <a:rPr lang="en-US" sz="3600" i="1">
+                              <a:solidFill>
+                                <a:srgbClr val="000000"/>
+                              </a:solidFill>
+                              <a:latin typeface="Cambria Math" panose="02040503050406030204" pitchFamily="18" charset="0"/>
+                            </a:rPr>
+                            <m:t>𝑏</m:t>
+                          </m:r>
+                          <m:r>
+                            <a:rPr lang="en-US" sz="3600" i="1">
+                              <a:solidFill>
+                                <a:srgbClr val="000000"/>
+                              </a:solidFill>
+                              <a:latin typeface="Cambria Math" panose="02040503050406030204" pitchFamily="18" charset="0"/>
+                            </a:rPr>
+                            <m:t>−</m:t>
+                          </m:r>
+                          <m:r>
+                            <a:rPr lang="en-US" sz="3600" i="1">
+                              <a:solidFill>
+                                <a:srgbClr val="000000"/>
+                              </a:solidFill>
+                              <a:latin typeface="Cambria Math" panose="02040503050406030204" pitchFamily="18" charset="0"/>
+                            </a:rPr>
+                            <m:t>𝑑</m:t>
+                          </m:r>
+                        </m:e>
+                      </m:d>
+                    </m:oMath>
+                  </m:oMathPara>
+                </a14:m>
+                <a:endParaRPr lang="en-US" sz="3600" dirty="0"/>
+              </a:p>
+            </p:txBody>
+          </p:sp>
+        </mc:Choice>
+        <mc:Fallback>
+          <p:sp>
+            <p:nvSpPr>
+              <p:cNvPr id="105476" name="Object 4">
+                <a:extLst>
+                  <a:ext uri="{FF2B5EF4-FFF2-40B4-BE49-F238E27FC236}">
+                    <a16:creationId xmlns:a16="http://schemas.microsoft.com/office/drawing/2014/main" id="{BE645804-9E9B-4088-8BA8-5B8D98F0ECFC}"/>
+                  </a:ext>
+                </a:extLst>
+              </p:cNvPr>
+              <p:cNvSpPr txBox="1">
+                <a:spLocks noRot="1" noChangeAspect="1" noMove="1" noResize="1" noEditPoints="1" noAdjustHandles="1" noChangeArrowheads="1" noChangeShapeType="1" noTextEdit="1"/>
+              </p:cNvSpPr>
+              <p:nvPr>
+                <p:ph sz="quarter" idx="2"/>
+              </p:nvPr>
+            </p:nvSpPr>
+            <p:spPr bwMode="auto">
+              <a:xfrm>
+                <a:off x="1066800" y="1627188"/>
+                <a:ext cx="6781800" cy="735012"/>
+              </a:xfrm>
+              <a:prstGeom prst="rect">
+                <a:avLst/>
+              </a:prstGeom>
+              <a:blipFill>
+                <a:blip r:embed="rId3"/>
+                <a:stretch>
+                  <a:fillRect b="-47934"/>
+                </a:stretch>
+              </a:blipFill>
+              <a:ln>
+                <a:noFill/>
+              </a:ln>
+              <a:effectLst/>
+            </p:spPr>
+            <p:txBody>
+              <a:bodyPr/>
+              <a:lstStyle/>
+              <a:p>
+                <a:r>
+                  <a:rPr lang="en-US">
+                    <a:noFill/>
+                  </a:rPr>
+                  <a:t> </a:t>
+                </a:r>
+              </a:p>
+            </p:txBody>
+          </p:sp>
+        </mc:Fallback>
+      </mc:AlternateContent>
       <p:graphicFrame>
         <p:nvGraphicFramePr>
           <p:cNvPr id="105477" name="Object 5">
@@ -14742,12 +15969,12 @@
           <a:graphicData uri="http://schemas.openxmlformats.org/presentationml/2006/ole">
             <mc:AlternateContent xmlns:mc="http://schemas.openxmlformats.org/markup-compatibility/2006">
               <mc:Choice xmlns:v="urn:schemas-microsoft-com:vml" Requires="v">
-                <p:oleObj name="Equation" r:id="rId5" imgW="660113" imgH="393529" progId="Equation.3">
+                <p:oleObj name="Equation" r:id="rId4" imgW="660113" imgH="393529" progId="Equation.3">
                   <p:embed/>
                 </p:oleObj>
               </mc:Choice>
               <mc:Fallback>
-                <p:oleObj name="Equation" r:id="rId5" imgW="660113" imgH="393529" progId="Equation.3">
+                <p:oleObj name="Equation" r:id="rId4" imgW="660113" imgH="393529" progId="Equation.3">
                   <p:embed/>
                   <p:pic>
                     <p:nvPicPr>
@@ -14764,7 +15991,7 @@
                       <p:nvPr/>
                     </p:nvPicPr>
                     <p:blipFill>
-                      <a:blip r:embed="rId6">
+                      <a:blip r:embed="rId5">
                         <a:extLst>
                           <a:ext uri="{28A0092B-C50C-407E-A947-70E740481C1C}">
                             <a14:useLocalDpi xmlns:a14="http://schemas.microsoft.com/office/drawing/2010/main" val="0"/>
@@ -14825,1996 +16052,6 @@
           </a:graphicData>
         </a:graphic>
       </p:graphicFrame>
-      <p:sp>
-        <p:nvSpPr>
-          <p:cNvPr id="105478" name="Date Placeholder 10">
-            <a:extLst>
-              <a:ext uri="{FF2B5EF4-FFF2-40B4-BE49-F238E27FC236}">
-                <a16:creationId xmlns:a16="http://schemas.microsoft.com/office/drawing/2014/main" id="{CC9F4695-F1CA-4F0F-8E34-AA052F5EA575}"/>
-              </a:ext>
-            </a:extLst>
-          </p:cNvPr>
-          <p:cNvSpPr>
-            <a:spLocks noGrp="1"/>
-          </p:cNvSpPr>
-          <p:nvPr>
-            <p:ph type="dt" sz="quarter" idx="10"/>
-          </p:nvPr>
-        </p:nvSpPr>
-        <p:spPr bwMode="auto">
-          <a:xfrm>
-            <a:off x="404327" y="6278562"/>
-            <a:ext cx="2133600" cy="476250"/>
-          </a:xfrm>
-          <a:noFill/>
-          <a:extLst>
-            <a:ext uri="{909E8E84-426E-40DD-AFC4-6F175D3DCCD1}">
-              <a14:hiddenFill xmlns:a14="http://schemas.microsoft.com/office/drawing/2010/main">
-                <a:solidFill>
-                  <a:srgbClr val="FFFFFF"/>
-                </a:solidFill>
-              </a14:hiddenFill>
-            </a:ext>
-            <a:ext uri="{91240B29-F687-4F45-9708-019B960494DF}">
-              <a14:hiddenLine xmlns:a14="http://schemas.microsoft.com/office/drawing/2010/main" w="9525">
-                <a:solidFill>
-                  <a:srgbClr val="000000"/>
-                </a:solidFill>
-                <a:miter lim="800000"/>
-                <a:headEnd/>
-                <a:tailEnd/>
-              </a14:hiddenLine>
-            </a:ext>
-          </a:extLst>
-        </p:spPr>
-        <p:txBody>
-          <a:bodyPr wrap="square" numCol="1" anchorCtr="0" compatLnSpc="1">
-            <a:prstTxWarp prst="textNoShape">
-              <a:avLst/>
-            </a:prstTxWarp>
-          </a:bodyPr>
-          <a:lstStyle>
-            <a:lvl1pPr>
-              <a:defRPr>
-                <a:solidFill>
-                  <a:schemeClr val="tx1"/>
-                </a:solidFill>
-                <a:latin typeface="Arial" panose="020B0604020202020204" pitchFamily="34" charset="0"/>
-              </a:defRPr>
-            </a:lvl1pPr>
-            <a:lvl2pPr marL="742950" indent="-285750">
-              <a:defRPr>
-                <a:solidFill>
-                  <a:schemeClr val="tx1"/>
-                </a:solidFill>
-                <a:latin typeface="Arial" panose="020B0604020202020204" pitchFamily="34" charset="0"/>
-              </a:defRPr>
-            </a:lvl2pPr>
-            <a:lvl3pPr marL="1143000" indent="-228600">
-              <a:defRPr>
-                <a:solidFill>
-                  <a:schemeClr val="tx1"/>
-                </a:solidFill>
-                <a:latin typeface="Arial" panose="020B0604020202020204" pitchFamily="34" charset="0"/>
-              </a:defRPr>
-            </a:lvl3pPr>
-            <a:lvl4pPr marL="1600200" indent="-228600">
-              <a:defRPr>
-                <a:solidFill>
-                  <a:schemeClr val="tx1"/>
-                </a:solidFill>
-                <a:latin typeface="Arial" panose="020B0604020202020204" pitchFamily="34" charset="0"/>
-              </a:defRPr>
-            </a:lvl4pPr>
-            <a:lvl5pPr marL="2057400" indent="-228600">
-              <a:defRPr>
-                <a:solidFill>
-                  <a:schemeClr val="tx1"/>
-                </a:solidFill>
-                <a:latin typeface="Arial" panose="020B0604020202020204" pitchFamily="34" charset="0"/>
-              </a:defRPr>
-            </a:lvl5pPr>
-            <a:lvl6pPr marL="2514600" indent="-228600" eaLnBrk="0" fontAlgn="base" hangingPunct="0">
-              <a:spcBef>
-                <a:spcPct val="0"/>
-              </a:spcBef>
-              <a:spcAft>
-                <a:spcPct val="0"/>
-              </a:spcAft>
-              <a:defRPr>
-                <a:solidFill>
-                  <a:schemeClr val="tx1"/>
-                </a:solidFill>
-                <a:latin typeface="Arial" panose="020B0604020202020204" pitchFamily="34" charset="0"/>
-              </a:defRPr>
-            </a:lvl6pPr>
-            <a:lvl7pPr marL="2971800" indent="-228600" eaLnBrk="0" fontAlgn="base" hangingPunct="0">
-              <a:spcBef>
-                <a:spcPct val="0"/>
-              </a:spcBef>
-              <a:spcAft>
-                <a:spcPct val="0"/>
-              </a:spcAft>
-              <a:defRPr>
-                <a:solidFill>
-                  <a:schemeClr val="tx1"/>
-                </a:solidFill>
-                <a:latin typeface="Arial" panose="020B0604020202020204" pitchFamily="34" charset="0"/>
-              </a:defRPr>
-            </a:lvl7pPr>
-            <a:lvl8pPr marL="3429000" indent="-228600" eaLnBrk="0" fontAlgn="base" hangingPunct="0">
-              <a:spcBef>
-                <a:spcPct val="0"/>
-              </a:spcBef>
-              <a:spcAft>
-                <a:spcPct val="0"/>
-              </a:spcAft>
-              <a:defRPr>
-                <a:solidFill>
-                  <a:schemeClr val="tx1"/>
-                </a:solidFill>
-                <a:latin typeface="Arial" panose="020B0604020202020204" pitchFamily="34" charset="0"/>
-              </a:defRPr>
-            </a:lvl8pPr>
-            <a:lvl9pPr marL="3886200" indent="-228600" eaLnBrk="0" fontAlgn="base" hangingPunct="0">
-              <a:spcBef>
-                <a:spcPct val="0"/>
-              </a:spcBef>
-              <a:spcAft>
-                <a:spcPct val="0"/>
-              </a:spcAft>
-              <a:defRPr>
-                <a:solidFill>
-                  <a:schemeClr val="tx1"/>
-                </a:solidFill>
-                <a:latin typeface="Arial" panose="020B0604020202020204" pitchFamily="34" charset="0"/>
-              </a:defRPr>
-            </a:lvl9pPr>
-          </a:lstStyle>
-          <a:p>
-            <a:r>
-              <a:rPr lang="en-US" altLang="en-US" dirty="0"/>
-              <a:t>8/15/2024</a:t>
-            </a:r>
-          </a:p>
-        </p:txBody>
-      </p:sp>
-      <p:sp>
-        <p:nvSpPr>
-          <p:cNvPr id="105479" name="Footer Placeholder 11">
-            <a:extLst>
-              <a:ext uri="{FF2B5EF4-FFF2-40B4-BE49-F238E27FC236}">
-                <a16:creationId xmlns:a16="http://schemas.microsoft.com/office/drawing/2014/main" id="{2700E137-8269-4D4A-B4A1-95C30ECFF6E8}"/>
-              </a:ext>
-            </a:extLst>
-          </p:cNvPr>
-          <p:cNvSpPr>
-            <a:spLocks noGrp="1"/>
-          </p:cNvSpPr>
-          <p:nvPr>
-            <p:ph type="ftr" sz="quarter" idx="11"/>
-          </p:nvPr>
-        </p:nvSpPr>
-        <p:spPr bwMode="auto">
-          <a:xfrm>
-            <a:off x="3047206" y="6182146"/>
-            <a:ext cx="2895600" cy="476250"/>
-          </a:xfrm>
-          <a:noFill/>
-          <a:extLst>
-            <a:ext uri="{909E8E84-426E-40DD-AFC4-6F175D3DCCD1}">
-              <a14:hiddenFill xmlns:a14="http://schemas.microsoft.com/office/drawing/2010/main">
-                <a:solidFill>
-                  <a:srgbClr val="FFFFFF"/>
-                </a:solidFill>
-              </a14:hiddenFill>
-            </a:ext>
-            <a:ext uri="{91240B29-F687-4F45-9708-019B960494DF}">
-              <a14:hiddenLine xmlns:a14="http://schemas.microsoft.com/office/drawing/2010/main" w="9525">
-                <a:solidFill>
-                  <a:srgbClr val="000000"/>
-                </a:solidFill>
-                <a:miter lim="800000"/>
-                <a:headEnd/>
-                <a:tailEnd/>
-              </a14:hiddenLine>
-            </a:ext>
-          </a:extLst>
-        </p:spPr>
-        <p:txBody>
-          <a:bodyPr wrap="square" numCol="1" anchorCtr="0" compatLnSpc="1">
-            <a:prstTxWarp prst="textNoShape">
-              <a:avLst/>
-            </a:prstTxWarp>
-          </a:bodyPr>
-          <a:lstStyle>
-            <a:lvl1pPr>
-              <a:defRPr>
-                <a:solidFill>
-                  <a:schemeClr val="tx1"/>
-                </a:solidFill>
-                <a:latin typeface="Arial" panose="020B0604020202020204" pitchFamily="34" charset="0"/>
-              </a:defRPr>
-            </a:lvl1pPr>
-            <a:lvl2pPr marL="742950" indent="-285750">
-              <a:defRPr>
-                <a:solidFill>
-                  <a:schemeClr val="tx1"/>
-                </a:solidFill>
-                <a:latin typeface="Arial" panose="020B0604020202020204" pitchFamily="34" charset="0"/>
-              </a:defRPr>
-            </a:lvl2pPr>
-            <a:lvl3pPr marL="1143000" indent="-228600">
-              <a:defRPr>
-                <a:solidFill>
-                  <a:schemeClr val="tx1"/>
-                </a:solidFill>
-                <a:latin typeface="Arial" panose="020B0604020202020204" pitchFamily="34" charset="0"/>
-              </a:defRPr>
-            </a:lvl3pPr>
-            <a:lvl4pPr marL="1600200" indent="-228600">
-              <a:defRPr>
-                <a:solidFill>
-                  <a:schemeClr val="tx1"/>
-                </a:solidFill>
-                <a:latin typeface="Arial" panose="020B0604020202020204" pitchFamily="34" charset="0"/>
-              </a:defRPr>
-            </a:lvl4pPr>
-            <a:lvl5pPr marL="2057400" indent="-228600">
-              <a:defRPr>
-                <a:solidFill>
-                  <a:schemeClr val="tx1"/>
-                </a:solidFill>
-                <a:latin typeface="Arial" panose="020B0604020202020204" pitchFamily="34" charset="0"/>
-              </a:defRPr>
-            </a:lvl5pPr>
-            <a:lvl6pPr marL="2514600" indent="-228600" eaLnBrk="0" fontAlgn="base" hangingPunct="0">
-              <a:spcBef>
-                <a:spcPct val="0"/>
-              </a:spcBef>
-              <a:spcAft>
-                <a:spcPct val="0"/>
-              </a:spcAft>
-              <a:defRPr>
-                <a:solidFill>
-                  <a:schemeClr val="tx1"/>
-                </a:solidFill>
-                <a:latin typeface="Arial" panose="020B0604020202020204" pitchFamily="34" charset="0"/>
-              </a:defRPr>
-            </a:lvl6pPr>
-            <a:lvl7pPr marL="2971800" indent="-228600" eaLnBrk="0" fontAlgn="base" hangingPunct="0">
-              <a:spcBef>
-                <a:spcPct val="0"/>
-              </a:spcBef>
-              <a:spcAft>
-                <a:spcPct val="0"/>
-              </a:spcAft>
-              <a:defRPr>
-                <a:solidFill>
-                  <a:schemeClr val="tx1"/>
-                </a:solidFill>
-                <a:latin typeface="Arial" panose="020B0604020202020204" pitchFamily="34" charset="0"/>
-              </a:defRPr>
-            </a:lvl7pPr>
-            <a:lvl8pPr marL="3429000" indent="-228600" eaLnBrk="0" fontAlgn="base" hangingPunct="0">
-              <a:spcBef>
-                <a:spcPct val="0"/>
-              </a:spcBef>
-              <a:spcAft>
-                <a:spcPct val="0"/>
-              </a:spcAft>
-              <a:defRPr>
-                <a:solidFill>
-                  <a:schemeClr val="tx1"/>
-                </a:solidFill>
-                <a:latin typeface="Arial" panose="020B0604020202020204" pitchFamily="34" charset="0"/>
-              </a:defRPr>
-            </a:lvl8pPr>
-            <a:lvl9pPr marL="3886200" indent="-228600" eaLnBrk="0" fontAlgn="base" hangingPunct="0">
-              <a:spcBef>
-                <a:spcPct val="0"/>
-              </a:spcBef>
-              <a:spcAft>
-                <a:spcPct val="0"/>
-              </a:spcAft>
-              <a:defRPr>
-                <a:solidFill>
-                  <a:schemeClr val="tx1"/>
-                </a:solidFill>
-                <a:latin typeface="Arial" panose="020B0604020202020204" pitchFamily="34" charset="0"/>
-              </a:defRPr>
-            </a:lvl9pPr>
-          </a:lstStyle>
-          <a:p>
-            <a:r>
-              <a:rPr lang="nl-NL" altLang="en-US" dirty="0"/>
-              <a:t>MBE 713 FALL 2024         Instructor D.J. Die</a:t>
-            </a:r>
-            <a:endParaRPr lang="en-US" altLang="en-US" dirty="0"/>
-          </a:p>
-        </p:txBody>
-      </p:sp>
-    </p:spTree>
-  </p:cSld>
-  <p:clrMapOvr>
-    <a:masterClrMapping/>
-  </p:clrMapOvr>
-</p:sld>
-</file>
-
-<file path=ppt/slides/slide8.xml><?xml version="1.0" encoding="utf-8"?>
-<p:sld xmlns:a="http://schemas.openxmlformats.org/drawingml/2006/main" xmlns:r="http://schemas.openxmlformats.org/officeDocument/2006/relationships" xmlns:p="http://schemas.openxmlformats.org/presentationml/2006/main">
-  <p:cSld>
-    <p:spTree>
-      <p:nvGrpSpPr>
-        <p:cNvPr id="1" name=""/>
-        <p:cNvGrpSpPr/>
-        <p:nvPr/>
-      </p:nvGrpSpPr>
-      <p:grpSpPr>
-        <a:xfrm>
-          <a:off x="0" y="0"/>
-          <a:ext cx="0" cy="0"/>
-          <a:chOff x="0" y="0"/>
-          <a:chExt cx="0" cy="0"/>
-        </a:xfrm>
-      </p:grpSpPr>
-      <p:sp>
-        <p:nvSpPr>
-          <p:cNvPr id="119810" name="Rectangle 2">
-            <a:extLst>
-              <a:ext uri="{FF2B5EF4-FFF2-40B4-BE49-F238E27FC236}">
-                <a16:creationId xmlns:a16="http://schemas.microsoft.com/office/drawing/2014/main" id="{32D41F02-8E01-46BD-8EF5-B3CCDD62C5D0}"/>
-              </a:ext>
-            </a:extLst>
-          </p:cNvPr>
-          <p:cNvSpPr>
-            <a:spLocks noGrp="1" noChangeArrowheads="1"/>
-          </p:cNvSpPr>
-          <p:nvPr>
-            <p:ph type="title"/>
-          </p:nvPr>
-        </p:nvSpPr>
-        <p:spPr bwMode="auto">
-          <a:noFill/>
-          <a:extLst>
-            <a:ext uri="{909E8E84-426E-40DD-AFC4-6F175D3DCCD1}">
-              <a14:hiddenFill xmlns:a14="http://schemas.microsoft.com/office/drawing/2010/main">
-                <a:solidFill>
-                  <a:srgbClr val="FFFFFF"/>
-                </a:solidFill>
-              </a14:hiddenFill>
-            </a:ext>
-            <a:ext uri="{91240B29-F687-4F45-9708-019B960494DF}">
-              <a14:hiddenLine xmlns:a14="http://schemas.microsoft.com/office/drawing/2010/main" w="9525">
-                <a:solidFill>
-                  <a:srgbClr val="000000"/>
-                </a:solidFill>
-                <a:miter lim="800000"/>
-                <a:headEnd/>
-                <a:tailEnd/>
-              </a14:hiddenLine>
-            </a:ext>
-          </a:extLst>
-        </p:spPr>
-        <p:txBody>
-          <a:bodyPr vert="horz" wrap="square" lIns="91440" tIns="45720" rIns="91440" bIns="45720" numCol="1" anchor="t" anchorCtr="0" compatLnSpc="1">
-            <a:prstTxWarp prst="textNoShape">
-              <a:avLst/>
-            </a:prstTxWarp>
-          </a:bodyPr>
-          <a:lstStyle/>
-          <a:p>
-            <a:pPr eaLnBrk="1" hangingPunct="1"/>
-            <a:r>
-              <a:rPr lang="en-US" altLang="en-US" b="1" dirty="0"/>
-              <a:t>Population growth rates</a:t>
-            </a:r>
-          </a:p>
-        </p:txBody>
-      </p:sp>
-      <p:sp>
-        <p:nvSpPr>
-          <p:cNvPr id="119811" name="Rectangle 3">
-            <a:extLst>
-              <a:ext uri="{FF2B5EF4-FFF2-40B4-BE49-F238E27FC236}">
-                <a16:creationId xmlns:a16="http://schemas.microsoft.com/office/drawing/2014/main" id="{9AEC5CAD-12AE-4030-821F-6315D6FA24A7}"/>
-              </a:ext>
-            </a:extLst>
-          </p:cNvPr>
-          <p:cNvSpPr>
-            <a:spLocks noGrp="1" noChangeArrowheads="1"/>
-          </p:cNvSpPr>
-          <p:nvPr>
-            <p:ph idx="1"/>
-          </p:nvPr>
-        </p:nvSpPr>
-        <p:spPr bwMode="auto">
-          <a:xfrm>
-            <a:off x="457200" y="2057400"/>
-            <a:ext cx="8229600" cy="3429000"/>
-          </a:xfrm>
-          <a:noFill/>
-          <a:extLst>
-            <a:ext uri="{909E8E84-426E-40DD-AFC4-6F175D3DCCD1}">
-              <a14:hiddenFill xmlns:a14="http://schemas.microsoft.com/office/drawing/2010/main">
-                <a:solidFill>
-                  <a:srgbClr val="FFFFFF"/>
-                </a:solidFill>
-              </a14:hiddenFill>
-            </a:ext>
-            <a:ext uri="{91240B29-F687-4F45-9708-019B960494DF}">
-              <a14:hiddenLine xmlns:a14="http://schemas.microsoft.com/office/drawing/2010/main" w="9525">
-                <a:solidFill>
-                  <a:srgbClr val="000000"/>
-                </a:solidFill>
-                <a:miter lim="800000"/>
-                <a:headEnd/>
-                <a:tailEnd/>
-              </a14:hiddenLine>
-            </a:ext>
-          </a:extLst>
-        </p:spPr>
-        <p:txBody>
-          <a:bodyPr vert="horz" wrap="square" lIns="91440" tIns="45720" rIns="91440" bIns="45720" numCol="1" anchor="t" anchorCtr="0" compatLnSpc="1">
-            <a:prstTxWarp prst="textNoShape">
-              <a:avLst/>
-            </a:prstTxWarp>
-          </a:bodyPr>
-          <a:lstStyle/>
-          <a:p>
-            <a:pPr eaLnBrk="1" hangingPunct="1"/>
-            <a:r>
-              <a:rPr lang="en-US" altLang="en-US"/>
-              <a:t>If r is positive  the population increases</a:t>
-            </a:r>
-          </a:p>
-          <a:p>
-            <a:pPr eaLnBrk="1" hangingPunct="1"/>
-            <a:endParaRPr lang="en-US" altLang="en-US"/>
-          </a:p>
-          <a:p>
-            <a:pPr eaLnBrk="1" hangingPunct="1"/>
-            <a:r>
-              <a:rPr lang="en-US" altLang="en-US"/>
-              <a:t>If r = 0 population is stationary</a:t>
-            </a:r>
-          </a:p>
-          <a:p>
-            <a:pPr eaLnBrk="1" hangingPunct="1"/>
-            <a:endParaRPr lang="en-US" altLang="en-US"/>
-          </a:p>
-          <a:p>
-            <a:pPr eaLnBrk="1" hangingPunct="1"/>
-            <a:r>
-              <a:rPr lang="en-US" altLang="en-US"/>
-              <a:t>If r is negative population decreases</a:t>
-            </a:r>
-          </a:p>
-          <a:p>
-            <a:pPr eaLnBrk="1" hangingPunct="1"/>
-            <a:endParaRPr lang="en-US" altLang="en-US"/>
-          </a:p>
-        </p:txBody>
-      </p:sp>
-      <p:sp>
-        <p:nvSpPr>
-          <p:cNvPr id="119812" name="Date Placeholder 8">
-            <a:extLst>
-              <a:ext uri="{FF2B5EF4-FFF2-40B4-BE49-F238E27FC236}">
-                <a16:creationId xmlns:a16="http://schemas.microsoft.com/office/drawing/2014/main" id="{19CE6DDA-4DA1-4991-B19A-748C84B5DECE}"/>
-              </a:ext>
-            </a:extLst>
-          </p:cNvPr>
-          <p:cNvSpPr>
-            <a:spLocks noGrp="1"/>
-          </p:cNvSpPr>
-          <p:nvPr>
-            <p:ph type="dt" sz="quarter" idx="10"/>
-          </p:nvPr>
-        </p:nvSpPr>
-        <p:spPr bwMode="auto">
-          <a:noFill/>
-          <a:extLst>
-            <a:ext uri="{909E8E84-426E-40DD-AFC4-6F175D3DCCD1}">
-              <a14:hiddenFill xmlns:a14="http://schemas.microsoft.com/office/drawing/2010/main">
-                <a:solidFill>
-                  <a:srgbClr val="FFFFFF"/>
-                </a:solidFill>
-              </a14:hiddenFill>
-            </a:ext>
-            <a:ext uri="{91240B29-F687-4F45-9708-019B960494DF}">
-              <a14:hiddenLine xmlns:a14="http://schemas.microsoft.com/office/drawing/2010/main" w="9525">
-                <a:solidFill>
-                  <a:srgbClr val="000000"/>
-                </a:solidFill>
-                <a:miter lim="800000"/>
-                <a:headEnd/>
-                <a:tailEnd/>
-              </a14:hiddenLine>
-            </a:ext>
-          </a:extLst>
-        </p:spPr>
-        <p:txBody>
-          <a:bodyPr wrap="square" numCol="1" anchorCtr="0" compatLnSpc="1">
-            <a:prstTxWarp prst="textNoShape">
-              <a:avLst/>
-            </a:prstTxWarp>
-          </a:bodyPr>
-          <a:lstStyle>
-            <a:lvl1pPr>
-              <a:defRPr>
-                <a:solidFill>
-                  <a:schemeClr val="tx1"/>
-                </a:solidFill>
-                <a:latin typeface="Arial" panose="020B0604020202020204" pitchFamily="34" charset="0"/>
-              </a:defRPr>
-            </a:lvl1pPr>
-            <a:lvl2pPr marL="742950" indent="-285750">
-              <a:defRPr>
-                <a:solidFill>
-                  <a:schemeClr val="tx1"/>
-                </a:solidFill>
-                <a:latin typeface="Arial" panose="020B0604020202020204" pitchFamily="34" charset="0"/>
-              </a:defRPr>
-            </a:lvl2pPr>
-            <a:lvl3pPr marL="1143000" indent="-228600">
-              <a:defRPr>
-                <a:solidFill>
-                  <a:schemeClr val="tx1"/>
-                </a:solidFill>
-                <a:latin typeface="Arial" panose="020B0604020202020204" pitchFamily="34" charset="0"/>
-              </a:defRPr>
-            </a:lvl3pPr>
-            <a:lvl4pPr marL="1600200" indent="-228600">
-              <a:defRPr>
-                <a:solidFill>
-                  <a:schemeClr val="tx1"/>
-                </a:solidFill>
-                <a:latin typeface="Arial" panose="020B0604020202020204" pitchFamily="34" charset="0"/>
-              </a:defRPr>
-            </a:lvl4pPr>
-            <a:lvl5pPr marL="2057400" indent="-228600">
-              <a:defRPr>
-                <a:solidFill>
-                  <a:schemeClr val="tx1"/>
-                </a:solidFill>
-                <a:latin typeface="Arial" panose="020B0604020202020204" pitchFamily="34" charset="0"/>
-              </a:defRPr>
-            </a:lvl5pPr>
-            <a:lvl6pPr marL="2514600" indent="-228600" eaLnBrk="0" fontAlgn="base" hangingPunct="0">
-              <a:spcBef>
-                <a:spcPct val="0"/>
-              </a:spcBef>
-              <a:spcAft>
-                <a:spcPct val="0"/>
-              </a:spcAft>
-              <a:defRPr>
-                <a:solidFill>
-                  <a:schemeClr val="tx1"/>
-                </a:solidFill>
-                <a:latin typeface="Arial" panose="020B0604020202020204" pitchFamily="34" charset="0"/>
-              </a:defRPr>
-            </a:lvl6pPr>
-            <a:lvl7pPr marL="2971800" indent="-228600" eaLnBrk="0" fontAlgn="base" hangingPunct="0">
-              <a:spcBef>
-                <a:spcPct val="0"/>
-              </a:spcBef>
-              <a:spcAft>
-                <a:spcPct val="0"/>
-              </a:spcAft>
-              <a:defRPr>
-                <a:solidFill>
-                  <a:schemeClr val="tx1"/>
-                </a:solidFill>
-                <a:latin typeface="Arial" panose="020B0604020202020204" pitchFamily="34" charset="0"/>
-              </a:defRPr>
-            </a:lvl7pPr>
-            <a:lvl8pPr marL="3429000" indent="-228600" eaLnBrk="0" fontAlgn="base" hangingPunct="0">
-              <a:spcBef>
-                <a:spcPct val="0"/>
-              </a:spcBef>
-              <a:spcAft>
-                <a:spcPct val="0"/>
-              </a:spcAft>
-              <a:defRPr>
-                <a:solidFill>
-                  <a:schemeClr val="tx1"/>
-                </a:solidFill>
-                <a:latin typeface="Arial" panose="020B0604020202020204" pitchFamily="34" charset="0"/>
-              </a:defRPr>
-            </a:lvl8pPr>
-            <a:lvl9pPr marL="3886200" indent="-228600" eaLnBrk="0" fontAlgn="base" hangingPunct="0">
-              <a:spcBef>
-                <a:spcPct val="0"/>
-              </a:spcBef>
-              <a:spcAft>
-                <a:spcPct val="0"/>
-              </a:spcAft>
-              <a:defRPr>
-                <a:solidFill>
-                  <a:schemeClr val="tx1"/>
-                </a:solidFill>
-                <a:latin typeface="Arial" panose="020B0604020202020204" pitchFamily="34" charset="0"/>
-              </a:defRPr>
-            </a:lvl9pPr>
-          </a:lstStyle>
-          <a:p>
-            <a:r>
-              <a:rPr lang="en-US" altLang="en-US" dirty="0"/>
-              <a:t>8/15/2024</a:t>
-            </a:r>
-          </a:p>
-        </p:txBody>
-      </p:sp>
-      <p:sp>
-        <p:nvSpPr>
-          <p:cNvPr id="119813" name="Footer Placeholder 9">
-            <a:extLst>
-              <a:ext uri="{FF2B5EF4-FFF2-40B4-BE49-F238E27FC236}">
-                <a16:creationId xmlns:a16="http://schemas.microsoft.com/office/drawing/2014/main" id="{CDB2C065-CDC1-4F10-BBFE-6D06DB87F5F4}"/>
-              </a:ext>
-            </a:extLst>
-          </p:cNvPr>
-          <p:cNvSpPr>
-            <a:spLocks noGrp="1"/>
-          </p:cNvSpPr>
-          <p:nvPr>
-            <p:ph type="ftr" sz="quarter" idx="11"/>
-          </p:nvPr>
-        </p:nvSpPr>
-        <p:spPr bwMode="auto">
-          <a:noFill/>
-          <a:extLst>
-            <a:ext uri="{909E8E84-426E-40DD-AFC4-6F175D3DCCD1}">
-              <a14:hiddenFill xmlns:a14="http://schemas.microsoft.com/office/drawing/2010/main">
-                <a:solidFill>
-                  <a:srgbClr val="FFFFFF"/>
-                </a:solidFill>
-              </a14:hiddenFill>
-            </a:ext>
-            <a:ext uri="{91240B29-F687-4F45-9708-019B960494DF}">
-              <a14:hiddenLine xmlns:a14="http://schemas.microsoft.com/office/drawing/2010/main" w="9525">
-                <a:solidFill>
-                  <a:srgbClr val="000000"/>
-                </a:solidFill>
-                <a:miter lim="800000"/>
-                <a:headEnd/>
-                <a:tailEnd/>
-              </a14:hiddenLine>
-            </a:ext>
-          </a:extLst>
-        </p:spPr>
-        <p:txBody>
-          <a:bodyPr wrap="square" numCol="1" anchorCtr="0" compatLnSpc="1">
-            <a:prstTxWarp prst="textNoShape">
-              <a:avLst/>
-            </a:prstTxWarp>
-          </a:bodyPr>
-          <a:lstStyle>
-            <a:lvl1pPr>
-              <a:defRPr>
-                <a:solidFill>
-                  <a:schemeClr val="tx1"/>
-                </a:solidFill>
-                <a:latin typeface="Arial" panose="020B0604020202020204" pitchFamily="34" charset="0"/>
-              </a:defRPr>
-            </a:lvl1pPr>
-            <a:lvl2pPr marL="742950" indent="-285750">
-              <a:defRPr>
-                <a:solidFill>
-                  <a:schemeClr val="tx1"/>
-                </a:solidFill>
-                <a:latin typeface="Arial" panose="020B0604020202020204" pitchFamily="34" charset="0"/>
-              </a:defRPr>
-            </a:lvl2pPr>
-            <a:lvl3pPr marL="1143000" indent="-228600">
-              <a:defRPr>
-                <a:solidFill>
-                  <a:schemeClr val="tx1"/>
-                </a:solidFill>
-                <a:latin typeface="Arial" panose="020B0604020202020204" pitchFamily="34" charset="0"/>
-              </a:defRPr>
-            </a:lvl3pPr>
-            <a:lvl4pPr marL="1600200" indent="-228600">
-              <a:defRPr>
-                <a:solidFill>
-                  <a:schemeClr val="tx1"/>
-                </a:solidFill>
-                <a:latin typeface="Arial" panose="020B0604020202020204" pitchFamily="34" charset="0"/>
-              </a:defRPr>
-            </a:lvl4pPr>
-            <a:lvl5pPr marL="2057400" indent="-228600">
-              <a:defRPr>
-                <a:solidFill>
-                  <a:schemeClr val="tx1"/>
-                </a:solidFill>
-                <a:latin typeface="Arial" panose="020B0604020202020204" pitchFamily="34" charset="0"/>
-              </a:defRPr>
-            </a:lvl5pPr>
-            <a:lvl6pPr marL="2514600" indent="-228600" eaLnBrk="0" fontAlgn="base" hangingPunct="0">
-              <a:spcBef>
-                <a:spcPct val="0"/>
-              </a:spcBef>
-              <a:spcAft>
-                <a:spcPct val="0"/>
-              </a:spcAft>
-              <a:defRPr>
-                <a:solidFill>
-                  <a:schemeClr val="tx1"/>
-                </a:solidFill>
-                <a:latin typeface="Arial" panose="020B0604020202020204" pitchFamily="34" charset="0"/>
-              </a:defRPr>
-            </a:lvl6pPr>
-            <a:lvl7pPr marL="2971800" indent="-228600" eaLnBrk="0" fontAlgn="base" hangingPunct="0">
-              <a:spcBef>
-                <a:spcPct val="0"/>
-              </a:spcBef>
-              <a:spcAft>
-                <a:spcPct val="0"/>
-              </a:spcAft>
-              <a:defRPr>
-                <a:solidFill>
-                  <a:schemeClr val="tx1"/>
-                </a:solidFill>
-                <a:latin typeface="Arial" panose="020B0604020202020204" pitchFamily="34" charset="0"/>
-              </a:defRPr>
-            </a:lvl7pPr>
-            <a:lvl8pPr marL="3429000" indent="-228600" eaLnBrk="0" fontAlgn="base" hangingPunct="0">
-              <a:spcBef>
-                <a:spcPct val="0"/>
-              </a:spcBef>
-              <a:spcAft>
-                <a:spcPct val="0"/>
-              </a:spcAft>
-              <a:defRPr>
-                <a:solidFill>
-                  <a:schemeClr val="tx1"/>
-                </a:solidFill>
-                <a:latin typeface="Arial" panose="020B0604020202020204" pitchFamily="34" charset="0"/>
-              </a:defRPr>
-            </a:lvl8pPr>
-            <a:lvl9pPr marL="3886200" indent="-228600" eaLnBrk="0" fontAlgn="base" hangingPunct="0">
-              <a:spcBef>
-                <a:spcPct val="0"/>
-              </a:spcBef>
-              <a:spcAft>
-                <a:spcPct val="0"/>
-              </a:spcAft>
-              <a:defRPr>
-                <a:solidFill>
-                  <a:schemeClr val="tx1"/>
-                </a:solidFill>
-                <a:latin typeface="Arial" panose="020B0604020202020204" pitchFamily="34" charset="0"/>
-              </a:defRPr>
-            </a:lvl9pPr>
-          </a:lstStyle>
-          <a:p>
-            <a:r>
-              <a:rPr lang="en-US" altLang="en-US" dirty="0"/>
-              <a:t>MBE 713 FALL 2024         Instructor D.J. Die</a:t>
-            </a:r>
-          </a:p>
-        </p:txBody>
-      </p:sp>
-    </p:spTree>
-  </p:cSld>
-  <p:clrMapOvr>
-    <a:masterClrMapping/>
-  </p:clrMapOvr>
-</p:sld>
-</file>
-
-<file path=ppt/slides/slide9.xml><?xml version="1.0" encoding="utf-8"?>
-<p:sld xmlns:a="http://schemas.openxmlformats.org/drawingml/2006/main" xmlns:r="http://schemas.openxmlformats.org/officeDocument/2006/relationships" xmlns:p="http://schemas.openxmlformats.org/presentationml/2006/main">
-  <p:cSld>
-    <p:spTree>
-      <p:nvGrpSpPr>
-        <p:cNvPr id="1" name=""/>
-        <p:cNvGrpSpPr/>
-        <p:nvPr/>
-      </p:nvGrpSpPr>
-      <p:grpSpPr>
-        <a:xfrm>
-          <a:off x="0" y="0"/>
-          <a:ext cx="0" cy="0"/>
-          <a:chOff x="0" y="0"/>
-          <a:chExt cx="0" cy="0"/>
-        </a:xfrm>
-      </p:grpSpPr>
-      <p:sp>
-        <p:nvSpPr>
-          <p:cNvPr id="111618" name="Rectangle 2">
-            <a:extLst>
-              <a:ext uri="{FF2B5EF4-FFF2-40B4-BE49-F238E27FC236}">
-                <a16:creationId xmlns:a16="http://schemas.microsoft.com/office/drawing/2014/main" id="{DDB703DF-67CF-42C4-8D8E-955E4D00F8EA}"/>
-              </a:ext>
-            </a:extLst>
-          </p:cNvPr>
-          <p:cNvSpPr>
-            <a:spLocks noGrp="1" noChangeArrowheads="1"/>
-          </p:cNvSpPr>
-          <p:nvPr>
-            <p:ph type="title"/>
-          </p:nvPr>
-        </p:nvSpPr>
-        <p:spPr bwMode="auto">
-          <a:noFill/>
-          <a:extLst>
-            <a:ext uri="{909E8E84-426E-40DD-AFC4-6F175D3DCCD1}">
-              <a14:hiddenFill xmlns:a14="http://schemas.microsoft.com/office/drawing/2010/main">
-                <a:solidFill>
-                  <a:srgbClr val="FFFFFF"/>
-                </a:solidFill>
-              </a14:hiddenFill>
-            </a:ext>
-            <a:ext uri="{91240B29-F687-4F45-9708-019B960494DF}">
-              <a14:hiddenLine xmlns:a14="http://schemas.microsoft.com/office/drawing/2010/main" w="9525">
-                <a:solidFill>
-                  <a:srgbClr val="000000"/>
-                </a:solidFill>
-                <a:miter lim="800000"/>
-                <a:headEnd/>
-                <a:tailEnd/>
-              </a14:hiddenLine>
-            </a:ext>
-          </a:extLst>
-        </p:spPr>
-        <p:txBody>
-          <a:bodyPr vert="horz" wrap="square" lIns="91440" tIns="45720" rIns="91440" bIns="45720" numCol="1" anchor="t" anchorCtr="0" compatLnSpc="1">
-            <a:prstTxWarp prst="textNoShape">
-              <a:avLst/>
-            </a:prstTxWarp>
-          </a:bodyPr>
-          <a:lstStyle/>
-          <a:p>
-            <a:pPr eaLnBrk="1" hangingPunct="1"/>
-            <a:r>
-              <a:rPr lang="en-US" altLang="en-US" b="1" dirty="0"/>
-              <a:t>The analytical solution</a:t>
-            </a:r>
-          </a:p>
-        </p:txBody>
-      </p:sp>
-      <mc:AlternateContent xmlns:mc="http://schemas.openxmlformats.org/markup-compatibility/2006" xmlns:a14="http://schemas.microsoft.com/office/drawing/2010/main">
-        <mc:Choice Requires="a14">
-          <p:sp>
-            <p:nvSpPr>
-              <p:cNvPr id="111619" name="Object 3">
-                <a:extLst>
-                  <a:ext uri="{FF2B5EF4-FFF2-40B4-BE49-F238E27FC236}">
-                    <a16:creationId xmlns:a16="http://schemas.microsoft.com/office/drawing/2014/main" id="{49B706E0-0423-4E28-8245-B27AF33E4E5B}"/>
-                  </a:ext>
-                </a:extLst>
-              </p:cNvPr>
-              <p:cNvSpPr txBox="1">
-                <a:spLocks noGrp="1"/>
-              </p:cNvSpPr>
-              <p:nvPr>
-                <p:ph idx="1"/>
-              </p:nvPr>
-            </p:nvSpPr>
-            <p:spPr bwMode="auto">
-              <a:xfrm>
-                <a:off x="457200" y="914400"/>
-                <a:ext cx="8229600" cy="4779963"/>
-              </a:xfrm>
-              <a:prstGeom prst="rect">
-                <a:avLst/>
-              </a:prstGeom>
-              <a:noFill/>
-              <a:ln>
-                <a:noFill/>
-              </a:ln>
-              <a:effectLst/>
-            </p:spPr>
-            <p:txBody>
-              <a:bodyPr>
-                <a:noAutofit/>
-              </a:bodyPr>
-              <a:lstStyle/>
-              <a:p>
-                <a:pPr>
-                  <a:buNone/>
-                </a:pPr>
-                <a14:m>
-                  <m:oMathPara xmlns:m="http://schemas.openxmlformats.org/officeDocument/2006/math">
-                    <m:oMathParaPr>
-                      <m:jc m:val="left"/>
-                    </m:oMathParaPr>
-                    <m:oMath xmlns:m="http://schemas.openxmlformats.org/officeDocument/2006/math">
-                      <m:r>
-                        <a:rPr lang="en-US" sz="3200" i="0">
-                          <a:solidFill>
-                            <a:srgbClr val="000000"/>
-                          </a:solidFill>
-                          <a:latin typeface="Cambria Math" panose="02040503050406030204" pitchFamily="18" charset="0"/>
-                        </a:rPr>
-                        <m:t> </m:t>
-                      </m:r>
-                      <m:f>
-                        <m:fPr>
-                          <m:ctrlPr>
-                            <a:rPr lang="en-US" sz="3200" i="1">
-                              <a:solidFill>
-                                <a:srgbClr val="000000"/>
-                              </a:solidFill>
-                              <a:latin typeface="Cambria Math" panose="02040503050406030204" pitchFamily="18" charset="0"/>
-                            </a:rPr>
-                          </m:ctrlPr>
-                        </m:fPr>
-                        <m:num>
-                          <m:r>
-                            <a:rPr lang="en-US" sz="3200" i="1">
-                              <a:solidFill>
-                                <a:srgbClr val="000000"/>
-                              </a:solidFill>
-                              <a:latin typeface="Cambria Math" panose="02040503050406030204" pitchFamily="18" charset="0"/>
-                            </a:rPr>
-                            <m:t>𝑑𝑁</m:t>
-                          </m:r>
-                        </m:num>
-                        <m:den>
-                          <m:r>
-                            <a:rPr lang="en-US" sz="3200" i="1">
-                              <a:solidFill>
-                                <a:srgbClr val="000000"/>
-                              </a:solidFill>
-                              <a:latin typeface="Cambria Math" panose="02040503050406030204" pitchFamily="18" charset="0"/>
-                            </a:rPr>
-                            <m:t>𝑑𝑡</m:t>
-                          </m:r>
-                        </m:den>
-                      </m:f>
-                      <m:r>
-                        <a:rPr lang="en-US" sz="3200" i="1">
-                          <a:solidFill>
-                            <a:srgbClr val="000000"/>
-                          </a:solidFill>
-                          <a:latin typeface="Cambria Math" panose="02040503050406030204" pitchFamily="18" charset="0"/>
-                        </a:rPr>
-                        <m:t>=</m:t>
-                      </m:r>
-                      <m:r>
-                        <a:rPr lang="en-US" sz="3200" i="1">
-                          <a:solidFill>
-                            <a:srgbClr val="000000"/>
-                          </a:solidFill>
-                          <a:latin typeface="Cambria Math" panose="02040503050406030204" pitchFamily="18" charset="0"/>
-                        </a:rPr>
-                        <m:t>𝑟</m:t>
-                      </m:r>
-                      <m:r>
-                        <a:rPr lang="en-US" sz="3200" i="1">
-                          <a:solidFill>
-                            <a:srgbClr val="000000"/>
-                          </a:solidFill>
-                          <a:latin typeface="Cambria Math" panose="02040503050406030204" pitchFamily="18" charset="0"/>
-                        </a:rPr>
-                        <m:t> </m:t>
-                      </m:r>
-                      <m:r>
-                        <a:rPr lang="en-US" sz="3200" i="1">
-                          <a:solidFill>
-                            <a:srgbClr val="000000"/>
-                          </a:solidFill>
-                          <a:latin typeface="Cambria Math" panose="02040503050406030204" pitchFamily="18" charset="0"/>
-                        </a:rPr>
-                        <m:t>𝑁</m:t>
-                      </m:r>
-                      <m:r>
-                        <a:rPr lang="en-US" sz="3200" i="1">
-                          <a:solidFill>
-                            <a:srgbClr val="000000"/>
-                          </a:solidFill>
-                          <a:latin typeface="Cambria Math" panose="02040503050406030204" pitchFamily="18" charset="0"/>
-                        </a:rPr>
-                        <m:t>      </m:t>
-                      </m:r>
-                      <m:nary>
-                        <m:naryPr>
-                          <m:limLoc m:val="undOvr"/>
-                          <m:ctrlPr>
-                            <a:rPr lang="en-US" sz="3200" i="1">
-                              <a:solidFill>
-                                <a:srgbClr val="000000"/>
-                              </a:solidFill>
-                              <a:latin typeface="Cambria Math" panose="02040503050406030204" pitchFamily="18" charset="0"/>
-                            </a:rPr>
-                          </m:ctrlPr>
-                        </m:naryPr>
-                        <m:sub>
-                          <m:r>
-                            <a:rPr lang="en-US" sz="3200" i="1">
-                              <a:solidFill>
-                                <a:srgbClr val="000000"/>
-                              </a:solidFill>
-                              <a:latin typeface="Cambria Math" panose="02040503050406030204" pitchFamily="18" charset="0"/>
-                            </a:rPr>
-                            <m:t>𝑁𝑜</m:t>
-                          </m:r>
-                        </m:sub>
-                        <m:sup>
-                          <m:r>
-                            <a:rPr lang="en-US" sz="3200" i="1">
-                              <a:solidFill>
-                                <a:srgbClr val="000000"/>
-                              </a:solidFill>
-                              <a:latin typeface="Cambria Math" panose="02040503050406030204" pitchFamily="18" charset="0"/>
-                            </a:rPr>
-                            <m:t>𝑁𝑡</m:t>
-                          </m:r>
-                        </m:sup>
-                        <m:e>
-                          <m:f>
-                            <m:fPr>
-                              <m:ctrlPr>
-                                <a:rPr lang="en-US" sz="3200" i="1">
-                                  <a:solidFill>
-                                    <a:srgbClr val="000000"/>
-                                  </a:solidFill>
-                                  <a:latin typeface="Cambria Math" panose="02040503050406030204" pitchFamily="18" charset="0"/>
-                                </a:rPr>
-                              </m:ctrlPr>
-                            </m:fPr>
-                            <m:num>
-                              <m:r>
-                                <a:rPr lang="en-US" sz="3200" i="1">
-                                  <a:solidFill>
-                                    <a:srgbClr val="000000"/>
-                                  </a:solidFill>
-                                  <a:latin typeface="Cambria Math" panose="02040503050406030204" pitchFamily="18" charset="0"/>
-                                </a:rPr>
-                                <m:t>1</m:t>
-                              </m:r>
-                            </m:num>
-                            <m:den>
-                              <m:r>
-                                <a:rPr lang="en-US" sz="3200" i="1">
-                                  <a:solidFill>
-                                    <a:srgbClr val="000000"/>
-                                  </a:solidFill>
-                                  <a:latin typeface="Cambria Math" panose="02040503050406030204" pitchFamily="18" charset="0"/>
-                                </a:rPr>
-                                <m:t>𝑁</m:t>
-                              </m:r>
-                            </m:den>
-                          </m:f>
-                        </m:e>
-                      </m:nary>
-                      <m:r>
-                        <a:rPr lang="en-US" sz="3200" i="1">
-                          <a:solidFill>
-                            <a:srgbClr val="000000"/>
-                          </a:solidFill>
-                          <a:latin typeface="Cambria Math" panose="02040503050406030204" pitchFamily="18" charset="0"/>
-                        </a:rPr>
-                        <m:t>𝑑𝑁</m:t>
-                      </m:r>
-                      <m:r>
-                        <a:rPr lang="en-US" sz="3200" i="1">
-                          <a:solidFill>
-                            <a:srgbClr val="000000"/>
-                          </a:solidFill>
-                          <a:latin typeface="Cambria Math" panose="02040503050406030204" pitchFamily="18" charset="0"/>
-                        </a:rPr>
-                        <m:t>=</m:t>
-                      </m:r>
-                      <m:nary>
-                        <m:naryPr>
-                          <m:limLoc m:val="undOvr"/>
-                          <m:ctrlPr>
-                            <a:rPr lang="en-US" sz="3200" i="1">
-                              <a:solidFill>
-                                <a:srgbClr val="000000"/>
-                              </a:solidFill>
-                              <a:latin typeface="Cambria Math" panose="02040503050406030204" pitchFamily="18" charset="0"/>
-                            </a:rPr>
-                          </m:ctrlPr>
-                        </m:naryPr>
-                        <m:sub/>
-                        <m:sup/>
-                        <m:e>
-                          <m:r>
-                            <a:rPr lang="en-US" sz="3200" i="1">
-                              <a:solidFill>
-                                <a:srgbClr val="000000"/>
-                              </a:solidFill>
-                              <a:latin typeface="Cambria Math" panose="02040503050406030204" pitchFamily="18" charset="0"/>
-                            </a:rPr>
-                            <m:t>𝑟</m:t>
-                          </m:r>
-                          <m:r>
-                            <a:rPr lang="en-US" sz="3200" i="1">
-                              <a:solidFill>
-                                <a:srgbClr val="000000"/>
-                              </a:solidFill>
-                              <a:latin typeface="Cambria Math" panose="02040503050406030204" pitchFamily="18" charset="0"/>
-                            </a:rPr>
-                            <m:t> </m:t>
-                          </m:r>
-                          <m:r>
-                            <a:rPr lang="en-US" sz="3200" i="1">
-                              <a:solidFill>
-                                <a:srgbClr val="000000"/>
-                              </a:solidFill>
-                              <a:latin typeface="Cambria Math" panose="02040503050406030204" pitchFamily="18" charset="0"/>
-                            </a:rPr>
-                            <m:t>𝑑𝑡</m:t>
-                          </m:r>
-                        </m:e>
-                      </m:nary>
-                    </m:oMath>
-                  </m:oMathPara>
-                </a14:m>
-                <a:br>
-                  <a:rPr lang="en-US" sz="3200" i="1" dirty="0">
-                    <a:solidFill>
-                      <a:srgbClr val="000000"/>
-                    </a:solidFill>
-                    <a:latin typeface="Cambria Math" panose="02040503050406030204" pitchFamily="18" charset="0"/>
-                  </a:rPr>
-                </a:br>
-                <a:br>
-                  <a:rPr lang="en-US" sz="3200" i="1" dirty="0">
-                    <a:solidFill>
-                      <a:srgbClr val="000000"/>
-                    </a:solidFill>
-                    <a:latin typeface="Cambria Math" panose="02040503050406030204" pitchFamily="18" charset="0"/>
-                  </a:rPr>
-                </a:br>
-                <a14:m>
-                  <m:oMathPara xmlns:m="http://schemas.openxmlformats.org/officeDocument/2006/math">
-                    <m:oMathParaPr>
-                      <m:jc m:val="left"/>
-                    </m:oMathParaPr>
-                    <m:oMath xmlns:m="http://schemas.openxmlformats.org/officeDocument/2006/math">
-                      <m:r>
-                        <a:rPr lang="en-US" sz="3200" i="1">
-                          <a:solidFill>
-                            <a:srgbClr val="000000"/>
-                          </a:solidFill>
-                          <a:latin typeface="Cambria Math" panose="02040503050406030204" pitchFamily="18" charset="0"/>
-                        </a:rPr>
-                        <m:t>𝐿𝑛</m:t>
-                      </m:r>
-                      <m:sSub>
-                        <m:sSubPr>
-                          <m:ctrlPr>
-                            <a:rPr lang="en-US" sz="3200" i="1">
-                              <a:solidFill>
-                                <a:srgbClr val="000000"/>
-                              </a:solidFill>
-                              <a:latin typeface="Cambria Math" panose="02040503050406030204" pitchFamily="18" charset="0"/>
-                            </a:rPr>
-                          </m:ctrlPr>
-                        </m:sSubPr>
-                        <m:e>
-                          <m:r>
-                            <a:rPr lang="en-US" sz="3200" i="1">
-                              <a:solidFill>
-                                <a:srgbClr val="000000"/>
-                              </a:solidFill>
-                              <a:latin typeface="Cambria Math" panose="02040503050406030204" pitchFamily="18" charset="0"/>
-                            </a:rPr>
-                            <m:t>𝑁</m:t>
-                          </m:r>
-                        </m:e>
-                        <m:sub>
-                          <m:r>
-                            <a:rPr lang="en-US" sz="3200" i="1">
-                              <a:solidFill>
-                                <a:srgbClr val="000000"/>
-                              </a:solidFill>
-                              <a:latin typeface="Cambria Math" panose="02040503050406030204" pitchFamily="18" charset="0"/>
-                            </a:rPr>
-                            <m:t>𝑡</m:t>
-                          </m:r>
-                        </m:sub>
-                      </m:sSub>
-                      <m:r>
-                        <a:rPr lang="en-US" sz="3200" i="1">
-                          <a:solidFill>
-                            <a:srgbClr val="000000"/>
-                          </a:solidFill>
-                          <a:latin typeface="Cambria Math" panose="02040503050406030204" pitchFamily="18" charset="0"/>
-                        </a:rPr>
-                        <m:t>−</m:t>
-                      </m:r>
-                      <m:r>
-                        <a:rPr lang="en-US" sz="3200" i="1">
-                          <a:solidFill>
-                            <a:srgbClr val="000000"/>
-                          </a:solidFill>
-                          <a:latin typeface="Cambria Math" panose="02040503050406030204" pitchFamily="18" charset="0"/>
-                        </a:rPr>
-                        <m:t>𝐿𝑛</m:t>
-                      </m:r>
-                      <m:sSub>
-                        <m:sSubPr>
-                          <m:ctrlPr>
-                            <a:rPr lang="en-US" sz="3200" i="1">
-                              <a:solidFill>
-                                <a:srgbClr val="000000"/>
-                              </a:solidFill>
-                              <a:latin typeface="Cambria Math" panose="02040503050406030204" pitchFamily="18" charset="0"/>
-                            </a:rPr>
-                          </m:ctrlPr>
-                        </m:sSubPr>
-                        <m:e>
-                          <m:r>
-                            <a:rPr lang="en-US" sz="3200" i="1">
-                              <a:solidFill>
-                                <a:srgbClr val="000000"/>
-                              </a:solidFill>
-                              <a:latin typeface="Cambria Math" panose="02040503050406030204" pitchFamily="18" charset="0"/>
-                            </a:rPr>
-                            <m:t>𝑁</m:t>
-                          </m:r>
-                        </m:e>
-                        <m:sub>
-                          <m:r>
-                            <a:rPr lang="en-US" sz="3200" i="1">
-                              <a:solidFill>
-                                <a:srgbClr val="000000"/>
-                              </a:solidFill>
-                              <a:latin typeface="Cambria Math" panose="02040503050406030204" pitchFamily="18" charset="0"/>
-                            </a:rPr>
-                            <m:t>0</m:t>
-                          </m:r>
-                        </m:sub>
-                      </m:sSub>
-                      <m:r>
-                        <a:rPr lang="en-US" sz="3200" i="1">
-                          <a:solidFill>
-                            <a:srgbClr val="000000"/>
-                          </a:solidFill>
-                          <a:latin typeface="Cambria Math" panose="02040503050406030204" pitchFamily="18" charset="0"/>
-                        </a:rPr>
-                        <m:t> = </m:t>
-                      </m:r>
-                      <m:r>
-                        <a:rPr lang="en-US" sz="3200" i="1">
-                          <a:solidFill>
-                            <a:srgbClr val="000000"/>
-                          </a:solidFill>
-                          <a:latin typeface="Cambria Math" panose="02040503050406030204" pitchFamily="18" charset="0"/>
-                        </a:rPr>
-                        <m:t>𝑟𝑡</m:t>
-                      </m:r>
-                      <m:r>
-                        <a:rPr lang="en-US" sz="3200" i="1">
-                          <a:solidFill>
-                            <a:srgbClr val="000000"/>
-                          </a:solidFill>
-                          <a:latin typeface="Cambria Math" panose="02040503050406030204" pitchFamily="18" charset="0"/>
-                        </a:rPr>
-                        <m:t> =</m:t>
-                      </m:r>
-                      <m:r>
-                        <a:rPr lang="en-US" sz="3200" i="1">
-                          <a:solidFill>
-                            <a:srgbClr val="000000"/>
-                          </a:solidFill>
-                          <a:latin typeface="Cambria Math" panose="02040503050406030204" pitchFamily="18" charset="0"/>
-                        </a:rPr>
-                        <m:t>𝐿𝑛</m:t>
-                      </m:r>
-                      <m:f>
-                        <m:fPr>
-                          <m:ctrlPr>
-                            <a:rPr lang="en-US" sz="3200" i="1">
-                              <a:solidFill>
-                                <a:srgbClr val="000000"/>
-                              </a:solidFill>
-                              <a:latin typeface="Cambria Math" panose="02040503050406030204" pitchFamily="18" charset="0"/>
-                            </a:rPr>
-                          </m:ctrlPr>
-                        </m:fPr>
-                        <m:num>
-                          <m:sSub>
-                            <m:sSubPr>
-                              <m:ctrlPr>
-                                <a:rPr lang="en-US" sz="3200" i="1">
-                                  <a:solidFill>
-                                    <a:srgbClr val="000000"/>
-                                  </a:solidFill>
-                                  <a:latin typeface="Cambria Math" panose="02040503050406030204" pitchFamily="18" charset="0"/>
-                                </a:rPr>
-                              </m:ctrlPr>
-                            </m:sSubPr>
-                            <m:e>
-                              <m:r>
-                                <a:rPr lang="en-US" sz="3200" i="1">
-                                  <a:solidFill>
-                                    <a:srgbClr val="000000"/>
-                                  </a:solidFill>
-                                  <a:latin typeface="Cambria Math" panose="02040503050406030204" pitchFamily="18" charset="0"/>
-                                </a:rPr>
-                                <m:t>𝑁</m:t>
-                              </m:r>
-                            </m:e>
-                            <m:sub>
-                              <m:r>
-                                <a:rPr lang="en-US" sz="3200" i="1">
-                                  <a:solidFill>
-                                    <a:srgbClr val="000000"/>
-                                  </a:solidFill>
-                                  <a:latin typeface="Cambria Math" panose="02040503050406030204" pitchFamily="18" charset="0"/>
-                                </a:rPr>
-                                <m:t>𝑡</m:t>
-                              </m:r>
-                            </m:sub>
-                          </m:sSub>
-                        </m:num>
-                        <m:den>
-                          <m:sSub>
-                            <m:sSubPr>
-                              <m:ctrlPr>
-                                <a:rPr lang="en-US" sz="3200" i="1">
-                                  <a:solidFill>
-                                    <a:srgbClr val="000000"/>
-                                  </a:solidFill>
-                                  <a:latin typeface="Cambria Math" panose="02040503050406030204" pitchFamily="18" charset="0"/>
-                                </a:rPr>
-                              </m:ctrlPr>
-                            </m:sSubPr>
-                            <m:e>
-                              <m:r>
-                                <a:rPr lang="en-US" sz="3200" i="1">
-                                  <a:solidFill>
-                                    <a:srgbClr val="000000"/>
-                                  </a:solidFill>
-                                  <a:latin typeface="Cambria Math" panose="02040503050406030204" pitchFamily="18" charset="0"/>
-                                </a:rPr>
-                                <m:t>𝑁</m:t>
-                              </m:r>
-                            </m:e>
-                            <m:sub>
-                              <m:r>
-                                <a:rPr lang="en-US" sz="3200" i="1">
-                                  <a:solidFill>
-                                    <a:srgbClr val="000000"/>
-                                  </a:solidFill>
-                                  <a:latin typeface="Cambria Math" panose="02040503050406030204" pitchFamily="18" charset="0"/>
-                                </a:rPr>
-                                <m:t>0</m:t>
-                              </m:r>
-                            </m:sub>
-                          </m:sSub>
-                        </m:den>
-                      </m:f>
-                    </m:oMath>
-                  </m:oMathPara>
-                </a14:m>
-                <a:br>
-                  <a:rPr lang="en-US" sz="3200" i="1" dirty="0">
-                    <a:solidFill>
-                      <a:srgbClr val="000000"/>
-                    </a:solidFill>
-                    <a:latin typeface="Cambria Math" panose="02040503050406030204" pitchFamily="18" charset="0"/>
-                  </a:rPr>
-                </a:br>
-                <a:br>
-                  <a:rPr lang="en-US" sz="3200" i="1" dirty="0">
-                    <a:solidFill>
-                      <a:srgbClr val="000000"/>
-                    </a:solidFill>
-                    <a:latin typeface="Cambria Math" panose="02040503050406030204" pitchFamily="18" charset="0"/>
-                  </a:rPr>
-                </a:br>
-                <a14:m>
-                  <m:oMathPara xmlns:m="http://schemas.openxmlformats.org/officeDocument/2006/math">
-                    <m:oMathParaPr>
-                      <m:jc m:val="left"/>
-                    </m:oMathParaPr>
-                    <m:oMath xmlns:m="http://schemas.openxmlformats.org/officeDocument/2006/math">
-                      <m:f>
-                        <m:fPr>
-                          <m:ctrlPr>
-                            <a:rPr lang="en-US" sz="3200" i="1">
-                              <a:solidFill>
-                                <a:srgbClr val="000000"/>
-                              </a:solidFill>
-                              <a:latin typeface="Cambria Math" panose="02040503050406030204" pitchFamily="18" charset="0"/>
-                            </a:rPr>
-                          </m:ctrlPr>
-                        </m:fPr>
-                        <m:num>
-                          <m:sSub>
-                            <m:sSubPr>
-                              <m:ctrlPr>
-                                <a:rPr lang="en-US" sz="3200" i="1">
-                                  <a:solidFill>
-                                    <a:srgbClr val="000000"/>
-                                  </a:solidFill>
-                                  <a:latin typeface="Cambria Math" panose="02040503050406030204" pitchFamily="18" charset="0"/>
-                                </a:rPr>
-                              </m:ctrlPr>
-                            </m:sSubPr>
-                            <m:e>
-                              <m:r>
-                                <a:rPr lang="en-US" sz="3200" i="1">
-                                  <a:solidFill>
-                                    <a:srgbClr val="000000"/>
-                                  </a:solidFill>
-                                  <a:latin typeface="Cambria Math" panose="02040503050406030204" pitchFamily="18" charset="0"/>
-                                </a:rPr>
-                                <m:t>𝑁</m:t>
-                              </m:r>
-                            </m:e>
-                            <m:sub>
-                              <m:r>
-                                <a:rPr lang="en-US" sz="3200" i="1">
-                                  <a:solidFill>
-                                    <a:srgbClr val="000000"/>
-                                  </a:solidFill>
-                                  <a:latin typeface="Cambria Math" panose="02040503050406030204" pitchFamily="18" charset="0"/>
-                                </a:rPr>
-                                <m:t>𝑡</m:t>
-                              </m:r>
-                            </m:sub>
-                          </m:sSub>
-                        </m:num>
-                        <m:den>
-                          <m:sSub>
-                            <m:sSubPr>
-                              <m:ctrlPr>
-                                <a:rPr lang="en-US" sz="3200" i="1">
-                                  <a:solidFill>
-                                    <a:srgbClr val="000000"/>
-                                  </a:solidFill>
-                                  <a:latin typeface="Cambria Math" panose="02040503050406030204" pitchFamily="18" charset="0"/>
-                                </a:rPr>
-                              </m:ctrlPr>
-                            </m:sSubPr>
-                            <m:e>
-                              <m:r>
-                                <a:rPr lang="en-US" sz="3200" i="1">
-                                  <a:solidFill>
-                                    <a:srgbClr val="000000"/>
-                                  </a:solidFill>
-                                  <a:latin typeface="Cambria Math" panose="02040503050406030204" pitchFamily="18" charset="0"/>
-                                </a:rPr>
-                                <m:t>𝑁</m:t>
-                              </m:r>
-                            </m:e>
-                            <m:sub>
-                              <m:r>
-                                <a:rPr lang="en-US" sz="3200" i="1">
-                                  <a:solidFill>
-                                    <a:srgbClr val="000000"/>
-                                  </a:solidFill>
-                                  <a:latin typeface="Cambria Math" panose="02040503050406030204" pitchFamily="18" charset="0"/>
-                                </a:rPr>
-                                <m:t>0</m:t>
-                              </m:r>
-                            </m:sub>
-                          </m:sSub>
-                        </m:den>
-                      </m:f>
-                      <m:r>
-                        <a:rPr lang="en-US" sz="3200" i="1">
-                          <a:solidFill>
-                            <a:srgbClr val="000000"/>
-                          </a:solidFill>
-                          <a:latin typeface="Cambria Math" panose="02040503050406030204" pitchFamily="18" charset="0"/>
-                        </a:rPr>
-                        <m:t> = </m:t>
-                      </m:r>
-                      <m:sSup>
-                        <m:sSupPr>
-                          <m:ctrlPr>
-                            <a:rPr lang="en-US" sz="3200" i="1">
-                              <a:solidFill>
-                                <a:srgbClr val="000000"/>
-                              </a:solidFill>
-                              <a:latin typeface="Cambria Math" panose="02040503050406030204" pitchFamily="18" charset="0"/>
-                            </a:rPr>
-                          </m:ctrlPr>
-                        </m:sSupPr>
-                        <m:e>
-                          <m:r>
-                            <a:rPr lang="en-US" sz="3200" i="1">
-                              <a:solidFill>
-                                <a:srgbClr val="000000"/>
-                              </a:solidFill>
-                              <a:latin typeface="Cambria Math" panose="02040503050406030204" pitchFamily="18" charset="0"/>
-                            </a:rPr>
-                            <m:t>𝑒</m:t>
-                          </m:r>
-                        </m:e>
-                        <m:sup>
-                          <m:r>
-                            <a:rPr lang="en-US" sz="3200" i="1">
-                              <a:solidFill>
-                                <a:srgbClr val="000000"/>
-                              </a:solidFill>
-                              <a:latin typeface="Cambria Math" panose="02040503050406030204" pitchFamily="18" charset="0"/>
-                            </a:rPr>
-                            <m:t>𝑟𝑡</m:t>
-                          </m:r>
-                        </m:sup>
-                      </m:sSup>
-                      <m:r>
-                        <a:rPr lang="en-US" sz="3200" i="1">
-                          <a:solidFill>
-                            <a:srgbClr val="000000"/>
-                          </a:solidFill>
-                          <a:latin typeface="Cambria Math" panose="02040503050406030204" pitchFamily="18" charset="0"/>
-                        </a:rPr>
-                        <m:t>    </m:t>
-                      </m:r>
-                      <m:sSub>
-                        <m:sSubPr>
-                          <m:ctrlPr>
-                            <a:rPr lang="en-US" sz="3200" i="1">
-                              <a:solidFill>
-                                <a:srgbClr val="000000"/>
-                              </a:solidFill>
-                              <a:latin typeface="Cambria Math" panose="02040503050406030204" pitchFamily="18" charset="0"/>
-                            </a:rPr>
-                          </m:ctrlPr>
-                        </m:sSubPr>
-                        <m:e>
-                          <m:r>
-                            <a:rPr lang="en-US" sz="3200" i="1">
-                              <a:solidFill>
-                                <a:srgbClr val="000000"/>
-                              </a:solidFill>
-                              <a:latin typeface="Cambria Math" panose="02040503050406030204" pitchFamily="18" charset="0"/>
-                            </a:rPr>
-                            <m:t>𝑁</m:t>
-                          </m:r>
-                        </m:e>
-                        <m:sub>
-                          <m:r>
-                            <a:rPr lang="en-US" sz="3200" i="1">
-                              <a:solidFill>
-                                <a:srgbClr val="000000"/>
-                              </a:solidFill>
-                              <a:latin typeface="Cambria Math" panose="02040503050406030204" pitchFamily="18" charset="0"/>
-                            </a:rPr>
-                            <m:t>𝑡</m:t>
-                          </m:r>
-                        </m:sub>
-                      </m:sSub>
-                      <m:r>
-                        <a:rPr lang="en-US" sz="3200" i="1">
-                          <a:solidFill>
-                            <a:srgbClr val="000000"/>
-                          </a:solidFill>
-                          <a:latin typeface="Cambria Math" panose="02040503050406030204" pitchFamily="18" charset="0"/>
-                        </a:rPr>
-                        <m:t> = </m:t>
-                      </m:r>
-                      <m:sSub>
-                        <m:sSubPr>
-                          <m:ctrlPr>
-                            <a:rPr lang="en-US" sz="3200" i="1">
-                              <a:solidFill>
-                                <a:srgbClr val="000000"/>
-                              </a:solidFill>
-                              <a:latin typeface="Cambria Math" panose="02040503050406030204" pitchFamily="18" charset="0"/>
-                            </a:rPr>
-                          </m:ctrlPr>
-                        </m:sSubPr>
-                        <m:e>
-                          <m:r>
-                            <a:rPr lang="en-US" sz="3200" i="1">
-                              <a:solidFill>
-                                <a:srgbClr val="000000"/>
-                              </a:solidFill>
-                              <a:latin typeface="Cambria Math" panose="02040503050406030204" pitchFamily="18" charset="0"/>
-                            </a:rPr>
-                            <m:t>𝑁</m:t>
-                          </m:r>
-                        </m:e>
-                        <m:sub>
-                          <m:r>
-                            <a:rPr lang="en-US" sz="3200" i="1">
-                              <a:solidFill>
-                                <a:srgbClr val="000000"/>
-                              </a:solidFill>
-                              <a:latin typeface="Cambria Math" panose="02040503050406030204" pitchFamily="18" charset="0"/>
-                            </a:rPr>
-                            <m:t>0</m:t>
-                          </m:r>
-                        </m:sub>
-                      </m:sSub>
-                      <m:sSup>
-                        <m:sSupPr>
-                          <m:ctrlPr>
-                            <a:rPr lang="en-US" sz="3200" i="1">
-                              <a:solidFill>
-                                <a:srgbClr val="000000"/>
-                              </a:solidFill>
-                              <a:latin typeface="Cambria Math" panose="02040503050406030204" pitchFamily="18" charset="0"/>
-                            </a:rPr>
-                          </m:ctrlPr>
-                        </m:sSupPr>
-                        <m:e>
-                          <m:r>
-                            <a:rPr lang="en-US" sz="3200" i="1">
-                              <a:solidFill>
-                                <a:srgbClr val="000000"/>
-                              </a:solidFill>
-                              <a:latin typeface="Cambria Math" panose="02040503050406030204" pitchFamily="18" charset="0"/>
-                            </a:rPr>
-                            <m:t>𝑒</m:t>
-                          </m:r>
-                        </m:e>
-                        <m:sup>
-                          <m:r>
-                            <a:rPr lang="en-US" sz="3200" i="1">
-                              <a:solidFill>
-                                <a:srgbClr val="000000"/>
-                              </a:solidFill>
-                              <a:latin typeface="Cambria Math" panose="02040503050406030204" pitchFamily="18" charset="0"/>
-                            </a:rPr>
-                            <m:t>𝑟𝑡</m:t>
-                          </m:r>
-                        </m:sup>
-                      </m:sSup>
-                    </m:oMath>
-                  </m:oMathPara>
-                </a14:m>
-                <a:endParaRPr lang="en-US" sz="3200" dirty="0"/>
-              </a:p>
-            </p:txBody>
-          </p:sp>
-        </mc:Choice>
-        <mc:Fallback xmlns="">
-          <p:sp>
-            <p:nvSpPr>
-              <p:cNvPr id="111619" name="Object 3">
-                <a:extLst>
-                  <a:ext uri="{FF2B5EF4-FFF2-40B4-BE49-F238E27FC236}">
-                    <a16:creationId xmlns:a16="http://schemas.microsoft.com/office/drawing/2014/main" id="{49B706E0-0423-4E28-8245-B27AF33E4E5B}"/>
-                  </a:ext>
-                </a:extLst>
-              </p:cNvPr>
-              <p:cNvSpPr txBox="1">
-                <a:spLocks noRot="1" noChangeAspect="1" noMove="1" noResize="1" noEditPoints="1" noAdjustHandles="1" noChangeArrowheads="1" noChangeShapeType="1" noTextEdit="1"/>
-              </p:cNvSpPr>
-              <p:nvPr>
-                <p:ph idx="1"/>
-              </p:nvPr>
-            </p:nvSpPr>
-            <p:spPr bwMode="auto">
-              <a:xfrm>
-                <a:off x="457200" y="914400"/>
-                <a:ext cx="8229600" cy="4779963"/>
-              </a:xfrm>
-              <a:prstGeom prst="rect">
-                <a:avLst/>
-              </a:prstGeom>
-              <a:blipFill>
-                <a:blip r:embed="rId3"/>
-                <a:stretch>
-                  <a:fillRect/>
-                </a:stretch>
-              </a:blipFill>
-              <a:ln>
-                <a:noFill/>
-              </a:ln>
-              <a:effectLst/>
-            </p:spPr>
-            <p:txBody>
-              <a:bodyPr/>
-              <a:lstStyle/>
-              <a:p>
-                <a:r>
-                  <a:rPr lang="en-US">
-                    <a:noFill/>
-                  </a:rPr>
-                  <a:t> </a:t>
-                </a:r>
-              </a:p>
-            </p:txBody>
-          </p:sp>
-        </mc:Fallback>
-      </mc:AlternateContent>
-      <p:sp>
-        <p:nvSpPr>
-          <p:cNvPr id="111620" name="Date Placeholder 8">
-            <a:extLst>
-              <a:ext uri="{FF2B5EF4-FFF2-40B4-BE49-F238E27FC236}">
-                <a16:creationId xmlns:a16="http://schemas.microsoft.com/office/drawing/2014/main" id="{FD59AFEB-9608-4F74-8C80-677E2BD6E84C}"/>
-              </a:ext>
-            </a:extLst>
-          </p:cNvPr>
-          <p:cNvSpPr>
-            <a:spLocks noGrp="1"/>
-          </p:cNvSpPr>
-          <p:nvPr>
-            <p:ph type="dt" sz="quarter" idx="10"/>
-          </p:nvPr>
-        </p:nvSpPr>
-        <p:spPr bwMode="auto">
-          <a:noFill/>
-          <a:extLst>
-            <a:ext uri="{909E8E84-426E-40DD-AFC4-6F175D3DCCD1}">
-              <a14:hiddenFill xmlns:a14="http://schemas.microsoft.com/office/drawing/2010/main">
-                <a:solidFill>
-                  <a:srgbClr val="FFFFFF"/>
-                </a:solidFill>
-              </a14:hiddenFill>
-            </a:ext>
-            <a:ext uri="{91240B29-F687-4F45-9708-019B960494DF}">
-              <a14:hiddenLine xmlns:a14="http://schemas.microsoft.com/office/drawing/2010/main" w="9525">
-                <a:solidFill>
-                  <a:srgbClr val="000000"/>
-                </a:solidFill>
-                <a:miter lim="800000"/>
-                <a:headEnd/>
-                <a:tailEnd/>
-              </a14:hiddenLine>
-            </a:ext>
-          </a:extLst>
-        </p:spPr>
-        <p:txBody>
-          <a:bodyPr wrap="square" numCol="1" anchorCtr="0" compatLnSpc="1">
-            <a:prstTxWarp prst="textNoShape">
-              <a:avLst/>
-            </a:prstTxWarp>
-          </a:bodyPr>
-          <a:lstStyle>
-            <a:lvl1pPr>
-              <a:defRPr>
-                <a:solidFill>
-                  <a:schemeClr val="tx1"/>
-                </a:solidFill>
-                <a:latin typeface="Arial" panose="020B0604020202020204" pitchFamily="34" charset="0"/>
-              </a:defRPr>
-            </a:lvl1pPr>
-            <a:lvl2pPr marL="742950" indent="-285750">
-              <a:defRPr>
-                <a:solidFill>
-                  <a:schemeClr val="tx1"/>
-                </a:solidFill>
-                <a:latin typeface="Arial" panose="020B0604020202020204" pitchFamily="34" charset="0"/>
-              </a:defRPr>
-            </a:lvl2pPr>
-            <a:lvl3pPr marL="1143000" indent="-228600">
-              <a:defRPr>
-                <a:solidFill>
-                  <a:schemeClr val="tx1"/>
-                </a:solidFill>
-                <a:latin typeface="Arial" panose="020B0604020202020204" pitchFamily="34" charset="0"/>
-              </a:defRPr>
-            </a:lvl3pPr>
-            <a:lvl4pPr marL="1600200" indent="-228600">
-              <a:defRPr>
-                <a:solidFill>
-                  <a:schemeClr val="tx1"/>
-                </a:solidFill>
-                <a:latin typeface="Arial" panose="020B0604020202020204" pitchFamily="34" charset="0"/>
-              </a:defRPr>
-            </a:lvl4pPr>
-            <a:lvl5pPr marL="2057400" indent="-228600">
-              <a:defRPr>
-                <a:solidFill>
-                  <a:schemeClr val="tx1"/>
-                </a:solidFill>
-                <a:latin typeface="Arial" panose="020B0604020202020204" pitchFamily="34" charset="0"/>
-              </a:defRPr>
-            </a:lvl5pPr>
-            <a:lvl6pPr marL="2514600" indent="-228600" eaLnBrk="0" fontAlgn="base" hangingPunct="0">
-              <a:spcBef>
-                <a:spcPct val="0"/>
-              </a:spcBef>
-              <a:spcAft>
-                <a:spcPct val="0"/>
-              </a:spcAft>
-              <a:defRPr>
-                <a:solidFill>
-                  <a:schemeClr val="tx1"/>
-                </a:solidFill>
-                <a:latin typeface="Arial" panose="020B0604020202020204" pitchFamily="34" charset="0"/>
-              </a:defRPr>
-            </a:lvl6pPr>
-            <a:lvl7pPr marL="2971800" indent="-228600" eaLnBrk="0" fontAlgn="base" hangingPunct="0">
-              <a:spcBef>
-                <a:spcPct val="0"/>
-              </a:spcBef>
-              <a:spcAft>
-                <a:spcPct val="0"/>
-              </a:spcAft>
-              <a:defRPr>
-                <a:solidFill>
-                  <a:schemeClr val="tx1"/>
-                </a:solidFill>
-                <a:latin typeface="Arial" panose="020B0604020202020204" pitchFamily="34" charset="0"/>
-              </a:defRPr>
-            </a:lvl7pPr>
-            <a:lvl8pPr marL="3429000" indent="-228600" eaLnBrk="0" fontAlgn="base" hangingPunct="0">
-              <a:spcBef>
-                <a:spcPct val="0"/>
-              </a:spcBef>
-              <a:spcAft>
-                <a:spcPct val="0"/>
-              </a:spcAft>
-              <a:defRPr>
-                <a:solidFill>
-                  <a:schemeClr val="tx1"/>
-                </a:solidFill>
-                <a:latin typeface="Arial" panose="020B0604020202020204" pitchFamily="34" charset="0"/>
-              </a:defRPr>
-            </a:lvl8pPr>
-            <a:lvl9pPr marL="3886200" indent="-228600" eaLnBrk="0" fontAlgn="base" hangingPunct="0">
-              <a:spcBef>
-                <a:spcPct val="0"/>
-              </a:spcBef>
-              <a:spcAft>
-                <a:spcPct val="0"/>
-              </a:spcAft>
-              <a:defRPr>
-                <a:solidFill>
-                  <a:schemeClr val="tx1"/>
-                </a:solidFill>
-                <a:latin typeface="Arial" panose="020B0604020202020204" pitchFamily="34" charset="0"/>
-              </a:defRPr>
-            </a:lvl9pPr>
-          </a:lstStyle>
-          <a:p>
-            <a:r>
-              <a:rPr lang="en-US" altLang="en-US" dirty="0"/>
-              <a:t>8/15/2024</a:t>
-            </a:r>
-          </a:p>
-        </p:txBody>
-      </p:sp>
-      <p:sp>
-        <p:nvSpPr>
-          <p:cNvPr id="111621" name="Footer Placeholder 9">
-            <a:extLst>
-              <a:ext uri="{FF2B5EF4-FFF2-40B4-BE49-F238E27FC236}">
-                <a16:creationId xmlns:a16="http://schemas.microsoft.com/office/drawing/2014/main" id="{29E24E40-4095-4AE0-9720-C6129EF39B7A}"/>
-              </a:ext>
-            </a:extLst>
-          </p:cNvPr>
-          <p:cNvSpPr>
-            <a:spLocks noGrp="1"/>
-          </p:cNvSpPr>
-          <p:nvPr>
-            <p:ph type="ftr" sz="quarter" idx="11"/>
-          </p:nvPr>
-        </p:nvSpPr>
-        <p:spPr bwMode="auto">
-          <a:noFill/>
-          <a:extLst>
-            <a:ext uri="{909E8E84-426E-40DD-AFC4-6F175D3DCCD1}">
-              <a14:hiddenFill xmlns:a14="http://schemas.microsoft.com/office/drawing/2010/main">
-                <a:solidFill>
-                  <a:srgbClr val="FFFFFF"/>
-                </a:solidFill>
-              </a14:hiddenFill>
-            </a:ext>
-            <a:ext uri="{91240B29-F687-4F45-9708-019B960494DF}">
-              <a14:hiddenLine xmlns:a14="http://schemas.microsoft.com/office/drawing/2010/main" w="9525">
-                <a:solidFill>
-                  <a:srgbClr val="000000"/>
-                </a:solidFill>
-                <a:miter lim="800000"/>
-                <a:headEnd/>
-                <a:tailEnd/>
-              </a14:hiddenLine>
-            </a:ext>
-          </a:extLst>
-        </p:spPr>
-        <p:txBody>
-          <a:bodyPr wrap="square" numCol="1" anchorCtr="0" compatLnSpc="1">
-            <a:prstTxWarp prst="textNoShape">
-              <a:avLst/>
-            </a:prstTxWarp>
-          </a:bodyPr>
-          <a:lstStyle>
-            <a:lvl1pPr>
-              <a:defRPr>
-                <a:solidFill>
-                  <a:schemeClr val="tx1"/>
-                </a:solidFill>
-                <a:latin typeface="Arial" panose="020B0604020202020204" pitchFamily="34" charset="0"/>
-              </a:defRPr>
-            </a:lvl1pPr>
-            <a:lvl2pPr marL="742950" indent="-285750">
-              <a:defRPr>
-                <a:solidFill>
-                  <a:schemeClr val="tx1"/>
-                </a:solidFill>
-                <a:latin typeface="Arial" panose="020B0604020202020204" pitchFamily="34" charset="0"/>
-              </a:defRPr>
-            </a:lvl2pPr>
-            <a:lvl3pPr marL="1143000" indent="-228600">
-              <a:defRPr>
-                <a:solidFill>
-                  <a:schemeClr val="tx1"/>
-                </a:solidFill>
-                <a:latin typeface="Arial" panose="020B0604020202020204" pitchFamily="34" charset="0"/>
-              </a:defRPr>
-            </a:lvl3pPr>
-            <a:lvl4pPr marL="1600200" indent="-228600">
-              <a:defRPr>
-                <a:solidFill>
-                  <a:schemeClr val="tx1"/>
-                </a:solidFill>
-                <a:latin typeface="Arial" panose="020B0604020202020204" pitchFamily="34" charset="0"/>
-              </a:defRPr>
-            </a:lvl4pPr>
-            <a:lvl5pPr marL="2057400" indent="-228600">
-              <a:defRPr>
-                <a:solidFill>
-                  <a:schemeClr val="tx1"/>
-                </a:solidFill>
-                <a:latin typeface="Arial" panose="020B0604020202020204" pitchFamily="34" charset="0"/>
-              </a:defRPr>
-            </a:lvl5pPr>
-            <a:lvl6pPr marL="2514600" indent="-228600" eaLnBrk="0" fontAlgn="base" hangingPunct="0">
-              <a:spcBef>
-                <a:spcPct val="0"/>
-              </a:spcBef>
-              <a:spcAft>
-                <a:spcPct val="0"/>
-              </a:spcAft>
-              <a:defRPr>
-                <a:solidFill>
-                  <a:schemeClr val="tx1"/>
-                </a:solidFill>
-                <a:latin typeface="Arial" panose="020B0604020202020204" pitchFamily="34" charset="0"/>
-              </a:defRPr>
-            </a:lvl6pPr>
-            <a:lvl7pPr marL="2971800" indent="-228600" eaLnBrk="0" fontAlgn="base" hangingPunct="0">
-              <a:spcBef>
-                <a:spcPct val="0"/>
-              </a:spcBef>
-              <a:spcAft>
-                <a:spcPct val="0"/>
-              </a:spcAft>
-              <a:defRPr>
-                <a:solidFill>
-                  <a:schemeClr val="tx1"/>
-                </a:solidFill>
-                <a:latin typeface="Arial" panose="020B0604020202020204" pitchFamily="34" charset="0"/>
-              </a:defRPr>
-            </a:lvl7pPr>
-            <a:lvl8pPr marL="3429000" indent="-228600" eaLnBrk="0" fontAlgn="base" hangingPunct="0">
-              <a:spcBef>
-                <a:spcPct val="0"/>
-              </a:spcBef>
-              <a:spcAft>
-                <a:spcPct val="0"/>
-              </a:spcAft>
-              <a:defRPr>
-                <a:solidFill>
-                  <a:schemeClr val="tx1"/>
-                </a:solidFill>
-                <a:latin typeface="Arial" panose="020B0604020202020204" pitchFamily="34" charset="0"/>
-              </a:defRPr>
-            </a:lvl8pPr>
-            <a:lvl9pPr marL="3886200" indent="-228600" eaLnBrk="0" fontAlgn="base" hangingPunct="0">
-              <a:spcBef>
-                <a:spcPct val="0"/>
-              </a:spcBef>
-              <a:spcAft>
-                <a:spcPct val="0"/>
-              </a:spcAft>
-              <a:defRPr>
-                <a:solidFill>
-                  <a:schemeClr val="tx1"/>
-                </a:solidFill>
-                <a:latin typeface="Arial" panose="020B0604020202020204" pitchFamily="34" charset="0"/>
-              </a:defRPr>
-            </a:lvl9pPr>
-          </a:lstStyle>
-          <a:p>
-            <a:r>
-              <a:rPr lang="en-US" altLang="en-US" dirty="0"/>
-              <a:t>MBE 713 FALL 2024         Instructor D.J. Die</a:t>
-            </a:r>
-          </a:p>
-        </p:txBody>
-      </p:sp>
     </p:spTree>
   </p:cSld>
   <p:clrMapOvr>
